--- a/docs/slides.pptx
+++ b/docs/slides.pptx
@@ -3407,7 +3407,7 @@
                 <a:ea typeface="Trebuchet MS" pitchFamily="34" charset="-122"/>
                 <a:cs typeface="Trebuchet MS" pitchFamily="34" charset="-120"/>
               </a:rPr>
-              <a:t>Test piramidi: 290 test fonksiyonu</a:t>
+              <a:t>Test piramidi: 306 test fonksiyonu</a:t>
             </a:r>
             <a:endParaRPr lang="en-US" sz="3200" dirty="0"/>
           </a:p>
@@ -3422,7 +3422,7 @@
         <p:spPr>
           <a:xfrm>
             <a:off x="548640" y="1920240"/>
-            <a:ext cx="2630359" cy="868680"/>
+            <a:ext cx="2598157" cy="868680"/>
           </a:xfrm>
           <a:prstGeom prst="roundRect">
             <a:avLst>
@@ -3444,7 +3444,7 @@
         <p:spPr>
           <a:xfrm>
             <a:off x="777240" y="1920240"/>
-            <a:ext cx="2356039" cy="868680"/>
+            <a:ext cx="2323837" cy="868680"/>
           </a:xfrm>
           <a:prstGeom prst="rect">
             <a:avLst/>
@@ -3496,7 +3496,7 @@
         </p:nvSpPr>
         <p:spPr>
           <a:xfrm>
-            <a:off x="3407599" y="1920240"/>
+            <a:off x="3375397" y="1920240"/>
             <a:ext cx="3840480" cy="868680"/>
           </a:xfrm>
           <a:prstGeom prst="rect">
@@ -3521,7 +3521,7 @@
                 <a:ea typeface="Calibri" pitchFamily="34" charset="-122"/>
                 <a:cs typeface="Calibri" pitchFamily="34" charset="-120"/>
               </a:rPr>
-              <a:t>Playwright · API + UI akışları (3 dosya)</a:t>
+              <a:t>Playwright · API + UI akışları (CI'da)</a:t>
             </a:r>
             <a:endParaRPr lang="en-US" sz="1250" dirty="0"/>
           </a:p>
@@ -3596,7 +3596,7 @@
                 <a:ea typeface="Trebuchet MS" pitchFamily="34" charset="-122"/>
                 <a:cs typeface="Trebuchet MS" pitchFamily="34" charset="-120"/>
               </a:rPr>
-              <a:t>141</a:t>
+              <a:t>145</a:t>
             </a:r>
             <a:endParaRPr lang="en-US" sz="1800" dirty="0"/>
           </a:p>
@@ -3650,7 +3650,7 @@
         <p:spPr>
           <a:xfrm>
             <a:off x="548640" y="4297680"/>
-            <a:ext cx="7252943" cy="868680"/>
+            <a:ext cx="7638078" cy="868680"/>
           </a:xfrm>
           <a:prstGeom prst="roundRect">
             <a:avLst>
@@ -3672,7 +3672,7 @@
         <p:spPr>
           <a:xfrm>
             <a:off x="777240" y="4297680"/>
-            <a:ext cx="6978623" cy="868680"/>
+            <a:ext cx="7363758" cy="868680"/>
           </a:xfrm>
           <a:prstGeom prst="rect">
             <a:avLst/>
@@ -3710,7 +3710,7 @@
                 <a:ea typeface="Trebuchet MS" pitchFamily="34" charset="-122"/>
                 <a:cs typeface="Trebuchet MS" pitchFamily="34" charset="-120"/>
               </a:rPr>
-              <a:t>124</a:t>
+              <a:t>136</a:t>
             </a:r>
             <a:endParaRPr lang="en-US" sz="1800" dirty="0"/>
           </a:p>
@@ -3724,7 +3724,7 @@
         </p:nvSpPr>
         <p:spPr>
           <a:xfrm>
-            <a:off x="8030183" y="4297680"/>
+            <a:off x="8415318" y="4297680"/>
             <a:ext cx="3840480" cy="868680"/>
           </a:xfrm>
           <a:prstGeom prst="rect">
@@ -3749,7 +3749,7 @@
                 <a:ea typeface="Calibri" pitchFamily="34" charset="-122"/>
                 <a:cs typeface="Calibri" pitchFamily="34" charset="-120"/>
               </a:rPr>
-              <a:t>servisler · yardımcılar · şema doğrulama</a:t>
+              <a:t>servisler · yardımcılar · şema · factory</a:t>
             </a:r>
             <a:endParaRPr lang="en-US" sz="1250" dirty="0"/>
           </a:p>
@@ -3957,7 +3957,7 @@
                 <a:ea typeface="Calibri" pitchFamily="34" charset="-122"/>
                 <a:cs typeface="Calibri" pitchFamily="34" charset="-120"/>
               </a:rPr>
-              <a:t>277 test geçer · 0 hata</a:t>
+              <a:t>293 test geçer · 0 hata</a:t>
             </a:r>
             <a:endParaRPr lang="en-US" sz="1300" dirty="0"/>
           </a:p>
@@ -3999,7 +3999,7 @@
                 <a:ea typeface="Calibri" pitchFamily="34" charset="-122"/>
                 <a:cs typeface="Calibri" pitchFamily="34" charset="-120"/>
               </a:rPr>
-              <a:t>Factory Boy + Faker ile test verisi · Postman 7 istek → Newman · öne çıkan: 409 çift-rezervasyon, iptal sonrası müsaitlik, ownership, ödeme/iletişim kalıcılığı.</a:t>
+              <a:t>Factory Boy + Faker (Room/Booking/Hotel/User) suite genelinde · Postman 7 istek → Newman · öne çıkan: 409 çakışma, iptal sonrası müsaitlik, ownership, kalıcılık.</a:t>
             </a:r>
             <a:endParaRPr lang="en-US" sz="1300" dirty="0"/>
           </a:p>
@@ -4243,7 +4243,7 @@
               <a:buNone/>
             </a:pPr>
             <a:r>
-              <a:rPr lang="en-US" sz="1250" dirty="0">
+              <a:rPr lang="en-US" sz="1200" dirty="0">
                 <a:solidFill>
                   <a:srgbClr val="CADCFC"/>
                 </a:solidFill>
@@ -4253,7 +4253,7 @@
               </a:rPr>
               <a:t>ruff (E·F·I)</a:t>
             </a:r>
-            <a:endParaRPr lang="en-US" sz="1250" dirty="0"/>
+            <a:endParaRPr lang="en-US" sz="1200" dirty="0"/>
           </a:p>
         </p:txBody>
       </p:sp>
@@ -4424,7 +4424,7 @@
               <a:buNone/>
             </a:pPr>
             <a:r>
-              <a:rPr lang="en-US" sz="1250" dirty="0">
+              <a:rPr lang="en-US" sz="1200" dirty="0">
                 <a:solidFill>
                   <a:srgbClr val="CADCFC"/>
                 </a:solidFill>
@@ -4434,7 +4434,7 @@
               </a:rPr>
               <a:t>pytest</a:t>
             </a:r>
-            <a:endParaRPr lang="en-US" sz="1250" dirty="0"/>
+            <a:endParaRPr lang="en-US" sz="1200" dirty="0"/>
           </a:p>
           <a:p>
             <a:pPr algn="ctr" indent="0" marL="0">
@@ -4444,7 +4444,7 @@
               <a:buNone/>
             </a:pPr>
             <a:r>
-              <a:rPr lang="en-US" sz="1250" dirty="0">
+              <a:rPr lang="en-US" sz="1200" dirty="0">
                 <a:solidFill>
                   <a:srgbClr val="CADCFC"/>
                 </a:solidFill>
@@ -4454,7 +4454,7 @@
               </a:rPr>
               <a:t>cov ≥70%</a:t>
             </a:r>
-            <a:endParaRPr lang="en-US" sz="1250" dirty="0"/>
+            <a:endParaRPr lang="en-US" sz="1200" dirty="0"/>
           </a:p>
         </p:txBody>
       </p:sp>
@@ -4625,7 +4625,7 @@
               <a:buNone/>
             </a:pPr>
             <a:r>
-              <a:rPr lang="en-US" sz="1250" dirty="0">
+              <a:rPr lang="en-US" sz="1200" dirty="0">
                 <a:solidFill>
                   <a:srgbClr val="CADCFC"/>
                 </a:solidFill>
@@ -4635,7 +4635,7 @@
               </a:rPr>
               <a:t>docker</a:t>
             </a:r>
-            <a:endParaRPr lang="en-US" sz="1250" dirty="0"/>
+            <a:endParaRPr lang="en-US" sz="1200" dirty="0"/>
           </a:p>
           <a:p>
             <a:pPr algn="ctr" indent="0" marL="0">
@@ -4645,7 +4645,7 @@
               <a:buNone/>
             </a:pPr>
             <a:r>
-              <a:rPr lang="en-US" sz="1250" dirty="0">
+              <a:rPr lang="en-US" sz="1200" dirty="0">
                 <a:solidFill>
                   <a:srgbClr val="CADCFC"/>
                 </a:solidFill>
@@ -4655,7 +4655,7 @@
               </a:rPr>
               <a:t>multi-stage</a:t>
             </a:r>
-            <a:endParaRPr lang="en-US" sz="1250" dirty="0"/>
+            <a:endParaRPr lang="en-US" sz="1200" dirty="0"/>
           </a:p>
         </p:txBody>
       </p:sp>
@@ -4826,7 +4826,7 @@
               <a:buNone/>
             </a:pPr>
             <a:r>
-              <a:rPr lang="en-US" sz="1250" dirty="0">
+              <a:rPr lang="en-US" sz="1200" dirty="0">
                 <a:solidFill>
                   <a:srgbClr val="0F2C44"/>
                 </a:solidFill>
@@ -4836,7 +4836,7 @@
               </a:rPr>
               <a:t>Minikube</a:t>
             </a:r>
-            <a:endParaRPr lang="en-US" sz="1250" dirty="0"/>
+            <a:endParaRPr lang="en-US" sz="1200" dirty="0"/>
           </a:p>
           <a:p>
             <a:pPr algn="ctr" indent="0" marL="0">
@@ -4846,7 +4846,7 @@
               <a:buNone/>
             </a:pPr>
             <a:r>
-              <a:rPr lang="en-US" sz="1250" dirty="0">
+              <a:rPr lang="en-US" sz="1200" dirty="0">
                 <a:solidFill>
                   <a:srgbClr val="0F2C44"/>
                 </a:solidFill>
@@ -4856,7 +4856,7 @@
               </a:rPr>
               <a:t>kubectl apply</a:t>
             </a:r>
-            <a:endParaRPr lang="en-US" sz="1250" dirty="0"/>
+            <a:endParaRPr lang="en-US" sz="1200" dirty="0"/>
           </a:p>
         </p:txBody>
       </p:sp>
@@ -5027,7 +5027,7 @@
               <a:buNone/>
             </a:pPr>
             <a:r>
-              <a:rPr lang="en-US" sz="1250" dirty="0">
+              <a:rPr lang="en-US" sz="1200" dirty="0">
                 <a:solidFill>
                   <a:srgbClr val="CADCFC"/>
                 </a:solidFill>
@@ -5035,9 +5035,9 @@
                 <a:ea typeface="Calibri" pitchFamily="34" charset="-122"/>
                 <a:cs typeface="Calibri" pitchFamily="34" charset="-120"/>
               </a:rPr>
-              <a:t>/health</a:t>
-            </a:r>
-            <a:endParaRPr lang="en-US" sz="1250" dirty="0"/>
+              <a:t>/health · Newman</a:t>
+            </a:r>
+            <a:endParaRPr lang="en-US" sz="1200" dirty="0"/>
           </a:p>
           <a:p>
             <a:pPr algn="ctr" indent="0" marL="0">
@@ -5047,7 +5047,7 @@
               <a:buNone/>
             </a:pPr>
             <a:r>
-              <a:rPr lang="en-US" sz="1250" dirty="0">
+              <a:rPr lang="en-US" sz="1200" dirty="0">
                 <a:solidFill>
                   <a:srgbClr val="CADCFC"/>
                 </a:solidFill>
@@ -5055,9 +5055,9 @@
                 <a:ea typeface="Calibri" pitchFamily="34" charset="-122"/>
                 <a:cs typeface="Calibri" pitchFamily="34" charset="-120"/>
               </a:rPr>
-              <a:t>Newman</a:t>
-            </a:r>
-            <a:endParaRPr lang="en-US" sz="1250" dirty="0"/>
+              <a:t>E2E · k6</a:t>
+            </a:r>
+            <a:endParaRPr lang="en-US" sz="1200" dirty="0"/>
           </a:p>
         </p:txBody>
       </p:sp>
@@ -5153,7 +5153,7 @@
                 <a:ea typeface="Calibri" pitchFamily="34" charset="-122"/>
                 <a:cs typeface="Calibri" pitchFamily="34" charset="-120"/>
               </a:rPr>
-              <a:t>Tüm repo ruff lint temiz · 277 test yeşil · build &amp; deploy demoda canlı gösterilir.</a:t>
+              <a:t>Tüm test piramidi otomatik: 293 unit+integration + 25 E2E (Playwright) + k6 p95&lt;500 regresyon kapısı · ruff lint temiz.</a:t>
             </a:r>
             <a:endParaRPr lang="en-US" sz="1300" dirty="0"/>
           </a:p>
@@ -6234,7 +6234,7 @@
                 <a:ea typeface="Trebuchet MS" pitchFamily="34" charset="-122"/>
                 <a:cs typeface="Trebuchet MS" pitchFamily="34" charset="-120"/>
               </a:rPr>
-              <a:t>277</a:t>
+              <a:t>293</a:t>
             </a:r>
             <a:endParaRPr lang="en-US" sz="3800" dirty="0"/>
           </a:p>
@@ -6342,7 +6342,7 @@
                 <a:ea typeface="Trebuchet MS" pitchFamily="34" charset="-122"/>
                 <a:cs typeface="Trebuchet MS" pitchFamily="34" charset="-120"/>
               </a:rPr>
-              <a:t>290</a:t>
+              <a:t>306</a:t>
             </a:r>
             <a:endParaRPr lang="en-US" sz="3800" dirty="0"/>
           </a:p>
@@ -6492,7 +6492,7 @@
                 <a:ea typeface="Calibri" pitchFamily="34" charset="-122"/>
                 <a:cs typeface="Calibri" pitchFamily="34" charset="-120"/>
               </a:rPr>
-              <a:t>k6 p95 latency (&lt;500 ms)</a:t>
+              <a:t>k6 p95 (&lt;500, CI kapısı)</a:t>
             </a:r>
             <a:endParaRPr lang="en-US" sz="1300" dirty="0"/>
           </a:p>
@@ -6666,7 +6666,7 @@
                 <a:ea typeface="Trebuchet MS" pitchFamily="34" charset="-122"/>
                 <a:cs typeface="Trebuchet MS" pitchFamily="34" charset="-120"/>
               </a:rPr>
-              <a:t>0%</a:t>
+              <a:t>25</a:t>
             </a:r>
             <a:endParaRPr lang="en-US" sz="3800" dirty="0"/>
           </a:p>
@@ -6708,7 +6708,7 @@
                 <a:ea typeface="Calibri" pitchFamily="34" charset="-122"/>
                 <a:cs typeface="Calibri" pitchFamily="34" charset="-120"/>
               </a:rPr>
-              <a:t>k6 hata oranı · 4756 istek</a:t>
+              <a:t>Playwright E2E (CI'da)</a:t>
             </a:r>
             <a:endParaRPr lang="en-US" sz="1300" dirty="0"/>
           </a:p>
@@ -7160,7 +7160,7 @@
                 <a:ea typeface="Calibri" pitchFamily="34" charset="-122"/>
                 <a:cs typeface="Calibri" pitchFamily="34" charset="-120"/>
               </a:rPr>
-              <a:t>Birim testte async/senkron mock ayrımı — AsyncMock'ın .add()'te coroutine sızdırması.
+              <a:t>Factory Boy + Faker — gerçekçi, bakımı kolay test verisi suite genelinde.
 </a:t>
             </a:r>
             <a:pPr indent="0" marL="0">
@@ -7287,7 +7287,7 @@
                 <a:ea typeface="Calibri" pitchFamily="34" charset="-122"/>
                 <a:cs typeface="Calibri" pitchFamily="34" charset="-120"/>
               </a:rPr>
-              <a:t>Test gürültüsü: OpenTelemetry'yi test ortamında kapatıp temiz çıktı almak.
+              <a:t>Test gürültüsü/dayanıklılık: OTel'i test'te kapatmak, LocalStack'i Docker yoksa skip etmek.
 </a:t>
             </a:r>
             <a:pPr indent="0" marL="0">
@@ -7308,7 +7308,7 @@
                 <a:ea typeface="Calibri" pitchFamily="34" charset="-122"/>
                 <a:cs typeface="Calibri" pitchFamily="34" charset="-120"/>
               </a:rPr>
-              <a:t>CI'da gerçek Minikube deploy: app açılışta migration koştuğu için PG'yi cluster içinde ayağa kaldırmak.</a:t>
+              <a:t>CI'da gerçek Minikube deploy + E2E/k6 otomasyonu (canlı stack + seed).</a:t>
             </a:r>
             <a:endParaRPr lang="en-US" sz="1600" dirty="0"/>
           </a:p>

--- a/docs/slides.pptx
+++ b/docs/slides.pptx
@@ -4,21 +4,22 @@
   <p:sldMasterIdLst>
     <p:sldMasterId id="2147483648" r:id="rId1"/>
   </p:sldMasterIdLst>
+  <p:notesMasterIdLst>
+    <p:notesMasterId r:id="rId11"/>
+  </p:notesMasterIdLst>
   <p:sldIdLst>
     <p:sldId id="256" r:id="rId2"/>
     <p:sldId id="257" r:id="rId3"/>
     <p:sldId id="258" r:id="rId4"/>
-    <p:sldId id="259" r:id="rId5"/>
-    <p:sldId id="260" r:id="rId6"/>
-    <p:sldId id="261" r:id="rId7"/>
-    <p:sldId id="262" r:id="rId8"/>
-    <p:sldId id="263" r:id="rId9"/>
+    <p:sldId id="264" r:id="rId5"/>
+    <p:sldId id="259" r:id="rId6"/>
+    <p:sldId id="260" r:id="rId7"/>
+    <p:sldId id="261" r:id="rId8"/>
+    <p:sldId id="262" r:id="rId9"/>
+    <p:sldId id="263" r:id="rId10"/>
   </p:sldIdLst>
-  <p:notesMasterIdLst>
-    <p:notesMasterId r:id="rId10"/>
-  </p:notesMasterIdLst>
-  <p:sldSz cx="12188952" cy="6858000"/>
-  <p:notesSz cx="6858000" cy="12188952"/>
+  <p:sldSz cx="12188825" cy="6858000"/>
+  <p:notesSz cx="6858000" cy="12188825"/>
   <p:defaultTextStyle>
     <a:lvl1pPr marL="0" algn="l" defTabSz="914400" rtl="0" eaLnBrk="1" latinLnBrk="0" hangingPunct="1">
       <a:defRPr sz="1800" kern="1200">
@@ -111,6 +112,11 @@
       </a:defRPr>
     </a:lvl9pPr>
   </p:defaultTextStyle>
+  <p:extLst>
+    <p:ext uri="{EFAFB233-063F-42B5-8137-9DF3F51BA10A}">
+      <p15:sldGuideLst xmlns:p15="http://schemas.microsoft.com/office/powerpoint/2012/main"/>
+    </p:ext>
+  </p:extLst>
 </p:presentation>
 </file>
 
@@ -136,234 +142,10 @@
           <a:chExt cx="0" cy="0"/>
         </a:xfrm>
       </p:grpSpPr>
-      <p:sp>
-        <p:nvSpPr>
-          <p:cNvPr id="2" name="Header Placeholder 1"/>
-          <p:cNvSpPr>
-            <a:spLocks noGrp="1"/>
-          </p:cNvSpPr>
-          <p:nvPr>
-            <p:ph type="hdr" sz="quarter"/>
-          </p:nvPr>
-        </p:nvSpPr>
-        <p:spPr>
-          <a:xfrm>
-            <a:off x="0" y="0"/>
-            <a:ext cx="2971800" cy="458788"/>
-          </a:xfrm>
-          <a:prstGeom prst="rect">
-            <a:avLst/>
-          </a:prstGeom>
-        </p:spPr>
-        <p:txBody>
-          <a:bodyPr vert="horz" lIns="91440" tIns="45720" rIns="91440" bIns="45720" rtlCol="0"/>
-          <a:lstStyle>
-            <a:lvl1pPr algn="l">
-              <a:defRPr sz="1200"/>
-            </a:lvl1pPr>
-          </a:lstStyle>
-          <a:p>
-            <a:endParaRPr lang="en-US"/>
-          </a:p>
-        </p:txBody>
-      </p:sp>
-      <p:sp>
-        <p:nvSpPr>
-          <p:cNvPr id="3" name="Date Placeholder 2"/>
-          <p:cNvSpPr>
-            <a:spLocks noGrp="1"/>
-          </p:cNvSpPr>
-          <p:nvPr>
-            <p:ph type="dt" idx="1"/>
-          </p:nvPr>
-        </p:nvSpPr>
-        <p:spPr>
-          <a:xfrm>
-            <a:off x="3884613" y="0"/>
-            <a:ext cx="2971800" cy="458788"/>
-          </a:xfrm>
-          <a:prstGeom prst="rect">
-            <a:avLst/>
-          </a:prstGeom>
-        </p:spPr>
-        <p:txBody>
-          <a:bodyPr vert="horz" lIns="91440" tIns="45720" rIns="91440" bIns="45720" rtlCol="0"/>
-          <a:lstStyle>
-            <a:lvl1pPr algn="r">
-              <a:defRPr sz="1200"/>
-            </a:lvl1pPr>
-          </a:lstStyle>
-          <a:p>
-            <a:fld id="{5282F153-3F37-0F45-9E97-73ACFA13230C}" type="datetimeFigureOut">
-              <a:rPr lang="en-US"/>
-              <a:t>7/23/19</a:t>
-            </a:fld>
-            <a:endParaRPr lang="en-US"/>
-          </a:p>
-        </p:txBody>
-      </p:sp>
-      <p:sp>
-        <p:nvSpPr>
-          <p:cNvPr id="4" name="Slide Image Placeholder 3"/>
-          <p:cNvSpPr>
-            <a:spLocks noGrp="1" noRot="1" noChangeAspect="1"/>
-          </p:cNvSpPr>
-          <p:nvPr>
-            <p:ph type="sldImg" idx="2"/>
-          </p:nvPr>
-        </p:nvSpPr>
-        <p:spPr>
-          <a:xfrm>
-            <a:off x="685800" y="1143000"/>
-            <a:ext cx="5486400" cy="3086100"/>
-          </a:xfrm>
-          <a:prstGeom prst="rect">
-            <a:avLst/>
-          </a:prstGeom>
-          <a:noFill/>
-          <a:ln w="12700">
-            <a:solidFill>
-              <a:prstClr val="black"/>
-            </a:solidFill>
-          </a:ln>
-        </p:spPr>
-        <p:txBody>
-          <a:bodyPr vert="horz" lIns="91440" tIns="45720" rIns="91440" bIns="45720" rtlCol="0" anchor="ctr"/>
-          <a:lstStyle/>
-          <a:p>
-            <a:endParaRPr lang="en-US"/>
-          </a:p>
-        </p:txBody>
-      </p:sp>
-      <p:sp>
-        <p:nvSpPr>
-          <p:cNvPr id="5" name="Notes Placeholder 4"/>
-          <p:cNvSpPr>
-            <a:spLocks noGrp="1"/>
-          </p:cNvSpPr>
-          <p:nvPr>
-            <p:ph type="body" sz="quarter" idx="3"/>
-          </p:nvPr>
-        </p:nvSpPr>
-        <p:spPr>
-          <a:xfrm>
-            <a:off x="685800" y="4400550"/>
-            <a:ext cx="5486400" cy="3600450"/>
-          </a:xfrm>
-          <a:prstGeom prst="rect">
-            <a:avLst/>
-          </a:prstGeom>
-        </p:spPr>
-        <p:txBody>
-          <a:bodyPr vert="horz" lIns="91440" tIns="45720" rIns="91440" bIns="45720" rtlCol="0"/>
-          <a:lstStyle/>
-          <a:p>
-            <a:pPr lvl="0"/>
-            <a:r>
-              <a:rPr lang="en-US"/>
-              <a:t>Click to edit Master text styles</a:t>
-            </a:r>
-          </a:p>
-          <a:p>
-            <a:pPr lvl="1"/>
-            <a:r>
-              <a:rPr lang="en-US"/>
-              <a:t>Second level</a:t>
-            </a:r>
-          </a:p>
-          <a:p>
-            <a:pPr lvl="2"/>
-            <a:r>
-              <a:rPr lang="en-US"/>
-              <a:t>Third level</a:t>
-            </a:r>
-          </a:p>
-          <a:p>
-            <a:pPr lvl="3"/>
-            <a:r>
-              <a:rPr lang="en-US"/>
-              <a:t>Fourth level</a:t>
-            </a:r>
-          </a:p>
-          <a:p>
-            <a:pPr lvl="4"/>
-            <a:r>
-              <a:rPr lang="en-US"/>
-              <a:t>Fifth level</a:t>
-            </a:r>
-          </a:p>
-        </p:txBody>
-      </p:sp>
-      <p:sp>
-        <p:nvSpPr>
-          <p:cNvPr id="6" name="Footer Placeholder 5"/>
-          <p:cNvSpPr>
-            <a:spLocks noGrp="1"/>
-          </p:cNvSpPr>
-          <p:nvPr>
-            <p:ph type="ftr" sz="quarter" idx="4"/>
-          </p:nvPr>
-        </p:nvSpPr>
-        <p:spPr>
-          <a:xfrm>
-            <a:off x="0" y="8685213"/>
-            <a:ext cx="2971800" cy="458787"/>
-          </a:xfrm>
-          <a:prstGeom prst="rect">
-            <a:avLst/>
-          </a:prstGeom>
-        </p:spPr>
-        <p:txBody>
-          <a:bodyPr vert="horz" lIns="91440" tIns="45720" rIns="91440" bIns="45720" rtlCol="0" anchor="b"/>
-          <a:lstStyle>
-            <a:lvl1pPr algn="l">
-              <a:defRPr sz="1200"/>
-            </a:lvl1pPr>
-          </a:lstStyle>
-          <a:p>
-            <a:endParaRPr lang="en-US"/>
-          </a:p>
-        </p:txBody>
-      </p:sp>
-      <p:sp>
-        <p:nvSpPr>
-          <p:cNvPr id="7" name="Slide Number Placeholder 6"/>
-          <p:cNvSpPr>
-            <a:spLocks noGrp="1"/>
-          </p:cNvSpPr>
-          <p:nvPr>
-            <p:ph type="sldNum" sz="quarter" idx="5"/>
-          </p:nvPr>
-        </p:nvSpPr>
-        <p:spPr>
-          <a:xfrm>
-            <a:off x="3884613" y="8685213"/>
-            <a:ext cx="2971800" cy="458787"/>
-          </a:xfrm>
-          <a:prstGeom prst="rect">
-            <a:avLst/>
-          </a:prstGeom>
-        </p:spPr>
-        <p:txBody>
-          <a:bodyPr vert="horz" lIns="91440" tIns="45720" rIns="91440" bIns="45720" rtlCol="0" anchor="b"/>
-          <a:lstStyle>
-            <a:lvl1pPr algn="r">
-              <a:defRPr sz="1200"/>
-            </a:lvl1pPr>
-          </a:lstStyle>
-          <a:p>
-            <a:fld id="{CE5E9CC1-C706-0F49-92D6-E571CC5EEA8F}" type="slidenum">
-              <a:rPr lang="en-US"/>
-              <a:t>‹#›</a:t>
-            </a:fld>
-            <a:endParaRPr lang="en-US"/>
-          </a:p>
-        </p:txBody>
-      </p:sp>
     </p:spTree>
     <p:extLst>
       <p:ext uri="{BB962C8B-B14F-4D97-AF65-F5344CB8AC3E}">
-        <p14:creationId xmlns:p14="http://schemas.microsoft.com/office/powerpoint/2010/main" val="1024086991"/>
+        <p14:creationId xmlns:p14="http://schemas.microsoft.com/office/powerpoint/2010/main" val="21789625"/>
       </p:ext>
     </p:extLst>
   </p:cSld>
@@ -507,10 +289,6 @@
           <a:bodyPr/>
           <a:lstStyle/>
           <a:p>
-            <a:r>
-              <a:rPr lang="en-US" dirty="0"/>
-              <a:t/>
-            </a:r>
             <a:endParaRPr lang="en-US" dirty="0"/>
           </a:p>
         </p:txBody>
@@ -595,10 +373,6 @@
           <a:bodyPr/>
           <a:lstStyle/>
           <a:p>
-            <a:r>
-              <a:rPr lang="en-US" dirty="0"/>
-              <a:t/>
-            </a:r>
             <a:endParaRPr lang="en-US" dirty="0"/>
           </a:p>
         </p:txBody>
@@ -683,10 +457,6 @@
           <a:bodyPr/>
           <a:lstStyle/>
           <a:p>
-            <a:r>
-              <a:rPr lang="en-US" dirty="0"/>
-              <a:t/>
-            </a:r>
             <a:endParaRPr lang="en-US" dirty="0"/>
           </a:p>
         </p:txBody>
@@ -771,10 +541,6 @@
           <a:bodyPr/>
           <a:lstStyle/>
           <a:p>
-            <a:r>
-              <a:rPr lang="en-US" dirty="0"/>
-              <a:t/>
-            </a:r>
             <a:endParaRPr lang="en-US" dirty="0"/>
           </a:p>
         </p:txBody>
@@ -796,7 +562,7 @@
           <a:p>
             <a:fld id="{F7021451-1387-4CA6-816F-3879F97B5CBC}" type="slidenum">
               <a:rPr lang="en-US"/>
-              <a:t>4</a:t>
+              <a:t>5</a:t>
             </a:fld>
             <a:endParaRPr lang="en-US"/>
           </a:p>
@@ -859,10 +625,6 @@
           <a:bodyPr/>
           <a:lstStyle/>
           <a:p>
-            <a:r>
-              <a:rPr lang="en-US" dirty="0"/>
-              <a:t/>
-            </a:r>
             <a:endParaRPr lang="en-US" dirty="0"/>
           </a:p>
         </p:txBody>
@@ -884,7 +646,7 @@
           <a:p>
             <a:fld id="{F7021451-1387-4CA6-816F-3879F97B5CBC}" type="slidenum">
               <a:rPr lang="en-US"/>
-              <a:t>5</a:t>
+              <a:t>6</a:t>
             </a:fld>
             <a:endParaRPr lang="en-US"/>
           </a:p>
@@ -947,10 +709,6 @@
           <a:bodyPr/>
           <a:lstStyle/>
           <a:p>
-            <a:r>
-              <a:rPr lang="en-US" dirty="0"/>
-              <a:t/>
-            </a:r>
             <a:endParaRPr lang="en-US" dirty="0"/>
           </a:p>
         </p:txBody>
@@ -972,7 +730,7 @@
           <a:p>
             <a:fld id="{F7021451-1387-4CA6-816F-3879F97B5CBC}" type="slidenum">
               <a:rPr lang="en-US"/>
-              <a:t>6</a:t>
+              <a:t>7</a:t>
             </a:fld>
             <a:endParaRPr lang="en-US"/>
           </a:p>
@@ -1035,10 +793,6 @@
           <a:bodyPr/>
           <a:lstStyle/>
           <a:p>
-            <a:r>
-              <a:rPr lang="en-US" dirty="0"/>
-              <a:t/>
-            </a:r>
             <a:endParaRPr lang="en-US" dirty="0"/>
           </a:p>
         </p:txBody>
@@ -1060,7 +814,7 @@
           <a:p>
             <a:fld id="{F7021451-1387-4CA6-816F-3879F97B5CBC}" type="slidenum">
               <a:rPr lang="en-US"/>
-              <a:t>7</a:t>
+              <a:t>8</a:t>
             </a:fld>
             <a:endParaRPr lang="en-US"/>
           </a:p>
@@ -1123,10 +877,6 @@
           <a:bodyPr/>
           <a:lstStyle/>
           <a:p>
-            <a:r>
-              <a:rPr lang="en-US" dirty="0"/>
-              <a:t/>
-            </a:r>
             <a:endParaRPr lang="en-US" dirty="0"/>
           </a:p>
         </p:txBody>
@@ -1148,7 +898,7 @@
           <a:p>
             <a:fld id="{F7021451-1387-4CA6-816F-3879F97B5CBC}" type="slidenum">
               <a:rPr lang="en-US"/>
-              <a:t>8</a:t>
+              <a:t>9</a:t>
             </a:fld>
             <a:endParaRPr lang="en-US"/>
           </a:p>
@@ -1200,6 +950,11 @@
 <file path=ppt/slideMasters/slideMaster1.xml><?xml version="1.0" encoding="utf-8"?>
 <p:sldMaster xmlns:a="http://schemas.openxmlformats.org/drawingml/2006/main" xmlns:r="http://schemas.openxmlformats.org/officeDocument/2006/relationships" xmlns:p="http://schemas.openxmlformats.org/presentationml/2006/main">
   <p:cSld>
+    <p:bg>
+      <p:bgRef idx="1001">
+        <a:schemeClr val="bg1"/>
+      </p:bgRef>
+    </p:bg>
     <p:spTree>
       <p:nvGrpSpPr>
         <p:cNvPr id="1" name=""/>
@@ -1482,6 +1237,7 @@
         <a:solidFill>
           <a:srgbClr val="0F2C44"/>
         </a:solidFill>
+        <a:effectLst/>
       </p:bgPr>
     </p:bg>
     <p:spTree>
@@ -1517,6 +1273,13 @@
           </a:solidFill>
           <a:ln/>
         </p:spPr>
+        <p:txBody>
+          <a:bodyPr/>
+          <a:lstStyle/>
+          <a:p>
+            <a:endParaRPr lang="tr-TR"/>
+          </a:p>
+        </p:txBody>
       </p:sp>
       <p:sp>
         <p:nvSpPr>
@@ -1539,6 +1302,13 @@
           </a:solidFill>
           <a:ln/>
         </p:spPr>
+        <p:txBody>
+          <a:bodyPr/>
+          <a:lstStyle/>
+          <a:p>
+            <a:endParaRPr lang="tr-TR"/>
+          </a:p>
+        </p:txBody>
       </p:sp>
       <p:sp>
         <p:nvSpPr>
@@ -1561,7 +1331,7 @@
           <a:bodyPr wrap="square" rtlCol="0" anchor="ctr"/>
           <a:lstStyle/>
           <a:p>
-            <a:pPr algn="ctr" indent="0" marL="0">
+            <a:pPr marL="0" indent="0" algn="ctr">
               <a:buNone/>
             </a:pPr>
             <a:r>
@@ -1600,7 +1370,7 @@
           <a:bodyPr wrap="square" rtlCol="0" anchor="ctr"/>
           <a:lstStyle/>
           <a:p>
-            <a:pPr indent="0" marL="0">
+            <a:pPr marL="0" indent="0">
               <a:buNone/>
             </a:pPr>
             <a:r>
@@ -1639,7 +1409,7 @@
           <a:bodyPr wrap="square" rtlCol="0" anchor="ctr"/>
           <a:lstStyle/>
           <a:p>
-            <a:pPr indent="0" marL="0">
+            <a:pPr marL="0" indent="0">
               <a:buNone/>
             </a:pPr>
             <a:r>
@@ -1679,6 +1449,13 @@
             <a:prstDash val="solid"/>
           </a:ln>
         </p:spPr>
+        <p:txBody>
+          <a:bodyPr/>
+          <a:lstStyle/>
+          <a:p>
+            <a:endParaRPr lang="tr-TR"/>
+          </a:p>
+        </p:txBody>
       </p:sp>
       <p:sp>
         <p:nvSpPr>
@@ -1701,7 +1478,7 @@
           <a:bodyPr wrap="square" rtlCol="0" anchor="ctr"/>
           <a:lstStyle/>
           <a:p>
-            <a:pPr indent="0" marL="0">
+            <a:pPr marL="0" indent="0">
               <a:lnSpc>
                 <a:spcPct val="120000"/>
               </a:lnSpc>
@@ -1719,12 +1496,6 @@
               <a:t>MTH2526-B25 — Bulut Mimarilerinde Test Mühendisliği
 </a:t>
             </a:r>
-            <a:pPr indent="0" marL="0">
-              <a:lnSpc>
-                <a:spcPct val="120000"/>
-              </a:lnSpc>
-              <a:buNone/>
-            </a:pPr>
             <a:r>
               <a:rPr lang="en-US" sz="1600" dirty="0">
                 <a:solidFill>
@@ -1737,12 +1508,6 @@
               <a:t>Marmara Üniversitesi · 2025–2026 Bahar
 </a:t>
             </a:r>
-            <a:pPr indent="0" marL="0">
-              <a:lnSpc>
-                <a:spcPct val="120000"/>
-              </a:lnSpc>
-              <a:buNone/>
-            </a:pPr>
             <a:r>
               <a:rPr lang="en-US" sz="1600" b="1" dirty="0">
                 <a:solidFill>
@@ -1774,6 +1539,7 @@
         <a:solidFill>
           <a:srgbClr val="FFFFFF"/>
         </a:solidFill>
+        <a:effectLst/>
       </p:bgPr>
     </p:bg>
     <p:spTree>
@@ -1811,11 +1577,11 @@
           <a:bodyPr wrap="square" rtlCol="0" anchor="ctr"/>
           <a:lstStyle/>
           <a:p>
-            <a:pPr indent="0" marL="0">
-              <a:buNone/>
-            </a:pPr>
-            <a:r>
-              <a:rPr lang="en-US" sz="1200" b="1" spc="200" kern="0" dirty="0">
+            <a:pPr marL="0" indent="0">
+              <a:buNone/>
+            </a:pPr>
+            <a:r>
+              <a:rPr lang="en-US" sz="1200" b="1" kern="0" spc="200" dirty="0">
                 <a:solidFill>
                   <a:srgbClr val="02C39A"/>
                 </a:solidFill>
@@ -1850,7 +1616,7 @@
           <a:bodyPr wrap="square" rtlCol="0" anchor="ctr"/>
           <a:lstStyle/>
           <a:p>
-            <a:pPr indent="0" marL="0">
+            <a:pPr marL="0" indent="0">
               <a:buNone/>
             </a:pPr>
             <a:r>
@@ -1894,13 +1660,20 @@
             <a:prstDash val="solid"/>
           </a:ln>
           <a:effectLst>
-            <a:outerShdw sx="100000" sy="100000" kx="0" ky="0" algn="bl" rotWithShape="0" blurRad="76200" dist="25400" dir="5400000">
+            <a:outerShdw blurRad="76200" dist="25400" dir="5400000" algn="bl" rotWithShape="0">
               <a:srgbClr val="9AB0BF">
                 <a:alpha val="25000"/>
               </a:srgbClr>
             </a:outerShdw>
           </a:effectLst>
         </p:spPr>
+        <p:txBody>
+          <a:bodyPr/>
+          <a:lstStyle/>
+          <a:p>
+            <a:endParaRPr lang="tr-TR"/>
+          </a:p>
+        </p:txBody>
       </p:sp>
       <p:sp>
         <p:nvSpPr>
@@ -1923,11 +1696,11 @@
           <a:bodyPr wrap="square" rtlCol="0" anchor="ctr"/>
           <a:lstStyle/>
           <a:p>
-            <a:pPr indent="0" marL="0">
-              <a:buNone/>
-            </a:pPr>
-            <a:r>
-              <a:rPr lang="en-US" sz="1300" b="1" spc="100" kern="0" dirty="0">
+            <a:pPr marL="0" indent="0">
+              <a:buNone/>
+            </a:pPr>
+            <a:r>
+              <a:rPr lang="en-US" sz="1300" b="1" kern="0" spc="100" dirty="0">
                 <a:solidFill>
                   <a:srgbClr val="1C7293"/>
                 </a:solidFill>
@@ -1982,48 +1755,8 @@
                 <a:cs typeface="Calibri" pitchFamily="34" charset="-120"/>
               </a:rPr>
               <a:t>Otel rezervasyonunda müsaitlik, çakışma ve onay belgesi kritiktir.
-</a:t>
-            </a:r>
-            <a:pPr indent="0" marL="0">
-              <a:lnSpc>
-                <a:spcPct val="115000"/>
-              </a:lnSpc>
-              <a:spcAft>
-                <a:spcPts val="800"/>
-              </a:spcAft>
-              <a:buNone/>
-            </a:pPr>
-            <a:r>
-              <a:rPr lang="en-US" sz="1600" dirty="0">
-                <a:solidFill>
-                  <a:srgbClr val="22303C"/>
-                </a:solidFill>
-                <a:latin typeface="Calibri" pitchFamily="34" charset="0"/>
-                <a:ea typeface="Calibri" pitchFamily="34" charset="-122"/>
-                <a:cs typeface="Calibri" pitchFamily="34" charset="-120"/>
-              </a:rPr>
-              <a:t>Aynı oda/tarih çift-rezervasyonu, hatalı durum geçişleri ve sessiz veri kaybı production'da pahalıdır.
-</a:t>
-            </a:r>
-            <a:pPr indent="0" marL="0">
-              <a:lnSpc>
-                <a:spcPct val="115000"/>
-              </a:lnSpc>
-              <a:spcAft>
-                <a:spcPts val="800"/>
-              </a:spcAft>
-              <a:buNone/>
-            </a:pPr>
-            <a:r>
-              <a:rPr lang="en-US" sz="1600" dirty="0">
-                <a:solidFill>
-                  <a:srgbClr val="22303C"/>
-                </a:solidFill>
-                <a:latin typeface="Calibri" pitchFamily="34" charset="0"/>
-                <a:ea typeface="Calibri" pitchFamily="34" charset="-122"/>
-                <a:cs typeface="Calibri" pitchFamily="34" charset="-120"/>
-              </a:rPr>
-              <a:t>Manuel test ölçeklenmez → otomasyon ve gözlemlenebilirlik şarttır.</a:t>
+Aynı oda/tarih çift-rezervasyonu, hatalı durum geçişleri ve sessiz veri kaybı production'da pahalıdır.
+Manuel test ölçeklenmez → otomasyon ve gözlemlenebilirlik şarttır.</a:t>
             </a:r>
             <a:endParaRPr lang="en-US" sz="1600" dirty="0"/>
           </a:p>
@@ -2050,13 +1783,20 @@
           </a:solidFill>
           <a:ln/>
           <a:effectLst>
-            <a:outerShdw sx="100000" sy="100000" kx="0" ky="0" algn="bl" rotWithShape="0" blurRad="76200" dist="25400" dir="5400000">
+            <a:outerShdw blurRad="76200" dist="25400" dir="5400000" algn="bl" rotWithShape="0">
               <a:srgbClr val="9AB0BF">
                 <a:alpha val="25000"/>
               </a:srgbClr>
             </a:outerShdw>
           </a:effectLst>
         </p:spPr>
+        <p:txBody>
+          <a:bodyPr/>
+          <a:lstStyle/>
+          <a:p>
+            <a:endParaRPr lang="tr-TR"/>
+          </a:p>
+        </p:txBody>
       </p:sp>
       <p:sp>
         <p:nvSpPr>
@@ -2079,11 +1819,11 @@
           <a:bodyPr wrap="square" rtlCol="0" anchor="ctr"/>
           <a:lstStyle/>
           <a:p>
-            <a:pPr indent="0" marL="0">
-              <a:buNone/>
-            </a:pPr>
-            <a:r>
-              <a:rPr lang="en-US" sz="1300" b="1" spc="100" kern="0" dirty="0">
+            <a:pPr marL="0" indent="0">
+              <a:buNone/>
+            </a:pPr>
+            <a:r>
+              <a:rPr lang="en-US" sz="1300" b="1" kern="0" spc="100" dirty="0">
                 <a:solidFill>
                   <a:srgbClr val="02C39A"/>
                 </a:solidFill>
@@ -2138,48 +1878,8 @@
                 <a:cs typeface="Calibri" pitchFamily="34" charset="-120"/>
               </a:rPr>
               <a:t>Otel/oda ara, müsaitlik kontrol et, rezervasyon oluştur · güncelle · iptal et.
-</a:t>
-            </a:r>
-            <a:pPr indent="0" marL="0">
-              <a:lnSpc>
-                <a:spcPct val="115000"/>
-              </a:lnSpc>
-              <a:spcAft>
-                <a:spcPts val="800"/>
-              </a:spcAft>
-              <a:buNone/>
-            </a:pPr>
-            <a:r>
-              <a:rPr lang="en-US" sz="1600" dirty="0">
-                <a:solidFill>
-                  <a:srgbClr val="FFFFFF"/>
-                </a:solidFill>
-                <a:latin typeface="Calibri" pitchFamily="34" charset="0"/>
-                <a:ea typeface="Calibri" pitchFamily="34" charset="-122"/>
-                <a:cs typeface="Calibri" pitchFamily="34" charset="-120"/>
-              </a:rPr>
-              <a:t>Onay belgesi LocalStack S3'e yazılır; auth, favoriler, ödeme ve iletişim uçları kalıcıdır.
-</a:t>
-            </a:r>
-            <a:pPr indent="0" marL="0">
-              <a:lnSpc>
-                <a:spcPct val="115000"/>
-              </a:lnSpc>
-              <a:spcAft>
-                <a:spcPts val="800"/>
-              </a:spcAft>
-              <a:buNone/>
-            </a:pPr>
-            <a:r>
-              <a:rPr lang="en-US" sz="1600" dirty="0">
-                <a:solidFill>
-                  <a:srgbClr val="FFFFFF"/>
-                </a:solidFill>
-                <a:latin typeface="Calibri" pitchFamily="34" charset="0"/>
-                <a:ea typeface="Calibri" pitchFamily="34" charset="-122"/>
-                <a:cs typeface="Calibri" pitchFamily="34" charset="-120"/>
-              </a:rPr>
-              <a:t>Basit React UI üzerinden tam test / deploy / monitoring yığını.</a:t>
+Onay belgesi LocalStack S3'e yazılır; auth, favoriler, ödeme ve iletişim uçları kalıcıdır.
+Basit React UI üzerinden tam test / deploy / monitoring yığını.</a:t>
             </a:r>
             <a:endParaRPr lang="en-US" sz="1600" dirty="0"/>
           </a:p>
@@ -2206,7 +1906,7 @@
           <a:bodyPr wrap="square" rtlCol="0" anchor="ctr"/>
           <a:lstStyle/>
           <a:p>
-            <a:pPr indent="0" marL="0">
+            <a:pPr marL="0" indent="0">
               <a:buNone/>
             </a:pPr>
             <a:r>
@@ -2240,6 +1940,7 @@
         <a:solidFill>
           <a:srgbClr val="FFFFFF"/>
         </a:solidFill>
+        <a:effectLst/>
       </p:bgPr>
     </p:bg>
     <p:spTree>
@@ -2277,11 +1978,11 @@
           <a:bodyPr wrap="square" rtlCol="0" anchor="ctr"/>
           <a:lstStyle/>
           <a:p>
-            <a:pPr indent="0" marL="0">
-              <a:buNone/>
-            </a:pPr>
-            <a:r>
-              <a:rPr lang="en-US" sz="1200" b="1" spc="200" kern="0" dirty="0">
+            <a:pPr marL="0" indent="0">
+              <a:buNone/>
+            </a:pPr>
+            <a:r>
+              <a:rPr lang="en-US" sz="1200" b="1" kern="0" spc="200" dirty="0">
                 <a:solidFill>
                   <a:srgbClr val="02C39A"/>
                 </a:solidFill>
@@ -2316,7 +2017,7 @@
           <a:bodyPr wrap="square" rtlCol="0" anchor="ctr"/>
           <a:lstStyle/>
           <a:p>
-            <a:pPr indent="0" marL="0">
+            <a:pPr marL="0" indent="0">
               <a:buNone/>
             </a:pPr>
             <a:r>
@@ -2360,13 +2061,20 @@
             <a:prstDash val="solid"/>
           </a:ln>
           <a:effectLst>
-            <a:outerShdw sx="100000" sy="100000" kx="0" ky="0" algn="bl" rotWithShape="0" blurRad="76200" dist="25400" dir="5400000">
+            <a:outerShdw blurRad="76200" dist="25400" dir="5400000" algn="bl" rotWithShape="0">
               <a:srgbClr val="9AB0BF">
                 <a:alpha val="25000"/>
               </a:srgbClr>
             </a:outerShdw>
           </a:effectLst>
         </p:spPr>
+        <p:txBody>
+          <a:bodyPr/>
+          <a:lstStyle/>
+          <a:p>
+            <a:endParaRPr lang="tr-TR"/>
+          </a:p>
+        </p:txBody>
       </p:sp>
       <p:sp>
         <p:nvSpPr>
@@ -2387,6 +2095,13 @@
           </a:solidFill>
           <a:ln/>
         </p:spPr>
+        <p:txBody>
+          <a:bodyPr/>
+          <a:lstStyle/>
+          <a:p>
+            <a:endParaRPr lang="tr-TR"/>
+          </a:p>
+        </p:txBody>
       </p:sp>
       <p:sp>
         <p:nvSpPr>
@@ -2409,7 +2124,7 @@
           <a:bodyPr wrap="square" rtlCol="0" anchor="ctr"/>
           <a:lstStyle/>
           <a:p>
-            <a:pPr indent="0" marL="0">
+            <a:pPr marL="0" indent="0">
               <a:buNone/>
             </a:pPr>
             <a:r>
@@ -2448,7 +2163,7 @@
           <a:bodyPr wrap="square" rtlCol="0" anchor="ctr"/>
           <a:lstStyle/>
           <a:p>
-            <a:pPr indent="0" marL="0">
+            <a:pPr marL="0" indent="0">
               <a:lnSpc>
                 <a:spcPct val="110000"/>
               </a:lnSpc>
@@ -2468,7 +2183,7 @@
             <a:endParaRPr lang="en-US" sz="1250" dirty="0"/>
           </a:p>
           <a:p>
-            <a:pPr indent="0" marL="0">
+            <a:pPr marL="0" indent="0">
               <a:lnSpc>
                 <a:spcPct val="110000"/>
               </a:lnSpc>
@@ -2515,13 +2230,20 @@
             <a:prstDash val="solid"/>
           </a:ln>
           <a:effectLst>
-            <a:outerShdw sx="100000" sy="100000" kx="0" ky="0" algn="bl" rotWithShape="0" blurRad="76200" dist="25400" dir="5400000">
+            <a:outerShdw blurRad="76200" dist="25400" dir="5400000" algn="bl" rotWithShape="0">
               <a:srgbClr val="9AB0BF">
                 <a:alpha val="25000"/>
               </a:srgbClr>
             </a:outerShdw>
           </a:effectLst>
         </p:spPr>
+        <p:txBody>
+          <a:bodyPr/>
+          <a:lstStyle/>
+          <a:p>
+            <a:endParaRPr lang="tr-TR"/>
+          </a:p>
+        </p:txBody>
       </p:sp>
       <p:sp>
         <p:nvSpPr>
@@ -2542,6 +2264,13 @@
           </a:solidFill>
           <a:ln/>
         </p:spPr>
+        <p:txBody>
+          <a:bodyPr/>
+          <a:lstStyle/>
+          <a:p>
+            <a:endParaRPr lang="tr-TR"/>
+          </a:p>
+        </p:txBody>
       </p:sp>
       <p:sp>
         <p:nvSpPr>
@@ -2564,7 +2293,7 @@
           <a:bodyPr wrap="square" rtlCol="0" anchor="ctr"/>
           <a:lstStyle/>
           <a:p>
-            <a:pPr indent="0" marL="0">
+            <a:pPr marL="0" indent="0">
               <a:buNone/>
             </a:pPr>
             <a:r>
@@ -2603,7 +2332,7 @@
           <a:bodyPr wrap="square" rtlCol="0" anchor="ctr"/>
           <a:lstStyle/>
           <a:p>
-            <a:pPr indent="0" marL="0">
+            <a:pPr marL="0" indent="0">
               <a:lnSpc>
                 <a:spcPct val="110000"/>
               </a:lnSpc>
@@ -2623,7 +2352,7 @@
             <a:endParaRPr lang="en-US" sz="1250" dirty="0"/>
           </a:p>
           <a:p>
-            <a:pPr indent="0" marL="0">
+            <a:pPr marL="0" indent="0">
               <a:lnSpc>
                 <a:spcPct val="110000"/>
               </a:lnSpc>
@@ -2670,13 +2399,20 @@
             <a:prstDash val="solid"/>
           </a:ln>
           <a:effectLst>
-            <a:outerShdw sx="100000" sy="100000" kx="0" ky="0" algn="bl" rotWithShape="0" blurRad="76200" dist="25400" dir="5400000">
+            <a:outerShdw blurRad="76200" dist="25400" dir="5400000" algn="bl" rotWithShape="0">
               <a:srgbClr val="9AB0BF">
                 <a:alpha val="25000"/>
               </a:srgbClr>
             </a:outerShdw>
           </a:effectLst>
         </p:spPr>
+        <p:txBody>
+          <a:bodyPr/>
+          <a:lstStyle/>
+          <a:p>
+            <a:endParaRPr lang="tr-TR"/>
+          </a:p>
+        </p:txBody>
       </p:sp>
       <p:sp>
         <p:nvSpPr>
@@ -2697,6 +2433,13 @@
           </a:solidFill>
           <a:ln/>
         </p:spPr>
+        <p:txBody>
+          <a:bodyPr/>
+          <a:lstStyle/>
+          <a:p>
+            <a:endParaRPr lang="tr-TR"/>
+          </a:p>
+        </p:txBody>
       </p:sp>
       <p:sp>
         <p:nvSpPr>
@@ -2719,7 +2462,7 @@
           <a:bodyPr wrap="square" rtlCol="0" anchor="ctr"/>
           <a:lstStyle/>
           <a:p>
-            <a:pPr indent="0" marL="0">
+            <a:pPr marL="0" indent="0">
               <a:buNone/>
             </a:pPr>
             <a:r>
@@ -2758,7 +2501,7 @@
           <a:bodyPr wrap="square" rtlCol="0" anchor="ctr"/>
           <a:lstStyle/>
           <a:p>
-            <a:pPr indent="0" marL="0">
+            <a:pPr marL="0" indent="0">
               <a:lnSpc>
                 <a:spcPct val="110000"/>
               </a:lnSpc>
@@ -2778,7 +2521,7 @@
             <a:endParaRPr lang="en-US" sz="1250" dirty="0"/>
           </a:p>
           <a:p>
-            <a:pPr indent="0" marL="0">
+            <a:pPr marL="0" indent="0">
               <a:lnSpc>
                 <a:spcPct val="110000"/>
               </a:lnSpc>
@@ -2825,13 +2568,20 @@
             <a:prstDash val="solid"/>
           </a:ln>
           <a:effectLst>
-            <a:outerShdw sx="100000" sy="100000" kx="0" ky="0" algn="bl" rotWithShape="0" blurRad="76200" dist="25400" dir="5400000">
+            <a:outerShdw blurRad="76200" dist="25400" dir="5400000" algn="bl" rotWithShape="0">
               <a:srgbClr val="9AB0BF">
                 <a:alpha val="25000"/>
               </a:srgbClr>
             </a:outerShdw>
           </a:effectLst>
         </p:spPr>
+        <p:txBody>
+          <a:bodyPr/>
+          <a:lstStyle/>
+          <a:p>
+            <a:endParaRPr lang="tr-TR"/>
+          </a:p>
+        </p:txBody>
       </p:sp>
       <p:sp>
         <p:nvSpPr>
@@ -2852,6 +2602,13 @@
           </a:solidFill>
           <a:ln/>
         </p:spPr>
+        <p:txBody>
+          <a:bodyPr/>
+          <a:lstStyle/>
+          <a:p>
+            <a:endParaRPr lang="tr-TR"/>
+          </a:p>
+        </p:txBody>
       </p:sp>
       <p:sp>
         <p:nvSpPr>
@@ -2874,7 +2631,7 @@
           <a:bodyPr wrap="square" rtlCol="0" anchor="ctr"/>
           <a:lstStyle/>
           <a:p>
-            <a:pPr indent="0" marL="0">
+            <a:pPr marL="0" indent="0">
               <a:buNone/>
             </a:pPr>
             <a:r>
@@ -2913,7 +2670,7 @@
           <a:bodyPr wrap="square" rtlCol="0" anchor="ctr"/>
           <a:lstStyle/>
           <a:p>
-            <a:pPr indent="0" marL="0">
+            <a:pPr marL="0" indent="0">
               <a:lnSpc>
                 <a:spcPct val="110000"/>
               </a:lnSpc>
@@ -2933,7 +2690,7 @@
             <a:endParaRPr lang="en-US" sz="1250" dirty="0"/>
           </a:p>
           <a:p>
-            <a:pPr indent="0" marL="0">
+            <a:pPr marL="0" indent="0">
               <a:lnSpc>
                 <a:spcPct val="110000"/>
               </a:lnSpc>
@@ -2980,13 +2737,20 @@
             <a:prstDash val="solid"/>
           </a:ln>
           <a:effectLst>
-            <a:outerShdw sx="100000" sy="100000" kx="0" ky="0" algn="bl" rotWithShape="0" blurRad="76200" dist="25400" dir="5400000">
+            <a:outerShdw blurRad="76200" dist="25400" dir="5400000" algn="bl" rotWithShape="0">
               <a:srgbClr val="9AB0BF">
                 <a:alpha val="25000"/>
               </a:srgbClr>
             </a:outerShdw>
           </a:effectLst>
         </p:spPr>
+        <p:txBody>
+          <a:bodyPr/>
+          <a:lstStyle/>
+          <a:p>
+            <a:endParaRPr lang="tr-TR"/>
+          </a:p>
+        </p:txBody>
       </p:sp>
       <p:sp>
         <p:nvSpPr>
@@ -3007,6 +2771,13 @@
           </a:solidFill>
           <a:ln/>
         </p:spPr>
+        <p:txBody>
+          <a:bodyPr/>
+          <a:lstStyle/>
+          <a:p>
+            <a:endParaRPr lang="tr-TR"/>
+          </a:p>
+        </p:txBody>
       </p:sp>
       <p:sp>
         <p:nvSpPr>
@@ -3029,7 +2800,7 @@
           <a:bodyPr wrap="square" rtlCol="0" anchor="ctr"/>
           <a:lstStyle/>
           <a:p>
-            <a:pPr indent="0" marL="0">
+            <a:pPr marL="0" indent="0">
               <a:buNone/>
             </a:pPr>
             <a:r>
@@ -3068,7 +2839,7 @@
           <a:bodyPr wrap="square" rtlCol="0" anchor="ctr"/>
           <a:lstStyle/>
           <a:p>
-            <a:pPr indent="0" marL="0">
+            <a:pPr marL="0" indent="0">
               <a:lnSpc>
                 <a:spcPct val="110000"/>
               </a:lnSpc>
@@ -3088,7 +2859,7 @@
             <a:endParaRPr lang="en-US" sz="1250" dirty="0"/>
           </a:p>
           <a:p>
-            <a:pPr indent="0" marL="0">
+            <a:pPr marL="0" indent="0">
               <a:lnSpc>
                 <a:spcPct val="110000"/>
               </a:lnSpc>
@@ -3135,13 +2906,20 @@
             <a:prstDash val="solid"/>
           </a:ln>
           <a:effectLst>
-            <a:outerShdw sx="100000" sy="100000" kx="0" ky="0" algn="bl" rotWithShape="0" blurRad="76200" dist="25400" dir="5400000">
+            <a:outerShdw blurRad="76200" dist="25400" dir="5400000" algn="bl" rotWithShape="0">
               <a:srgbClr val="9AB0BF">
                 <a:alpha val="25000"/>
               </a:srgbClr>
             </a:outerShdw>
           </a:effectLst>
         </p:spPr>
+        <p:txBody>
+          <a:bodyPr/>
+          <a:lstStyle/>
+          <a:p>
+            <a:endParaRPr lang="tr-TR"/>
+          </a:p>
+        </p:txBody>
       </p:sp>
       <p:sp>
         <p:nvSpPr>
@@ -3162,6 +2940,13 @@
           </a:solidFill>
           <a:ln/>
         </p:spPr>
+        <p:txBody>
+          <a:bodyPr/>
+          <a:lstStyle/>
+          <a:p>
+            <a:endParaRPr lang="tr-TR"/>
+          </a:p>
+        </p:txBody>
       </p:sp>
       <p:sp>
         <p:nvSpPr>
@@ -3184,7 +2969,7 @@
           <a:bodyPr wrap="square" rtlCol="0" anchor="ctr"/>
           <a:lstStyle/>
           <a:p>
-            <a:pPr indent="0" marL="0">
+            <a:pPr marL="0" indent="0">
               <a:buNone/>
             </a:pPr>
             <a:r>
@@ -3223,7 +3008,7 @@
           <a:bodyPr wrap="square" rtlCol="0" anchor="ctr"/>
           <a:lstStyle/>
           <a:p>
-            <a:pPr indent="0" marL="0">
+            <a:pPr marL="0" indent="0">
               <a:lnSpc>
                 <a:spcPct val="110000"/>
               </a:lnSpc>
@@ -3243,7 +3028,7 @@
             <a:endParaRPr lang="en-US" sz="1250" dirty="0"/>
           </a:p>
           <a:p>
-            <a:pPr indent="0" marL="0">
+            <a:pPr marL="0" indent="0">
               <a:lnSpc>
                 <a:spcPct val="110000"/>
               </a:lnSpc>
@@ -3285,7 +3070,7 @@
           <a:bodyPr wrap="square" rtlCol="0" anchor="ctr"/>
           <a:lstStyle/>
           <a:p>
-            <a:pPr indent="0" marL="0">
+            <a:pPr marL="0" indent="0">
               <a:buNone/>
             </a:pPr>
             <a:r>
@@ -3313,12 +3098,13 @@
 
 <file path=ppt/slides/slide4.xml><?xml version="1.0" encoding="utf-8"?>
 <p:sld xmlns:a="http://schemas.openxmlformats.org/drawingml/2006/main" xmlns:r="http://schemas.openxmlformats.org/officeDocument/2006/relationships" xmlns:p="http://schemas.openxmlformats.org/presentationml/2006/main">
-  <p:cSld name="Slide 4">
+  <p:cSld>
     <p:bg>
       <p:bgPr>
         <a:solidFill>
-          <a:srgbClr val="FFFFFF"/>
+          <a:schemeClr val="bg1"/>
         </a:solidFill>
+        <a:effectLst/>
       </p:bgPr>
     </p:bg>
     <p:spTree>
@@ -3335,677 +3121,42 @@
           <a:chExt cx="0" cy="0"/>
         </a:xfrm>
       </p:grpSpPr>
-      <p:sp>
-        <p:nvSpPr>
-          <p:cNvPr id="2" name="Text 0"/>
-          <p:cNvSpPr/>
-          <p:nvPr/>
-        </p:nvSpPr>
-        <p:spPr>
-          <a:xfrm>
-            <a:off x="548640" y="411480"/>
-            <a:ext cx="11091672" cy="274320"/>
-          </a:xfrm>
-          <a:prstGeom prst="rect">
-            <a:avLst/>
-          </a:prstGeom>
-          <a:noFill/>
-          <a:ln/>
-        </p:spPr>
-        <p:txBody>
-          <a:bodyPr wrap="square" rtlCol="0" anchor="ctr"/>
-          <a:lstStyle/>
-          <a:p>
-            <a:pPr indent="0" marL="0">
-              <a:buNone/>
-            </a:pPr>
-            <a:r>
-              <a:rPr lang="en-US" sz="1200" b="1" spc="200" kern="0" dirty="0">
-                <a:solidFill>
-                  <a:srgbClr val="02C39A"/>
-                </a:solidFill>
-                <a:latin typeface="Calibri" pitchFamily="34" charset="0"/>
-                <a:ea typeface="Calibri" pitchFamily="34" charset="-122"/>
-                <a:cs typeface="Calibri" pitchFamily="34" charset="-120"/>
-              </a:rPr>
-              <a:t>3 · TEST STRATEJISI</a:t>
-            </a:r>
-            <a:endParaRPr lang="en-US" sz="1200" dirty="0"/>
-          </a:p>
-        </p:txBody>
-      </p:sp>
-      <p:sp>
-        <p:nvSpPr>
-          <p:cNvPr id="3" name="Text 1"/>
-          <p:cNvSpPr/>
-          <p:nvPr/>
-        </p:nvSpPr>
-        <p:spPr>
-          <a:xfrm>
-            <a:off x="548640" y="658368"/>
-            <a:ext cx="11091672" cy="685800"/>
-          </a:xfrm>
-          <a:prstGeom prst="rect">
-            <a:avLst/>
-          </a:prstGeom>
-          <a:noFill/>
-          <a:ln/>
-        </p:spPr>
-        <p:txBody>
-          <a:bodyPr wrap="square" rtlCol="0" anchor="ctr"/>
-          <a:lstStyle/>
-          <a:p>
-            <a:pPr indent="0" marL="0">
-              <a:buNone/>
-            </a:pPr>
-            <a:r>
-              <a:rPr lang="en-US" sz="3200" b="1" dirty="0">
-                <a:solidFill>
-                  <a:srgbClr val="0F2C44"/>
-                </a:solidFill>
-                <a:latin typeface="Trebuchet MS" pitchFamily="34" charset="0"/>
-                <a:ea typeface="Trebuchet MS" pitchFamily="34" charset="-122"/>
-                <a:cs typeface="Trebuchet MS" pitchFamily="34" charset="-120"/>
-              </a:rPr>
-              <a:t>Test piramidi: 306 test fonksiyonu</a:t>
-            </a:r>
-            <a:endParaRPr lang="en-US" sz="3200" dirty="0"/>
-          </a:p>
-        </p:txBody>
-      </p:sp>
-      <p:sp>
-        <p:nvSpPr>
-          <p:cNvPr id="4" name="Shape 2"/>
-          <p:cNvSpPr/>
-          <p:nvPr/>
-        </p:nvSpPr>
-        <p:spPr>
-          <a:xfrm>
-            <a:off x="548640" y="1920240"/>
-            <a:ext cx="2598157" cy="868680"/>
-          </a:xfrm>
-          <a:prstGeom prst="roundRect">
-            <a:avLst>
-              <a:gd name="adj" fmla="val 6316"/>
-            </a:avLst>
-          </a:prstGeom>
-          <a:solidFill>
-            <a:srgbClr val="0F2C44"/>
-          </a:solidFill>
-          <a:ln/>
-        </p:spPr>
-      </p:sp>
-      <p:sp>
-        <p:nvSpPr>
-          <p:cNvPr id="5" name="Text 3"/>
-          <p:cNvSpPr/>
-          <p:nvPr/>
-        </p:nvSpPr>
-        <p:spPr>
-          <a:xfrm>
-            <a:off x="777240" y="1920240"/>
-            <a:ext cx="2323837" cy="868680"/>
-          </a:xfrm>
-          <a:prstGeom prst="rect">
-            <a:avLst/>
-          </a:prstGeom>
-          <a:noFill/>
-          <a:ln/>
-        </p:spPr>
-        <p:txBody>
-          <a:bodyPr wrap="square" rtlCol="0" anchor="ctr"/>
-          <a:lstStyle/>
-          <a:p>
-            <a:pPr indent="0" marL="0">
-              <a:buNone/>
-            </a:pPr>
-            <a:r>
-              <a:rPr lang="en-US" sz="1800" b="1" dirty="0">
-                <a:solidFill>
-                  <a:srgbClr val="FFFFFF"/>
-                </a:solidFill>
-                <a:latin typeface="Trebuchet MS" pitchFamily="34" charset="0"/>
-                <a:ea typeface="Trebuchet MS" pitchFamily="34" charset="-122"/>
-                <a:cs typeface="Trebuchet MS" pitchFamily="34" charset="-120"/>
-              </a:rPr>
-              <a:t>E2E  </a:t>
-            </a:r>
-            <a:pPr indent="0" marL="0">
-              <a:buNone/>
-            </a:pPr>
-            <a:r>
-              <a:rPr lang="en-US" sz="2200" b="1" dirty="0">
-                <a:solidFill>
-                  <a:srgbClr val="02C39A"/>
-                </a:solidFill>
-                <a:latin typeface="Trebuchet MS" pitchFamily="34" charset="0"/>
-                <a:ea typeface="Trebuchet MS" pitchFamily="34" charset="-122"/>
-                <a:cs typeface="Trebuchet MS" pitchFamily="34" charset="-120"/>
-              </a:rPr>
-              <a:t>25</a:t>
-            </a:r>
-            <a:endParaRPr lang="en-US" sz="1800" dirty="0"/>
-          </a:p>
-        </p:txBody>
-      </p:sp>
-      <p:sp>
-        <p:nvSpPr>
-          <p:cNvPr id="6" name="Text 4"/>
-          <p:cNvSpPr/>
-          <p:nvPr/>
-        </p:nvSpPr>
-        <p:spPr>
-          <a:xfrm>
-            <a:off x="3375397" y="1920240"/>
-            <a:ext cx="3840480" cy="868680"/>
-          </a:xfrm>
-          <a:prstGeom prst="rect">
-            <a:avLst/>
-          </a:prstGeom>
-          <a:noFill/>
-          <a:ln/>
-        </p:spPr>
-        <p:txBody>
-          <a:bodyPr wrap="square" rtlCol="0" anchor="ctr"/>
-          <a:lstStyle/>
-          <a:p>
-            <a:pPr indent="0" marL="0">
-              <a:buNone/>
-            </a:pPr>
-            <a:r>
-              <a:rPr lang="en-US" sz="1250" dirty="0">
-                <a:solidFill>
-                  <a:srgbClr val="6E7E8C"/>
-                </a:solidFill>
-                <a:latin typeface="Calibri" pitchFamily="34" charset="0"/>
-                <a:ea typeface="Calibri" pitchFamily="34" charset="-122"/>
-                <a:cs typeface="Calibri" pitchFamily="34" charset="-120"/>
-              </a:rPr>
-              <a:t>Playwright · API + UI akışları (CI'da)</a:t>
-            </a:r>
-            <a:endParaRPr lang="en-US" sz="1250" dirty="0"/>
-          </a:p>
-        </p:txBody>
-      </p:sp>
-      <p:sp>
-        <p:nvSpPr>
-          <p:cNvPr id="7" name="Shape 5"/>
-          <p:cNvSpPr/>
-          <p:nvPr/>
-        </p:nvSpPr>
-        <p:spPr>
-          <a:xfrm>
-            <a:off x="548640" y="3108960"/>
-            <a:ext cx="8046720" cy="868680"/>
-          </a:xfrm>
-          <a:prstGeom prst="roundRect">
-            <a:avLst>
-              <a:gd name="adj" fmla="val 6316"/>
-            </a:avLst>
-          </a:prstGeom>
-          <a:solidFill>
-            <a:srgbClr val="1C7293"/>
-          </a:solidFill>
-          <a:ln/>
-        </p:spPr>
-      </p:sp>
-      <p:sp>
-        <p:nvSpPr>
-          <p:cNvPr id="8" name="Text 6"/>
-          <p:cNvSpPr/>
-          <p:nvPr/>
-        </p:nvSpPr>
-        <p:spPr>
-          <a:xfrm>
-            <a:off x="777240" y="3108960"/>
-            <a:ext cx="7772400" cy="868680"/>
-          </a:xfrm>
-          <a:prstGeom prst="rect">
-            <a:avLst/>
-          </a:prstGeom>
-          <a:noFill/>
-          <a:ln/>
-        </p:spPr>
-        <p:txBody>
-          <a:bodyPr wrap="square" rtlCol="0" anchor="ctr"/>
-          <a:lstStyle/>
-          <a:p>
-            <a:pPr indent="0" marL="0">
-              <a:buNone/>
-            </a:pPr>
-            <a:r>
-              <a:rPr lang="en-US" sz="1800" b="1" dirty="0">
-                <a:solidFill>
-                  <a:srgbClr val="FFFFFF"/>
-                </a:solidFill>
-                <a:latin typeface="Trebuchet MS" pitchFamily="34" charset="0"/>
-                <a:ea typeface="Trebuchet MS" pitchFamily="34" charset="-122"/>
-                <a:cs typeface="Trebuchet MS" pitchFamily="34" charset="-120"/>
-              </a:rPr>
-              <a:t>Integration  </a:t>
-            </a:r>
-            <a:pPr indent="0" marL="0">
-              <a:buNone/>
-            </a:pPr>
-            <a:r>
-              <a:rPr lang="en-US" sz="2200" b="1" dirty="0">
-                <a:solidFill>
-                  <a:srgbClr val="02C39A"/>
-                </a:solidFill>
-                <a:latin typeface="Trebuchet MS" pitchFamily="34" charset="0"/>
-                <a:ea typeface="Trebuchet MS" pitchFamily="34" charset="-122"/>
-                <a:cs typeface="Trebuchet MS" pitchFamily="34" charset="-120"/>
-              </a:rPr>
-              <a:t>145</a:t>
-            </a:r>
-            <a:endParaRPr lang="en-US" sz="1800" dirty="0"/>
-          </a:p>
-        </p:txBody>
-      </p:sp>
-      <p:sp>
-        <p:nvSpPr>
-          <p:cNvPr id="9" name="Text 7"/>
-          <p:cNvSpPr/>
-          <p:nvPr/>
-        </p:nvSpPr>
-        <p:spPr>
-          <a:xfrm>
-            <a:off x="8823960" y="3108960"/>
-            <a:ext cx="3840480" cy="868680"/>
-          </a:xfrm>
-          <a:prstGeom prst="rect">
-            <a:avLst/>
-          </a:prstGeom>
-          <a:noFill/>
-          <a:ln/>
-        </p:spPr>
-        <p:txBody>
-          <a:bodyPr wrap="square" rtlCol="0" anchor="ctr"/>
-          <a:lstStyle/>
-          <a:p>
-            <a:pPr indent="0" marL="0">
-              <a:buNone/>
-            </a:pPr>
-            <a:r>
-              <a:rPr lang="en-US" sz="1250" dirty="0">
-                <a:solidFill>
-                  <a:srgbClr val="6E7E8C"/>
-                </a:solidFill>
-                <a:latin typeface="Calibri" pitchFamily="34" charset="0"/>
-                <a:ea typeface="Calibri" pitchFamily="34" charset="-122"/>
-                <a:cs typeface="Calibri" pitchFamily="34" charset="-120"/>
-              </a:rPr>
-              <a:t>pytest-asyncio + httpx + Testcontainers PG</a:t>
-            </a:r>
-            <a:endParaRPr lang="en-US" sz="1250" dirty="0"/>
-          </a:p>
-        </p:txBody>
-      </p:sp>
-      <p:sp>
-        <p:nvSpPr>
-          <p:cNvPr id="10" name="Shape 8"/>
-          <p:cNvSpPr/>
-          <p:nvPr/>
-        </p:nvSpPr>
-        <p:spPr>
-          <a:xfrm>
-            <a:off x="548640" y="4297680"/>
-            <a:ext cx="7638078" cy="868680"/>
-          </a:xfrm>
-          <a:prstGeom prst="roundRect">
-            <a:avLst>
-              <a:gd name="adj" fmla="val 6316"/>
-            </a:avLst>
-          </a:prstGeom>
-          <a:solidFill>
-            <a:srgbClr val="0F2C44"/>
-          </a:solidFill>
-          <a:ln/>
-        </p:spPr>
-      </p:sp>
-      <p:sp>
-        <p:nvSpPr>
-          <p:cNvPr id="11" name="Text 9"/>
-          <p:cNvSpPr/>
-          <p:nvPr/>
-        </p:nvSpPr>
-        <p:spPr>
-          <a:xfrm>
-            <a:off x="777240" y="4297680"/>
-            <a:ext cx="7363758" cy="868680"/>
-          </a:xfrm>
-          <a:prstGeom prst="rect">
-            <a:avLst/>
-          </a:prstGeom>
-          <a:noFill/>
-          <a:ln/>
-        </p:spPr>
-        <p:txBody>
-          <a:bodyPr wrap="square" rtlCol="0" anchor="ctr"/>
-          <a:lstStyle/>
-          <a:p>
-            <a:pPr indent="0" marL="0">
-              <a:buNone/>
-            </a:pPr>
-            <a:r>
-              <a:rPr lang="en-US" sz="1800" b="1" dirty="0">
-                <a:solidFill>
-                  <a:srgbClr val="FFFFFF"/>
-                </a:solidFill>
-                <a:latin typeface="Trebuchet MS" pitchFamily="34" charset="0"/>
-                <a:ea typeface="Trebuchet MS" pitchFamily="34" charset="-122"/>
-                <a:cs typeface="Trebuchet MS" pitchFamily="34" charset="-120"/>
-              </a:rPr>
-              <a:t>Unit  </a:t>
-            </a:r>
-            <a:pPr indent="0" marL="0">
-              <a:buNone/>
-            </a:pPr>
-            <a:r>
-              <a:rPr lang="en-US" sz="2200" b="1" dirty="0">
-                <a:solidFill>
-                  <a:srgbClr val="02C39A"/>
-                </a:solidFill>
-                <a:latin typeface="Trebuchet MS" pitchFamily="34" charset="0"/>
-                <a:ea typeface="Trebuchet MS" pitchFamily="34" charset="-122"/>
-                <a:cs typeface="Trebuchet MS" pitchFamily="34" charset="-120"/>
-              </a:rPr>
-              <a:t>136</a:t>
-            </a:r>
-            <a:endParaRPr lang="en-US" sz="1800" dirty="0"/>
-          </a:p>
-        </p:txBody>
-      </p:sp>
-      <p:sp>
-        <p:nvSpPr>
-          <p:cNvPr id="12" name="Text 10"/>
-          <p:cNvSpPr/>
-          <p:nvPr/>
-        </p:nvSpPr>
-        <p:spPr>
-          <a:xfrm>
-            <a:off x="8415318" y="4297680"/>
-            <a:ext cx="3840480" cy="868680"/>
-          </a:xfrm>
-          <a:prstGeom prst="rect">
-            <a:avLst/>
-          </a:prstGeom>
-          <a:noFill/>
-          <a:ln/>
-        </p:spPr>
-        <p:txBody>
-          <a:bodyPr wrap="square" rtlCol="0" anchor="ctr"/>
-          <a:lstStyle/>
-          <a:p>
-            <a:pPr indent="0" marL="0">
-              <a:buNone/>
-            </a:pPr>
-            <a:r>
-              <a:rPr lang="en-US" sz="1250" dirty="0">
-                <a:solidFill>
-                  <a:srgbClr val="6E7E8C"/>
-                </a:solidFill>
-                <a:latin typeface="Calibri" pitchFamily="34" charset="0"/>
-                <a:ea typeface="Calibri" pitchFamily="34" charset="-122"/>
-                <a:cs typeface="Calibri" pitchFamily="34" charset="-120"/>
-              </a:rPr>
-              <a:t>servisler · yardımcılar · şema · factory</a:t>
-            </a:r>
-            <a:endParaRPr lang="en-US" sz="1250" dirty="0"/>
-          </a:p>
-        </p:txBody>
-      </p:sp>
-      <p:sp>
-        <p:nvSpPr>
-          <p:cNvPr id="13" name="Shape 11"/>
-          <p:cNvSpPr/>
-          <p:nvPr/>
-        </p:nvSpPr>
-        <p:spPr>
-          <a:xfrm>
-            <a:off x="9098280" y="1920240"/>
-            <a:ext cx="2542032" cy="3200400"/>
-          </a:xfrm>
-          <a:prstGeom prst="roundRect">
-            <a:avLst>
-              <a:gd name="adj" fmla="val 2878"/>
-            </a:avLst>
-          </a:prstGeom>
-          <a:solidFill>
-            <a:srgbClr val="0F2C44"/>
-          </a:solidFill>
-          <a:ln/>
-          <a:effectLst>
-            <a:outerShdw sx="100000" sy="100000" kx="0" ky="0" algn="bl" rotWithShape="0" blurRad="76200" dist="25400" dir="5400000">
-              <a:srgbClr val="9AB0BF">
-                <a:alpha val="25000"/>
-              </a:srgbClr>
-            </a:outerShdw>
-          </a:effectLst>
-        </p:spPr>
-      </p:sp>
-      <p:sp>
-        <p:nvSpPr>
-          <p:cNvPr id="14" name="Text 12"/>
-          <p:cNvSpPr/>
-          <p:nvPr/>
-        </p:nvSpPr>
-        <p:spPr>
-          <a:xfrm>
-            <a:off x="9098280" y="2148840"/>
-            <a:ext cx="2542032" cy="320040"/>
-          </a:xfrm>
-          <a:prstGeom prst="rect">
-            <a:avLst/>
-          </a:prstGeom>
-          <a:noFill/>
-          <a:ln/>
-        </p:spPr>
-        <p:txBody>
-          <a:bodyPr wrap="square" rtlCol="0" anchor="ctr"/>
-          <a:lstStyle/>
-          <a:p>
-            <a:pPr algn="ctr" indent="0" marL="0">
-              <a:buNone/>
-            </a:pPr>
-            <a:r>
-              <a:rPr lang="en-US" sz="1300" b="1" spc="100" kern="0" dirty="0">
-                <a:solidFill>
-                  <a:srgbClr val="9FB6C9"/>
-                </a:solidFill>
-                <a:latin typeface="Calibri" pitchFamily="34" charset="0"/>
-                <a:ea typeface="Calibri" pitchFamily="34" charset="-122"/>
-                <a:cs typeface="Calibri" pitchFamily="34" charset="-120"/>
-              </a:rPr>
-              <a:t>COVERAGE</a:t>
-            </a:r>
-            <a:endParaRPr lang="en-US" sz="1300" dirty="0"/>
-          </a:p>
-        </p:txBody>
-      </p:sp>
-      <p:sp>
-        <p:nvSpPr>
-          <p:cNvPr id="15" name="Text 13"/>
-          <p:cNvSpPr/>
-          <p:nvPr/>
-        </p:nvSpPr>
-        <p:spPr>
-          <a:xfrm>
-            <a:off x="9098280" y="2468880"/>
-            <a:ext cx="2542032" cy="1097280"/>
-          </a:xfrm>
-          <a:prstGeom prst="rect">
-            <a:avLst/>
-          </a:prstGeom>
-          <a:noFill/>
-          <a:ln/>
-        </p:spPr>
-        <p:txBody>
-          <a:bodyPr wrap="square" rtlCol="0" anchor="ctr"/>
-          <a:lstStyle/>
-          <a:p>
-            <a:pPr algn="ctr" indent="0" marL="0">
-              <a:buNone/>
-            </a:pPr>
-            <a:r>
-              <a:rPr lang="en-US" sz="5400" b="1" dirty="0">
-                <a:solidFill>
-                  <a:srgbClr val="02C39A"/>
-                </a:solidFill>
-                <a:latin typeface="Trebuchet MS" pitchFamily="34" charset="0"/>
-                <a:ea typeface="Trebuchet MS" pitchFamily="34" charset="-122"/>
-                <a:cs typeface="Trebuchet MS" pitchFamily="34" charset="-120"/>
-              </a:rPr>
-              <a:t>%98.5</a:t>
-            </a:r>
-            <a:endParaRPr lang="en-US" sz="5400" dirty="0"/>
-          </a:p>
-        </p:txBody>
-      </p:sp>
-      <p:sp>
-        <p:nvSpPr>
-          <p:cNvPr id="16" name="Text 14"/>
-          <p:cNvSpPr/>
-          <p:nvPr/>
-        </p:nvSpPr>
-        <p:spPr>
-          <a:xfrm>
-            <a:off x="9098280" y="3611880"/>
-            <a:ext cx="2542032" cy="731520"/>
-          </a:xfrm>
-          <a:prstGeom prst="rect">
-            <a:avLst/>
-          </a:prstGeom>
-          <a:noFill/>
-          <a:ln/>
-        </p:spPr>
-        <p:txBody>
-          <a:bodyPr wrap="square" rtlCol="0" anchor="ctr"/>
-          <a:lstStyle/>
-          <a:p>
-            <a:pPr algn="ctr" indent="0" marL="0">
-              <a:lnSpc>
-                <a:spcPct val="110000"/>
-              </a:lnSpc>
-              <a:buNone/>
-            </a:pPr>
-            <a:r>
-              <a:rPr lang="en-US" sz="1400" dirty="0">
-                <a:solidFill>
-                  <a:srgbClr val="FFFFFF"/>
-                </a:solidFill>
-                <a:latin typeface="Calibri" pitchFamily="34" charset="0"/>
-                <a:ea typeface="Calibri" pitchFamily="34" charset="-122"/>
-                <a:cs typeface="Calibri" pitchFamily="34" charset="-120"/>
-              </a:rPr>
-              <a:t>hedef ≥ %70</a:t>
-            </a:r>
-            <a:endParaRPr lang="en-US" sz="1400" dirty="0"/>
-          </a:p>
-          <a:p>
-            <a:pPr algn="ctr" indent="0" marL="0">
-              <a:lnSpc>
-                <a:spcPct val="110000"/>
-              </a:lnSpc>
-              <a:buNone/>
-            </a:pPr>
-            <a:r>
-              <a:rPr lang="en-US" sz="1400" dirty="0">
-                <a:solidFill>
-                  <a:srgbClr val="FFFFFF"/>
-                </a:solidFill>
-                <a:latin typeface="Calibri" pitchFamily="34" charset="0"/>
-                <a:ea typeface="Calibri" pitchFamily="34" charset="-122"/>
-                <a:cs typeface="Calibri" pitchFamily="34" charset="-120"/>
-              </a:rPr>
-              <a:t>(fail_under = 70)</a:t>
-            </a:r>
-            <a:endParaRPr lang="en-US" sz="1400" dirty="0"/>
-          </a:p>
-        </p:txBody>
-      </p:sp>
-      <p:sp>
-        <p:nvSpPr>
-          <p:cNvPr id="17" name="Text 15"/>
-          <p:cNvSpPr/>
-          <p:nvPr/>
-        </p:nvSpPr>
-        <p:spPr>
-          <a:xfrm>
-            <a:off x="9098280" y="4434840"/>
-            <a:ext cx="2542032" cy="548640"/>
-          </a:xfrm>
-          <a:prstGeom prst="rect">
-            <a:avLst/>
-          </a:prstGeom>
-          <a:noFill/>
-          <a:ln/>
-        </p:spPr>
-        <p:txBody>
-          <a:bodyPr wrap="square" rtlCol="0" anchor="ctr"/>
-          <a:lstStyle/>
-          <a:p>
-            <a:pPr algn="ctr" indent="0" marL="0">
-              <a:buNone/>
-            </a:pPr>
-            <a:r>
-              <a:rPr lang="en-US" sz="1300" b="1" dirty="0">
-                <a:solidFill>
-                  <a:srgbClr val="02C39A"/>
-                </a:solidFill>
-                <a:latin typeface="Calibri" pitchFamily="34" charset="0"/>
-                <a:ea typeface="Calibri" pitchFamily="34" charset="-122"/>
-                <a:cs typeface="Calibri" pitchFamily="34" charset="-120"/>
-              </a:rPr>
-              <a:t>293 test geçer · 0 hata</a:t>
-            </a:r>
-            <a:endParaRPr lang="en-US" sz="1300" dirty="0"/>
-          </a:p>
-        </p:txBody>
-      </p:sp>
-      <p:sp>
-        <p:nvSpPr>
-          <p:cNvPr id="18" name="Text 16"/>
-          <p:cNvSpPr/>
-          <p:nvPr/>
-        </p:nvSpPr>
-        <p:spPr>
-          <a:xfrm>
-            <a:off x="548640" y="5669280"/>
-            <a:ext cx="8138160" cy="822960"/>
-          </a:xfrm>
-          <a:prstGeom prst="rect">
-            <a:avLst/>
-          </a:prstGeom>
-          <a:noFill/>
-          <a:ln/>
-        </p:spPr>
-        <p:txBody>
-          <a:bodyPr wrap="square" rtlCol="0" anchor="ctr"/>
-          <a:lstStyle/>
-          <a:p>
-            <a:pPr indent="0" marL="0">
-              <a:lnSpc>
-                <a:spcPct val="110000"/>
-              </a:lnSpc>
-              <a:buNone/>
-            </a:pPr>
-            <a:r>
-              <a:rPr lang="en-US" sz="1300" i="1" dirty="0">
-                <a:solidFill>
-                  <a:srgbClr val="6E7E8C"/>
-                </a:solidFill>
-                <a:latin typeface="Calibri" pitchFamily="34" charset="0"/>
-                <a:ea typeface="Calibri" pitchFamily="34" charset="-122"/>
-                <a:cs typeface="Calibri" pitchFamily="34" charset="-120"/>
-              </a:rPr>
-              <a:t>Factory Boy + Faker (Room/Booking/Hotel/User) suite genelinde · Postman 7 istek → Newman · öne çıkan: 409 çakışma, iptal sonrası müsaitlik, ownership, kalıcılık.</a:t>
-            </a:r>
-            <a:endParaRPr lang="en-US" sz="1300" dirty="0"/>
-          </a:p>
-        </p:txBody>
-      </p:sp>
+      <p:pic>
+        <p:nvPicPr>
+          <p:cNvPr id="5" name="Resim 4">
+            <a:extLst>
+              <a:ext uri="{FF2B5EF4-FFF2-40B4-BE49-F238E27FC236}">
+                <a16:creationId xmlns:a16="http://schemas.microsoft.com/office/drawing/2014/main" id="{59EF1623-F634-8E94-FBC4-D17EDEB63523}"/>
+              </a:ext>
+            </a:extLst>
+          </p:cNvPr>
+          <p:cNvPicPr>
+            <a:picLocks noChangeAspect="1"/>
+          </p:cNvPicPr>
+          <p:nvPr/>
+        </p:nvPicPr>
+        <p:blipFill>
+          <a:blip r:embed="rId2"/>
+          <a:stretch>
+            <a:fillRect/>
+          </a:stretch>
+        </p:blipFill>
+        <p:spPr>
+          <a:xfrm>
+            <a:off x="2600254" y="141870"/>
+            <a:ext cx="6674375" cy="6574260"/>
+          </a:xfrm>
+          <a:prstGeom prst="rect">
+            <a:avLst/>
+          </a:prstGeom>
+        </p:spPr>
+      </p:pic>
     </p:spTree>
+    <p:extLst>
+      <p:ext uri="{BB962C8B-B14F-4D97-AF65-F5344CB8AC3E}">
+        <p14:creationId xmlns:p14="http://schemas.microsoft.com/office/powerpoint/2010/main" val="282471689"/>
+      </p:ext>
+    </p:extLst>
   </p:cSld>
   <p:clrMapOvr>
     <a:masterClrMapping/>
@@ -4015,12 +3166,13 @@
 
 <file path=ppt/slides/slide5.xml><?xml version="1.0" encoding="utf-8"?>
 <p:sld xmlns:a="http://schemas.openxmlformats.org/drawingml/2006/main" xmlns:r="http://schemas.openxmlformats.org/officeDocument/2006/relationships" xmlns:p="http://schemas.openxmlformats.org/presentationml/2006/main">
-  <p:cSld name="Slide 5">
+  <p:cSld name="Slide 4">
     <p:bg>
       <p:bgPr>
         <a:solidFill>
           <a:srgbClr val="FFFFFF"/>
         </a:solidFill>
+        <a:effectLst/>
       </p:bgPr>
     </p:bg>
     <p:spTree>
@@ -4058,11 +3210,11 @@
           <a:bodyPr wrap="square" rtlCol="0" anchor="ctr"/>
           <a:lstStyle/>
           <a:p>
-            <a:pPr indent="0" marL="0">
-              <a:buNone/>
-            </a:pPr>
-            <a:r>
-              <a:rPr lang="en-US" sz="1200" b="1" spc="200" kern="0" dirty="0">
+            <a:pPr marL="0" indent="0">
+              <a:buNone/>
+            </a:pPr>
+            <a:r>
+              <a:rPr lang="en-US" sz="1200" b="1" kern="0" spc="200" dirty="0">
                 <a:solidFill>
                   <a:srgbClr val="02C39A"/>
                 </a:solidFill>
@@ -4070,7 +3222,7 @@
                 <a:ea typeface="Calibri" pitchFamily="34" charset="-122"/>
                 <a:cs typeface="Calibri" pitchFamily="34" charset="-120"/>
               </a:rPr>
-              <a:t>4 · CI/CD PIPELINE</a:t>
+              <a:t>3 · TEST STRATEJISI</a:t>
             </a:r>
             <a:endParaRPr lang="en-US" sz="1200" dirty="0"/>
           </a:p>
@@ -4097,7 +3249,7 @@
           <a:bodyPr wrap="square" rtlCol="0" anchor="ctr"/>
           <a:lstStyle/>
           <a:p>
-            <a:pPr indent="0" marL="0">
+            <a:pPr marL="0" indent="0">
               <a:buNone/>
             </a:pPr>
             <a:r>
@@ -4109,7 +3261,7 @@
                 <a:ea typeface="Trebuchet MS" pitchFamily="34" charset="-122"/>
                 <a:cs typeface="Trebuchet MS" pitchFamily="34" charset="-120"/>
               </a:rPr>
-              <a:t>GitHub Actions: lint → test → build → deploy → smoke</a:t>
+              <a:t>Test piramidi: 306 test fonksiyonu</a:t>
             </a:r>
             <a:endParaRPr lang="en-US" sz="3200" dirty="0"/>
           </a:p>
@@ -4123,12 +3275,12 @@
         </p:nvSpPr>
         <p:spPr>
           <a:xfrm>
-            <a:off x="548640" y="2194560"/>
-            <a:ext cx="1993392" cy="1371600"/>
+            <a:off x="548640" y="1920240"/>
+            <a:ext cx="2598157" cy="868680"/>
           </a:xfrm>
           <a:prstGeom prst="roundRect">
             <a:avLst>
-              <a:gd name="adj" fmla="val 6667"/>
+              <a:gd name="adj" fmla="val 6316"/>
             </a:avLst>
           </a:prstGeom>
           <a:solidFill>
@@ -4136,6 +3288,13 @@
           </a:solidFill>
           <a:ln/>
         </p:spPr>
+        <p:txBody>
+          <a:bodyPr/>
+          <a:lstStyle/>
+          <a:p>
+            <a:endParaRPr lang="tr-TR"/>
+          </a:p>
+        </p:txBody>
       </p:sp>
       <p:sp>
         <p:nvSpPr>
@@ -4145,71 +3304,43 @@
         </p:nvSpPr>
         <p:spPr>
           <a:xfrm>
-            <a:off x="658368" y="2286000"/>
-            <a:ext cx="457200" cy="365760"/>
-          </a:xfrm>
-          <a:prstGeom prst="rect">
-            <a:avLst/>
-          </a:prstGeom>
-          <a:noFill/>
-          <a:ln/>
-        </p:spPr>
-        <p:txBody>
-          <a:bodyPr wrap="square" rtlCol="0" anchor="ctr"/>
-          <a:lstStyle/>
-          <a:p>
-            <a:pPr indent="0" marL="0">
-              <a:buNone/>
-            </a:pPr>
-            <a:r>
-              <a:rPr lang="en-US" sz="1600" b="1" dirty="0">
-                <a:solidFill>
-                  <a:srgbClr val="02C39A"/>
+            <a:off x="777240" y="1920240"/>
+            <a:ext cx="2323837" cy="868680"/>
+          </a:xfrm>
+          <a:prstGeom prst="rect">
+            <a:avLst/>
+          </a:prstGeom>
+          <a:noFill/>
+          <a:ln/>
+        </p:spPr>
+        <p:txBody>
+          <a:bodyPr wrap="square" rtlCol="0" anchor="ctr"/>
+          <a:lstStyle/>
+          <a:p>
+            <a:pPr marL="0" indent="0">
+              <a:buNone/>
+            </a:pPr>
+            <a:r>
+              <a:rPr lang="en-US" sz="1800" b="1" dirty="0">
+                <a:solidFill>
+                  <a:srgbClr val="FFFFFF"/>
                 </a:solidFill>
                 <a:latin typeface="Trebuchet MS" pitchFamily="34" charset="0"/>
                 <a:ea typeface="Trebuchet MS" pitchFamily="34" charset="-122"/>
                 <a:cs typeface="Trebuchet MS" pitchFamily="34" charset="-120"/>
               </a:rPr>
-              <a:t>1</a:t>
-            </a:r>
-            <a:endParaRPr lang="en-US" sz="1600" dirty="0"/>
-          </a:p>
-        </p:txBody>
-      </p:sp>
-      <p:sp>
-        <p:nvSpPr>
-          <p:cNvPr id="6" name="Text 4"/>
-          <p:cNvSpPr/>
-          <p:nvPr/>
-        </p:nvSpPr>
-        <p:spPr>
-          <a:xfrm>
-            <a:off x="548640" y="2560320"/>
-            <a:ext cx="1993392" cy="365760"/>
-          </a:xfrm>
-          <a:prstGeom prst="rect">
-            <a:avLst/>
-          </a:prstGeom>
-          <a:noFill/>
-          <a:ln/>
-        </p:spPr>
-        <p:txBody>
-          <a:bodyPr wrap="square" rtlCol="0" anchor="ctr"/>
-          <a:lstStyle/>
-          <a:p>
-            <a:pPr algn="ctr" indent="0" marL="0">
-              <a:buNone/>
-            </a:pPr>
-            <a:r>
-              <a:rPr lang="en-US" sz="1800" b="1" dirty="0">
-                <a:solidFill>
-                  <a:srgbClr val="FFFFFF"/>
+              <a:t>E2E  </a:t>
+            </a:r>
+            <a:r>
+              <a:rPr lang="en-US" sz="2200" b="1" dirty="0">
+                <a:solidFill>
+                  <a:srgbClr val="02C39A"/>
                 </a:solidFill>
                 <a:latin typeface="Trebuchet MS" pitchFamily="34" charset="0"/>
                 <a:ea typeface="Trebuchet MS" pitchFamily="34" charset="-122"/>
                 <a:cs typeface="Trebuchet MS" pitchFamily="34" charset="-120"/>
               </a:rPr>
-              <a:t>LINT</a:t>
+              <a:t>25</a:t>
             </a:r>
             <a:endParaRPr lang="en-US" sz="1800" dirty="0"/>
           </a:p>
@@ -4217,43 +3348,69 @@
       </p:sp>
       <p:sp>
         <p:nvSpPr>
-          <p:cNvPr id="7" name="Text 5"/>
-          <p:cNvSpPr/>
-          <p:nvPr/>
-        </p:nvSpPr>
-        <p:spPr>
-          <a:xfrm>
-            <a:off x="548640" y="2944368"/>
-            <a:ext cx="1993392" cy="548640"/>
-          </a:xfrm>
-          <a:prstGeom prst="rect">
-            <a:avLst/>
-          </a:prstGeom>
-          <a:noFill/>
-          <a:ln/>
-        </p:spPr>
-        <p:txBody>
-          <a:bodyPr wrap="square" rtlCol="0" anchor="ctr"/>
-          <a:lstStyle/>
-          <a:p>
-            <a:pPr algn="ctr" indent="0" marL="0">
-              <a:lnSpc>
-                <a:spcPct val="100000"/>
-              </a:lnSpc>
-              <a:buNone/>
-            </a:pPr>
-            <a:r>
-              <a:rPr lang="en-US" sz="1200" dirty="0">
-                <a:solidFill>
-                  <a:srgbClr val="CADCFC"/>
+          <p:cNvPr id="6" name="Text 4"/>
+          <p:cNvSpPr/>
+          <p:nvPr/>
+        </p:nvSpPr>
+        <p:spPr>
+          <a:xfrm>
+            <a:off x="3146797" y="1882987"/>
+            <a:ext cx="3840480" cy="868680"/>
+          </a:xfrm>
+          <a:prstGeom prst="rect">
+            <a:avLst/>
+          </a:prstGeom>
+          <a:noFill/>
+          <a:ln/>
+        </p:spPr>
+        <p:txBody>
+          <a:bodyPr wrap="square" rtlCol="0" anchor="ctr"/>
+          <a:lstStyle/>
+          <a:p>
+            <a:pPr marL="0" indent="0">
+              <a:buNone/>
+            </a:pPr>
+            <a:r>
+              <a:rPr lang="en-US" sz="1250" dirty="0">
+                <a:solidFill>
+                  <a:srgbClr val="6E7E8C"/>
                 </a:solidFill>
                 <a:latin typeface="Calibri" pitchFamily="34" charset="0"/>
                 <a:ea typeface="Calibri" pitchFamily="34" charset="-122"/>
                 <a:cs typeface="Calibri" pitchFamily="34" charset="-120"/>
               </a:rPr>
-              <a:t>ruff (E·F·I)</a:t>
-            </a:r>
-            <a:endParaRPr lang="en-US" sz="1200" dirty="0"/>
+              <a:t>Playwright · API + UI akışları (CI'da)</a:t>
+            </a:r>
+            <a:endParaRPr lang="en-US" sz="1250" dirty="0"/>
+          </a:p>
+        </p:txBody>
+      </p:sp>
+      <p:sp>
+        <p:nvSpPr>
+          <p:cNvPr id="7" name="Shape 5"/>
+          <p:cNvSpPr/>
+          <p:nvPr/>
+        </p:nvSpPr>
+        <p:spPr>
+          <a:xfrm>
+            <a:off x="548640" y="3108960"/>
+            <a:ext cx="8046720" cy="868680"/>
+          </a:xfrm>
+          <a:prstGeom prst="roundRect">
+            <a:avLst>
+              <a:gd name="adj" fmla="val 6316"/>
+            </a:avLst>
+          </a:prstGeom>
+          <a:solidFill>
+            <a:srgbClr val="1C7293"/>
+          </a:solidFill>
+          <a:ln/>
+        </p:spPr>
+        <p:txBody>
+          <a:bodyPr/>
+          <a:lstStyle/>
+          <a:p>
+            <a:endParaRPr lang="tr-TR"/>
           </a:p>
         </p:txBody>
       </p:sp>
@@ -4265,51 +3422,101 @@
         </p:nvSpPr>
         <p:spPr>
           <a:xfrm>
-            <a:off x="2523744" y="2194560"/>
-            <a:ext cx="292608" cy="1371600"/>
-          </a:xfrm>
-          <a:prstGeom prst="rect">
-            <a:avLst/>
-          </a:prstGeom>
-          <a:noFill/>
-          <a:ln/>
-        </p:spPr>
-        <p:txBody>
-          <a:bodyPr wrap="square" rtlCol="0" anchor="ctr"/>
-          <a:lstStyle/>
-          <a:p>
-            <a:pPr algn="ctr" indent="0" marL="0">
-              <a:buNone/>
-            </a:pPr>
-            <a:r>
-              <a:rPr lang="en-US" sz="2800" b="1" dirty="0">
-                <a:solidFill>
-                  <a:srgbClr val="1C7293"/>
+            <a:off x="777240" y="3108960"/>
+            <a:ext cx="7772400" cy="868680"/>
+          </a:xfrm>
+          <a:prstGeom prst="rect">
+            <a:avLst/>
+          </a:prstGeom>
+          <a:noFill/>
+          <a:ln/>
+        </p:spPr>
+        <p:txBody>
+          <a:bodyPr wrap="square" rtlCol="0" anchor="ctr"/>
+          <a:lstStyle/>
+          <a:p>
+            <a:pPr marL="0" indent="0">
+              <a:buNone/>
+            </a:pPr>
+            <a:r>
+              <a:rPr lang="en-US" sz="1800" b="1" dirty="0">
+                <a:solidFill>
+                  <a:srgbClr val="FFFFFF"/>
                 </a:solidFill>
                 <a:latin typeface="Trebuchet MS" pitchFamily="34" charset="0"/>
                 <a:ea typeface="Trebuchet MS" pitchFamily="34" charset="-122"/>
                 <a:cs typeface="Trebuchet MS" pitchFamily="34" charset="-120"/>
               </a:rPr>
-              <a:t>›</a:t>
-            </a:r>
-            <a:endParaRPr lang="en-US" sz="2800" dirty="0"/>
-          </a:p>
-        </p:txBody>
-      </p:sp>
-      <p:sp>
-        <p:nvSpPr>
-          <p:cNvPr id="9" name="Shape 7"/>
-          <p:cNvSpPr/>
-          <p:nvPr/>
-        </p:nvSpPr>
-        <p:spPr>
-          <a:xfrm>
-            <a:off x="2834640" y="2194560"/>
-            <a:ext cx="1993392" cy="1371600"/>
+              <a:t>Integration  </a:t>
+            </a:r>
+            <a:r>
+              <a:rPr lang="en-US" sz="2200" b="1" dirty="0">
+                <a:solidFill>
+                  <a:srgbClr val="02C39A"/>
+                </a:solidFill>
+                <a:latin typeface="Trebuchet MS" pitchFamily="34" charset="0"/>
+                <a:ea typeface="Trebuchet MS" pitchFamily="34" charset="-122"/>
+                <a:cs typeface="Trebuchet MS" pitchFamily="34" charset="-120"/>
+              </a:rPr>
+              <a:t>145</a:t>
+            </a:r>
+            <a:endParaRPr lang="en-US" sz="1800" dirty="0"/>
+          </a:p>
+        </p:txBody>
+      </p:sp>
+      <p:sp>
+        <p:nvSpPr>
+          <p:cNvPr id="9" name="Text 7"/>
+          <p:cNvSpPr/>
+          <p:nvPr/>
+        </p:nvSpPr>
+        <p:spPr>
+          <a:xfrm>
+            <a:off x="5620722" y="3108960"/>
+            <a:ext cx="3840480" cy="868680"/>
+          </a:xfrm>
+          <a:prstGeom prst="rect">
+            <a:avLst/>
+          </a:prstGeom>
+          <a:noFill/>
+          <a:ln/>
+        </p:spPr>
+        <p:txBody>
+          <a:bodyPr wrap="square" rtlCol="0" anchor="ctr"/>
+          <a:lstStyle/>
+          <a:p>
+            <a:pPr marL="0" indent="0">
+              <a:buNone/>
+            </a:pPr>
+            <a:r>
+              <a:rPr lang="en-US" sz="1250" dirty="0">
+                <a:solidFill>
+                  <a:srgbClr val="6E7E8C"/>
+                </a:solidFill>
+                <a:latin typeface="Calibri" pitchFamily="34" charset="0"/>
+                <a:ea typeface="Calibri" pitchFamily="34" charset="-122"/>
+                <a:cs typeface="Calibri" pitchFamily="34" charset="-120"/>
+              </a:rPr>
+              <a:t>pytest-asyncio + httpx + Testcontainers PG</a:t>
+            </a:r>
+            <a:endParaRPr lang="en-US" sz="1250" dirty="0"/>
+          </a:p>
+        </p:txBody>
+      </p:sp>
+      <p:sp>
+        <p:nvSpPr>
+          <p:cNvPr id="10" name="Shape 8"/>
+          <p:cNvSpPr/>
+          <p:nvPr/>
+        </p:nvSpPr>
+        <p:spPr>
+          <a:xfrm>
+            <a:off x="548640" y="4297680"/>
+            <a:ext cx="7638078" cy="868680"/>
           </a:xfrm>
           <a:prstGeom prst="roundRect">
             <a:avLst>
-              <a:gd name="adj" fmla="val 6667"/>
+              <a:gd name="adj" fmla="val 6316"/>
             </a:avLst>
           </a:prstGeom>
           <a:solidFill>
@@ -4317,80 +3524,59 @@
           </a:solidFill>
           <a:ln/>
         </p:spPr>
-      </p:sp>
-      <p:sp>
-        <p:nvSpPr>
-          <p:cNvPr id="10" name="Text 8"/>
-          <p:cNvSpPr/>
-          <p:nvPr/>
-        </p:nvSpPr>
-        <p:spPr>
-          <a:xfrm>
-            <a:off x="2944368" y="2286000"/>
-            <a:ext cx="457200" cy="365760"/>
-          </a:xfrm>
-          <a:prstGeom prst="rect">
-            <a:avLst/>
-          </a:prstGeom>
-          <a:noFill/>
-          <a:ln/>
-        </p:spPr>
-        <p:txBody>
-          <a:bodyPr wrap="square" rtlCol="0" anchor="ctr"/>
-          <a:lstStyle/>
-          <a:p>
-            <a:pPr indent="0" marL="0">
-              <a:buNone/>
-            </a:pPr>
-            <a:r>
-              <a:rPr lang="en-US" sz="1600" b="1" dirty="0">
-                <a:solidFill>
-                  <a:srgbClr val="02C39A"/>
+        <p:txBody>
+          <a:bodyPr/>
+          <a:lstStyle/>
+          <a:p>
+            <a:endParaRPr lang="tr-TR"/>
+          </a:p>
+        </p:txBody>
+      </p:sp>
+      <p:sp>
+        <p:nvSpPr>
+          <p:cNvPr id="11" name="Text 9"/>
+          <p:cNvSpPr/>
+          <p:nvPr/>
+        </p:nvSpPr>
+        <p:spPr>
+          <a:xfrm>
+            <a:off x="777240" y="4297680"/>
+            <a:ext cx="7363758" cy="868680"/>
+          </a:xfrm>
+          <a:prstGeom prst="rect">
+            <a:avLst/>
+          </a:prstGeom>
+          <a:noFill/>
+          <a:ln/>
+        </p:spPr>
+        <p:txBody>
+          <a:bodyPr wrap="square" rtlCol="0" anchor="ctr"/>
+          <a:lstStyle/>
+          <a:p>
+            <a:pPr marL="0" indent="0">
+              <a:buNone/>
+            </a:pPr>
+            <a:r>
+              <a:rPr lang="en-US" sz="1800" b="1" dirty="0">
+                <a:solidFill>
+                  <a:srgbClr val="FFFFFF"/>
                 </a:solidFill>
                 <a:latin typeface="Trebuchet MS" pitchFamily="34" charset="0"/>
                 <a:ea typeface="Trebuchet MS" pitchFamily="34" charset="-122"/>
                 <a:cs typeface="Trebuchet MS" pitchFamily="34" charset="-120"/>
               </a:rPr>
-              <a:t>2</a:t>
-            </a:r>
-            <a:endParaRPr lang="en-US" sz="1600" dirty="0"/>
-          </a:p>
-        </p:txBody>
-      </p:sp>
-      <p:sp>
-        <p:nvSpPr>
-          <p:cNvPr id="11" name="Text 9"/>
-          <p:cNvSpPr/>
-          <p:nvPr/>
-        </p:nvSpPr>
-        <p:spPr>
-          <a:xfrm>
-            <a:off x="2834640" y="2560320"/>
-            <a:ext cx="1993392" cy="365760"/>
-          </a:xfrm>
-          <a:prstGeom prst="rect">
-            <a:avLst/>
-          </a:prstGeom>
-          <a:noFill/>
-          <a:ln/>
-        </p:spPr>
-        <p:txBody>
-          <a:bodyPr wrap="square" rtlCol="0" anchor="ctr"/>
-          <a:lstStyle/>
-          <a:p>
-            <a:pPr algn="ctr" indent="0" marL="0">
-              <a:buNone/>
-            </a:pPr>
-            <a:r>
-              <a:rPr lang="en-US" sz="1800" b="1" dirty="0">
-                <a:solidFill>
-                  <a:srgbClr val="FFFFFF"/>
+              <a:t>Unit  </a:t>
+            </a:r>
+            <a:r>
+              <a:rPr lang="en-US" sz="2200" b="1" dirty="0">
+                <a:solidFill>
+                  <a:srgbClr val="02C39A"/>
                 </a:solidFill>
                 <a:latin typeface="Trebuchet MS" pitchFamily="34" charset="0"/>
                 <a:ea typeface="Trebuchet MS" pitchFamily="34" charset="-122"/>
                 <a:cs typeface="Trebuchet MS" pitchFamily="34" charset="-120"/>
               </a:rPr>
-              <a:t>TEST</a:t>
+              <a:t>136</a:t>
             </a:r>
             <a:endParaRPr lang="en-US" sz="1800" dirty="0"/>
           </a:p>
@@ -4404,157 +3590,148 @@
         </p:nvSpPr>
         <p:spPr>
           <a:xfrm>
-            <a:off x="2834640" y="2944368"/>
-            <a:ext cx="1993392" cy="548640"/>
-          </a:xfrm>
-          <a:prstGeom prst="rect">
-            <a:avLst/>
-          </a:prstGeom>
-          <a:noFill/>
-          <a:ln/>
-        </p:spPr>
-        <p:txBody>
-          <a:bodyPr wrap="square" rtlCol="0" anchor="ctr"/>
-          <a:lstStyle/>
-          <a:p>
-            <a:pPr algn="ctr" indent="0" marL="0">
-              <a:lnSpc>
-                <a:spcPct val="100000"/>
-              </a:lnSpc>
-              <a:buNone/>
-            </a:pPr>
-            <a:r>
-              <a:rPr lang="en-US" sz="1200" dirty="0">
-                <a:solidFill>
-                  <a:srgbClr val="CADCFC"/>
+            <a:off x="5620722" y="4297680"/>
+            <a:ext cx="3840480" cy="868680"/>
+          </a:xfrm>
+          <a:prstGeom prst="rect">
+            <a:avLst/>
+          </a:prstGeom>
+          <a:noFill/>
+          <a:ln/>
+        </p:spPr>
+        <p:txBody>
+          <a:bodyPr wrap="square" rtlCol="0" anchor="ctr"/>
+          <a:lstStyle/>
+          <a:p>
+            <a:pPr marL="0" indent="0">
+              <a:buNone/>
+            </a:pPr>
+            <a:r>
+              <a:rPr lang="en-US" sz="1250" dirty="0">
+                <a:solidFill>
+                  <a:srgbClr val="6E7E8C"/>
                 </a:solidFill>
                 <a:latin typeface="Calibri" pitchFamily="34" charset="0"/>
                 <a:ea typeface="Calibri" pitchFamily="34" charset="-122"/>
                 <a:cs typeface="Calibri" pitchFamily="34" charset="-120"/>
               </a:rPr>
-              <a:t>pytest</a:t>
-            </a:r>
-            <a:endParaRPr lang="en-US" sz="1200" dirty="0"/>
-          </a:p>
-          <a:p>
-            <a:pPr algn="ctr" indent="0" marL="0">
-              <a:lnSpc>
-                <a:spcPct val="100000"/>
-              </a:lnSpc>
-              <a:buNone/>
-            </a:pPr>
-            <a:r>
-              <a:rPr lang="en-US" sz="1200" dirty="0">
-                <a:solidFill>
-                  <a:srgbClr val="CADCFC"/>
+              <a:t>servisler · yardımcılar · şema · factory</a:t>
+            </a:r>
+            <a:endParaRPr lang="en-US" sz="1250" dirty="0"/>
+          </a:p>
+        </p:txBody>
+      </p:sp>
+      <p:sp>
+        <p:nvSpPr>
+          <p:cNvPr id="13" name="Shape 11"/>
+          <p:cNvSpPr/>
+          <p:nvPr/>
+        </p:nvSpPr>
+        <p:spPr>
+          <a:xfrm>
+            <a:off x="9098280" y="1920240"/>
+            <a:ext cx="2542032" cy="3200400"/>
+          </a:xfrm>
+          <a:prstGeom prst="roundRect">
+            <a:avLst>
+              <a:gd name="adj" fmla="val 2878"/>
+            </a:avLst>
+          </a:prstGeom>
+          <a:solidFill>
+            <a:srgbClr val="0F2C44"/>
+          </a:solidFill>
+          <a:ln/>
+          <a:effectLst>
+            <a:outerShdw blurRad="76200" dist="25400" dir="5400000" algn="bl" rotWithShape="0">
+              <a:srgbClr val="9AB0BF">
+                <a:alpha val="25000"/>
+              </a:srgbClr>
+            </a:outerShdw>
+          </a:effectLst>
+        </p:spPr>
+        <p:txBody>
+          <a:bodyPr/>
+          <a:lstStyle/>
+          <a:p>
+            <a:endParaRPr lang="tr-TR"/>
+          </a:p>
+        </p:txBody>
+      </p:sp>
+      <p:sp>
+        <p:nvSpPr>
+          <p:cNvPr id="14" name="Text 12"/>
+          <p:cNvSpPr/>
+          <p:nvPr/>
+        </p:nvSpPr>
+        <p:spPr>
+          <a:xfrm>
+            <a:off x="9098280" y="2148840"/>
+            <a:ext cx="2542032" cy="320040"/>
+          </a:xfrm>
+          <a:prstGeom prst="rect">
+            <a:avLst/>
+          </a:prstGeom>
+          <a:noFill/>
+          <a:ln/>
+        </p:spPr>
+        <p:txBody>
+          <a:bodyPr wrap="square" rtlCol="0" anchor="ctr"/>
+          <a:lstStyle/>
+          <a:p>
+            <a:pPr marL="0" indent="0" algn="ctr">
+              <a:buNone/>
+            </a:pPr>
+            <a:r>
+              <a:rPr lang="en-US" sz="1300" b="1" kern="0" spc="100" dirty="0">
+                <a:solidFill>
+                  <a:srgbClr val="9FB6C9"/>
                 </a:solidFill>
                 <a:latin typeface="Calibri" pitchFamily="34" charset="0"/>
                 <a:ea typeface="Calibri" pitchFamily="34" charset="-122"/>
                 <a:cs typeface="Calibri" pitchFamily="34" charset="-120"/>
               </a:rPr>
-              <a:t>cov ≥70%</a:t>
-            </a:r>
-            <a:endParaRPr lang="en-US" sz="1200" dirty="0"/>
-          </a:p>
-        </p:txBody>
-      </p:sp>
-      <p:sp>
-        <p:nvSpPr>
-          <p:cNvPr id="13" name="Text 11"/>
-          <p:cNvSpPr/>
-          <p:nvPr/>
-        </p:nvSpPr>
-        <p:spPr>
-          <a:xfrm>
-            <a:off x="4809744" y="2194560"/>
-            <a:ext cx="292608" cy="1371600"/>
-          </a:xfrm>
-          <a:prstGeom prst="rect">
-            <a:avLst/>
-          </a:prstGeom>
-          <a:noFill/>
-          <a:ln/>
-        </p:spPr>
-        <p:txBody>
-          <a:bodyPr wrap="square" rtlCol="0" anchor="ctr"/>
-          <a:lstStyle/>
-          <a:p>
-            <a:pPr algn="ctr" indent="0" marL="0">
-              <a:buNone/>
-            </a:pPr>
-            <a:r>
-              <a:rPr lang="en-US" sz="2800" b="1" dirty="0">
-                <a:solidFill>
-                  <a:srgbClr val="1C7293"/>
+              <a:t>COVERAGE</a:t>
+            </a:r>
+            <a:endParaRPr lang="en-US" sz="1300" dirty="0"/>
+          </a:p>
+        </p:txBody>
+      </p:sp>
+      <p:sp>
+        <p:nvSpPr>
+          <p:cNvPr id="15" name="Text 13"/>
+          <p:cNvSpPr/>
+          <p:nvPr/>
+        </p:nvSpPr>
+        <p:spPr>
+          <a:xfrm>
+            <a:off x="9098280" y="2468880"/>
+            <a:ext cx="2542032" cy="1097280"/>
+          </a:xfrm>
+          <a:prstGeom prst="rect">
+            <a:avLst/>
+          </a:prstGeom>
+          <a:noFill/>
+          <a:ln/>
+        </p:spPr>
+        <p:txBody>
+          <a:bodyPr wrap="square" rtlCol="0" anchor="ctr"/>
+          <a:lstStyle/>
+          <a:p>
+            <a:pPr marL="0" indent="0" algn="ctr">
+              <a:buNone/>
+            </a:pPr>
+            <a:r>
+              <a:rPr lang="en-US" sz="5400" b="1" dirty="0">
+                <a:solidFill>
+                  <a:srgbClr val="02C39A"/>
                 </a:solidFill>
                 <a:latin typeface="Trebuchet MS" pitchFamily="34" charset="0"/>
                 <a:ea typeface="Trebuchet MS" pitchFamily="34" charset="-122"/>
                 <a:cs typeface="Trebuchet MS" pitchFamily="34" charset="-120"/>
               </a:rPr>
-              <a:t>›</a:t>
-            </a:r>
-            <a:endParaRPr lang="en-US" sz="2800" dirty="0"/>
-          </a:p>
-        </p:txBody>
-      </p:sp>
-      <p:sp>
-        <p:nvSpPr>
-          <p:cNvPr id="14" name="Shape 12"/>
-          <p:cNvSpPr/>
-          <p:nvPr/>
-        </p:nvSpPr>
-        <p:spPr>
-          <a:xfrm>
-            <a:off x="5120640" y="2194560"/>
-            <a:ext cx="1993392" cy="1371600"/>
-          </a:xfrm>
-          <a:prstGeom prst="roundRect">
-            <a:avLst>
-              <a:gd name="adj" fmla="val 6667"/>
-            </a:avLst>
-          </a:prstGeom>
-          <a:solidFill>
-            <a:srgbClr val="0F2C44"/>
-          </a:solidFill>
-          <a:ln/>
-        </p:spPr>
-      </p:sp>
-      <p:sp>
-        <p:nvSpPr>
-          <p:cNvPr id="15" name="Text 13"/>
-          <p:cNvSpPr/>
-          <p:nvPr/>
-        </p:nvSpPr>
-        <p:spPr>
-          <a:xfrm>
-            <a:off x="5230368" y="2286000"/>
-            <a:ext cx="457200" cy="365760"/>
-          </a:xfrm>
-          <a:prstGeom prst="rect">
-            <a:avLst/>
-          </a:prstGeom>
-          <a:noFill/>
-          <a:ln/>
-        </p:spPr>
-        <p:txBody>
-          <a:bodyPr wrap="square" rtlCol="0" anchor="ctr"/>
-          <a:lstStyle/>
-          <a:p>
-            <a:pPr indent="0" marL="0">
-              <a:buNone/>
-            </a:pPr>
-            <a:r>
-              <a:rPr lang="en-US" sz="1600" b="1" dirty="0">
-                <a:solidFill>
-                  <a:srgbClr val="02C39A"/>
-                </a:solidFill>
-                <a:latin typeface="Trebuchet MS" pitchFamily="34" charset="0"/>
-                <a:ea typeface="Trebuchet MS" pitchFamily="34" charset="-122"/>
-                <a:cs typeface="Trebuchet MS" pitchFamily="34" charset="-120"/>
-              </a:rPr>
-              <a:t>3</a:t>
-            </a:r>
-            <a:endParaRPr lang="en-US" sz="1600" dirty="0"/>
+              <a:t>%98.5</a:t>
+            </a:r>
+            <a:endParaRPr lang="en-US" sz="5400" dirty="0"/>
           </a:p>
         </p:txBody>
       </p:sp>
@@ -4566,594 +3743,136 @@
         </p:nvSpPr>
         <p:spPr>
           <a:xfrm>
-            <a:off x="5120640" y="2560320"/>
-            <a:ext cx="1993392" cy="365760"/>
-          </a:xfrm>
-          <a:prstGeom prst="rect">
-            <a:avLst/>
-          </a:prstGeom>
-          <a:noFill/>
-          <a:ln/>
-        </p:spPr>
-        <p:txBody>
-          <a:bodyPr wrap="square" rtlCol="0" anchor="ctr"/>
-          <a:lstStyle/>
-          <a:p>
-            <a:pPr algn="ctr" indent="0" marL="0">
-              <a:buNone/>
-            </a:pPr>
-            <a:r>
-              <a:rPr lang="en-US" sz="1800" b="1" dirty="0">
+            <a:off x="9098280" y="3611880"/>
+            <a:ext cx="2542032" cy="731520"/>
+          </a:xfrm>
+          <a:prstGeom prst="rect">
+            <a:avLst/>
+          </a:prstGeom>
+          <a:noFill/>
+          <a:ln/>
+        </p:spPr>
+        <p:txBody>
+          <a:bodyPr wrap="square" rtlCol="0" anchor="ctr"/>
+          <a:lstStyle/>
+          <a:p>
+            <a:pPr marL="0" indent="0" algn="ctr">
+              <a:lnSpc>
+                <a:spcPct val="110000"/>
+              </a:lnSpc>
+              <a:buNone/>
+            </a:pPr>
+            <a:r>
+              <a:rPr lang="en-US" sz="1400" dirty="0">
                 <a:solidFill>
                   <a:srgbClr val="FFFFFF"/>
-                </a:solidFill>
-                <a:latin typeface="Trebuchet MS" pitchFamily="34" charset="0"/>
-                <a:ea typeface="Trebuchet MS" pitchFamily="34" charset="-122"/>
-                <a:cs typeface="Trebuchet MS" pitchFamily="34" charset="-120"/>
-              </a:rPr>
-              <a:t>BUILD</a:t>
-            </a:r>
-            <a:endParaRPr lang="en-US" sz="1800" dirty="0"/>
-          </a:p>
-        </p:txBody>
-      </p:sp>
-      <p:sp>
-        <p:nvSpPr>
-          <p:cNvPr id="17" name="Text 15"/>
-          <p:cNvSpPr/>
-          <p:nvPr/>
-        </p:nvSpPr>
-        <p:spPr>
-          <a:xfrm>
-            <a:off x="5120640" y="2944368"/>
-            <a:ext cx="1993392" cy="548640"/>
-          </a:xfrm>
-          <a:prstGeom prst="rect">
-            <a:avLst/>
-          </a:prstGeom>
-          <a:noFill/>
-          <a:ln/>
-        </p:spPr>
-        <p:txBody>
-          <a:bodyPr wrap="square" rtlCol="0" anchor="ctr"/>
-          <a:lstStyle/>
-          <a:p>
-            <a:pPr algn="ctr" indent="0" marL="0">
-              <a:lnSpc>
-                <a:spcPct val="100000"/>
-              </a:lnSpc>
-              <a:buNone/>
-            </a:pPr>
-            <a:r>
-              <a:rPr lang="en-US" sz="1200" dirty="0">
-                <a:solidFill>
-                  <a:srgbClr val="CADCFC"/>
                 </a:solidFill>
                 <a:latin typeface="Calibri" pitchFamily="34" charset="0"/>
                 <a:ea typeface="Calibri" pitchFamily="34" charset="-122"/>
                 <a:cs typeface="Calibri" pitchFamily="34" charset="-120"/>
               </a:rPr>
-              <a:t>docker</a:t>
-            </a:r>
-            <a:endParaRPr lang="en-US" sz="1200" dirty="0"/>
-          </a:p>
-          <a:p>
-            <a:pPr algn="ctr" indent="0" marL="0">
+              <a:t>hedef ≥ %70</a:t>
+            </a:r>
+            <a:endParaRPr lang="en-US" sz="1400" dirty="0"/>
+          </a:p>
+          <a:p>
+            <a:pPr marL="0" indent="0" algn="ctr">
               <a:lnSpc>
-                <a:spcPct val="100000"/>
+                <a:spcPct val="110000"/>
               </a:lnSpc>
               <a:buNone/>
             </a:pPr>
             <a:r>
-              <a:rPr lang="en-US" sz="1200" dirty="0">
-                <a:solidFill>
-                  <a:srgbClr val="CADCFC"/>
+              <a:rPr lang="en-US" sz="1400" dirty="0">
+                <a:solidFill>
+                  <a:srgbClr val="FFFFFF"/>
                 </a:solidFill>
                 <a:latin typeface="Calibri" pitchFamily="34" charset="0"/>
                 <a:ea typeface="Calibri" pitchFamily="34" charset="-122"/>
                 <a:cs typeface="Calibri" pitchFamily="34" charset="-120"/>
               </a:rPr>
-              <a:t>multi-stage</a:t>
-            </a:r>
-            <a:endParaRPr lang="en-US" sz="1200" dirty="0"/>
-          </a:p>
-        </p:txBody>
-      </p:sp>
-      <p:sp>
-        <p:nvSpPr>
-          <p:cNvPr id="18" name="Text 16"/>
-          <p:cNvSpPr/>
-          <p:nvPr/>
-        </p:nvSpPr>
-        <p:spPr>
-          <a:xfrm>
-            <a:off x="7095744" y="2194560"/>
-            <a:ext cx="292608" cy="1371600"/>
-          </a:xfrm>
-          <a:prstGeom prst="rect">
-            <a:avLst/>
-          </a:prstGeom>
-          <a:noFill/>
-          <a:ln/>
-        </p:spPr>
-        <p:txBody>
-          <a:bodyPr wrap="square" rtlCol="0" anchor="ctr"/>
-          <a:lstStyle/>
-          <a:p>
-            <a:pPr algn="ctr" indent="0" marL="0">
-              <a:buNone/>
-            </a:pPr>
-            <a:r>
-              <a:rPr lang="en-US" sz="2800" b="1" dirty="0">
-                <a:solidFill>
-                  <a:srgbClr val="1C7293"/>
-                </a:solidFill>
-                <a:latin typeface="Trebuchet MS" pitchFamily="34" charset="0"/>
-                <a:ea typeface="Trebuchet MS" pitchFamily="34" charset="-122"/>
-                <a:cs typeface="Trebuchet MS" pitchFamily="34" charset="-120"/>
-              </a:rPr>
-              <a:t>›</a:t>
-            </a:r>
-            <a:endParaRPr lang="en-US" sz="2800" dirty="0"/>
-          </a:p>
-        </p:txBody>
-      </p:sp>
-      <p:sp>
-        <p:nvSpPr>
-          <p:cNvPr id="19" name="Shape 17"/>
-          <p:cNvSpPr/>
-          <p:nvPr/>
-        </p:nvSpPr>
-        <p:spPr>
-          <a:xfrm>
-            <a:off x="7406640" y="2194560"/>
-            <a:ext cx="1993392" cy="1371600"/>
-          </a:xfrm>
-          <a:prstGeom prst="roundRect">
-            <a:avLst>
-              <a:gd name="adj" fmla="val 6667"/>
-            </a:avLst>
-          </a:prstGeom>
-          <a:solidFill>
-            <a:srgbClr val="02C39A"/>
-          </a:solidFill>
-          <a:ln/>
-        </p:spPr>
-      </p:sp>
-      <p:sp>
-        <p:nvSpPr>
-          <p:cNvPr id="20" name="Text 18"/>
-          <p:cNvSpPr/>
-          <p:nvPr/>
-        </p:nvSpPr>
-        <p:spPr>
-          <a:xfrm>
-            <a:off x="7516368" y="2286000"/>
-            <a:ext cx="457200" cy="365760"/>
-          </a:xfrm>
-          <a:prstGeom prst="rect">
-            <a:avLst/>
-          </a:prstGeom>
-          <a:noFill/>
-          <a:ln/>
-        </p:spPr>
-        <p:txBody>
-          <a:bodyPr wrap="square" rtlCol="0" anchor="ctr"/>
-          <a:lstStyle/>
-          <a:p>
-            <a:pPr indent="0" marL="0">
-              <a:buNone/>
-            </a:pPr>
-            <a:r>
-              <a:rPr lang="en-US" sz="1600" b="1" dirty="0">
-                <a:solidFill>
-                  <a:srgbClr val="0F2C44"/>
-                </a:solidFill>
-                <a:latin typeface="Trebuchet MS" pitchFamily="34" charset="0"/>
-                <a:ea typeface="Trebuchet MS" pitchFamily="34" charset="-122"/>
-                <a:cs typeface="Trebuchet MS" pitchFamily="34" charset="-120"/>
-              </a:rPr>
-              <a:t>4</a:t>
-            </a:r>
-            <a:endParaRPr lang="en-US" sz="1600" dirty="0"/>
-          </a:p>
-        </p:txBody>
-      </p:sp>
-      <p:sp>
-        <p:nvSpPr>
-          <p:cNvPr id="21" name="Text 19"/>
-          <p:cNvSpPr/>
-          <p:nvPr/>
-        </p:nvSpPr>
-        <p:spPr>
-          <a:xfrm>
-            <a:off x="7406640" y="2560320"/>
-            <a:ext cx="1993392" cy="365760"/>
-          </a:xfrm>
-          <a:prstGeom prst="rect">
-            <a:avLst/>
-          </a:prstGeom>
-          <a:noFill/>
-          <a:ln/>
-        </p:spPr>
-        <p:txBody>
-          <a:bodyPr wrap="square" rtlCol="0" anchor="ctr"/>
-          <a:lstStyle/>
-          <a:p>
-            <a:pPr algn="ctr" indent="0" marL="0">
-              <a:buNone/>
-            </a:pPr>
-            <a:r>
-              <a:rPr lang="en-US" sz="1800" b="1" dirty="0">
-                <a:solidFill>
-                  <a:srgbClr val="0F2C44"/>
-                </a:solidFill>
-                <a:latin typeface="Trebuchet MS" pitchFamily="34" charset="0"/>
-                <a:ea typeface="Trebuchet MS" pitchFamily="34" charset="-122"/>
-                <a:cs typeface="Trebuchet MS" pitchFamily="34" charset="-120"/>
-              </a:rPr>
-              <a:t>DEPLOY</a:t>
-            </a:r>
-            <a:endParaRPr lang="en-US" sz="1800" dirty="0"/>
-          </a:p>
-        </p:txBody>
-      </p:sp>
-      <p:sp>
-        <p:nvSpPr>
-          <p:cNvPr id="22" name="Text 20"/>
-          <p:cNvSpPr/>
-          <p:nvPr/>
-        </p:nvSpPr>
-        <p:spPr>
-          <a:xfrm>
-            <a:off x="7406640" y="2944368"/>
-            <a:ext cx="1993392" cy="548640"/>
-          </a:xfrm>
-          <a:prstGeom prst="rect">
-            <a:avLst/>
-          </a:prstGeom>
-          <a:noFill/>
-          <a:ln/>
-        </p:spPr>
-        <p:txBody>
-          <a:bodyPr wrap="square" rtlCol="0" anchor="ctr"/>
-          <a:lstStyle/>
-          <a:p>
-            <a:pPr algn="ctr" indent="0" marL="0">
-              <a:lnSpc>
-                <a:spcPct val="100000"/>
-              </a:lnSpc>
-              <a:buNone/>
-            </a:pPr>
-            <a:r>
-              <a:rPr lang="en-US" sz="1200" dirty="0">
-                <a:solidFill>
-                  <a:srgbClr val="0F2C44"/>
+              <a:t>(fail_under = 70)</a:t>
+            </a:r>
+            <a:endParaRPr lang="en-US" sz="1400" dirty="0"/>
+          </a:p>
+        </p:txBody>
+      </p:sp>
+      <p:sp>
+        <p:nvSpPr>
+          <p:cNvPr id="17" name="Text 15"/>
+          <p:cNvSpPr/>
+          <p:nvPr/>
+        </p:nvSpPr>
+        <p:spPr>
+          <a:xfrm>
+            <a:off x="9098280" y="4434840"/>
+            <a:ext cx="2542032" cy="548640"/>
+          </a:xfrm>
+          <a:prstGeom prst="rect">
+            <a:avLst/>
+          </a:prstGeom>
+          <a:noFill/>
+          <a:ln/>
+        </p:spPr>
+        <p:txBody>
+          <a:bodyPr wrap="square" rtlCol="0" anchor="ctr"/>
+          <a:lstStyle/>
+          <a:p>
+            <a:pPr marL="0" indent="0" algn="ctr">
+              <a:buNone/>
+            </a:pPr>
+            <a:r>
+              <a:rPr lang="en-US" sz="1300" b="1" dirty="0">
+                <a:solidFill>
+                  <a:srgbClr val="02C39A"/>
                 </a:solidFill>
                 <a:latin typeface="Calibri" pitchFamily="34" charset="0"/>
                 <a:ea typeface="Calibri" pitchFamily="34" charset="-122"/>
                 <a:cs typeface="Calibri" pitchFamily="34" charset="-120"/>
               </a:rPr>
-              <a:t>Minikube</a:t>
-            </a:r>
-            <a:endParaRPr lang="en-US" sz="1200" dirty="0"/>
-          </a:p>
-          <a:p>
-            <a:pPr algn="ctr" indent="0" marL="0">
+              <a:t>293 test geçer · 0 hata</a:t>
+            </a:r>
+            <a:endParaRPr lang="en-US" sz="1300" dirty="0"/>
+          </a:p>
+        </p:txBody>
+      </p:sp>
+      <p:sp>
+        <p:nvSpPr>
+          <p:cNvPr id="18" name="Text 16"/>
+          <p:cNvSpPr/>
+          <p:nvPr/>
+        </p:nvSpPr>
+        <p:spPr>
+          <a:xfrm>
+            <a:off x="548640" y="5669280"/>
+            <a:ext cx="8138160" cy="822960"/>
+          </a:xfrm>
+          <a:prstGeom prst="rect">
+            <a:avLst/>
+          </a:prstGeom>
+          <a:noFill/>
+          <a:ln/>
+        </p:spPr>
+        <p:txBody>
+          <a:bodyPr wrap="square" rtlCol="0" anchor="ctr"/>
+          <a:lstStyle/>
+          <a:p>
+            <a:pPr marL="0" indent="0">
               <a:lnSpc>
-                <a:spcPct val="100000"/>
+                <a:spcPct val="110000"/>
               </a:lnSpc>
               <a:buNone/>
             </a:pPr>
             <a:r>
-              <a:rPr lang="en-US" sz="1200" dirty="0">
-                <a:solidFill>
-                  <a:srgbClr val="0F2C44"/>
+              <a:rPr lang="en-US" sz="1300" i="1" dirty="0">
+                <a:solidFill>
+                  <a:srgbClr val="6E7E8C"/>
                 </a:solidFill>
                 <a:latin typeface="Calibri" pitchFamily="34" charset="0"/>
                 <a:ea typeface="Calibri" pitchFamily="34" charset="-122"/>
                 <a:cs typeface="Calibri" pitchFamily="34" charset="-120"/>
               </a:rPr>
-              <a:t>kubectl apply</a:t>
-            </a:r>
-            <a:endParaRPr lang="en-US" sz="1200" dirty="0"/>
-          </a:p>
-        </p:txBody>
-      </p:sp>
-      <p:sp>
-        <p:nvSpPr>
-          <p:cNvPr id="23" name="Text 21"/>
-          <p:cNvSpPr/>
-          <p:nvPr/>
-        </p:nvSpPr>
-        <p:spPr>
-          <a:xfrm>
-            <a:off x="9381744" y="2194560"/>
-            <a:ext cx="292608" cy="1371600"/>
-          </a:xfrm>
-          <a:prstGeom prst="rect">
-            <a:avLst/>
-          </a:prstGeom>
-          <a:noFill/>
-          <a:ln/>
-        </p:spPr>
-        <p:txBody>
-          <a:bodyPr wrap="square" rtlCol="0" anchor="ctr"/>
-          <a:lstStyle/>
-          <a:p>
-            <a:pPr algn="ctr" indent="0" marL="0">
-              <a:buNone/>
-            </a:pPr>
-            <a:r>
-              <a:rPr lang="en-US" sz="2800" b="1" dirty="0">
-                <a:solidFill>
-                  <a:srgbClr val="1C7293"/>
-                </a:solidFill>
-                <a:latin typeface="Trebuchet MS" pitchFamily="34" charset="0"/>
-                <a:ea typeface="Trebuchet MS" pitchFamily="34" charset="-122"/>
-                <a:cs typeface="Trebuchet MS" pitchFamily="34" charset="-120"/>
-              </a:rPr>
-              <a:t>›</a:t>
-            </a:r>
-            <a:endParaRPr lang="en-US" sz="2800" dirty="0"/>
-          </a:p>
-        </p:txBody>
-      </p:sp>
-      <p:sp>
-        <p:nvSpPr>
-          <p:cNvPr id="24" name="Shape 22"/>
-          <p:cNvSpPr/>
-          <p:nvPr/>
-        </p:nvSpPr>
-        <p:spPr>
-          <a:xfrm>
-            <a:off x="9692640" y="2194560"/>
-            <a:ext cx="1993392" cy="1371600"/>
-          </a:xfrm>
-          <a:prstGeom prst="roundRect">
-            <a:avLst>
-              <a:gd name="adj" fmla="val 6667"/>
-            </a:avLst>
-          </a:prstGeom>
-          <a:solidFill>
-            <a:srgbClr val="0F2C44"/>
-          </a:solidFill>
-          <a:ln/>
-        </p:spPr>
-      </p:sp>
-      <p:sp>
-        <p:nvSpPr>
-          <p:cNvPr id="25" name="Text 23"/>
-          <p:cNvSpPr/>
-          <p:nvPr/>
-        </p:nvSpPr>
-        <p:spPr>
-          <a:xfrm>
-            <a:off x="9802368" y="2286000"/>
-            <a:ext cx="457200" cy="365760"/>
-          </a:xfrm>
-          <a:prstGeom prst="rect">
-            <a:avLst/>
-          </a:prstGeom>
-          <a:noFill/>
-          <a:ln/>
-        </p:spPr>
-        <p:txBody>
-          <a:bodyPr wrap="square" rtlCol="0" anchor="ctr"/>
-          <a:lstStyle/>
-          <a:p>
-            <a:pPr indent="0" marL="0">
-              <a:buNone/>
-            </a:pPr>
-            <a:r>
-              <a:rPr lang="en-US" sz="1600" b="1" dirty="0">
-                <a:solidFill>
-                  <a:srgbClr val="02C39A"/>
-                </a:solidFill>
-                <a:latin typeface="Trebuchet MS" pitchFamily="34" charset="0"/>
-                <a:ea typeface="Trebuchet MS" pitchFamily="34" charset="-122"/>
-                <a:cs typeface="Trebuchet MS" pitchFamily="34" charset="-120"/>
-              </a:rPr>
-              <a:t>5</a:t>
-            </a:r>
-            <a:endParaRPr lang="en-US" sz="1600" dirty="0"/>
-          </a:p>
-        </p:txBody>
-      </p:sp>
-      <p:sp>
-        <p:nvSpPr>
-          <p:cNvPr id="26" name="Text 24"/>
-          <p:cNvSpPr/>
-          <p:nvPr/>
-        </p:nvSpPr>
-        <p:spPr>
-          <a:xfrm>
-            <a:off x="9692640" y="2560320"/>
-            <a:ext cx="1993392" cy="365760"/>
-          </a:xfrm>
-          <a:prstGeom prst="rect">
-            <a:avLst/>
-          </a:prstGeom>
-          <a:noFill/>
-          <a:ln/>
-        </p:spPr>
-        <p:txBody>
-          <a:bodyPr wrap="square" rtlCol="0" anchor="ctr"/>
-          <a:lstStyle/>
-          <a:p>
-            <a:pPr algn="ctr" indent="0" marL="0">
-              <a:buNone/>
-            </a:pPr>
-            <a:r>
-              <a:rPr lang="en-US" sz="1800" b="1" dirty="0">
-                <a:solidFill>
-                  <a:srgbClr val="FFFFFF"/>
-                </a:solidFill>
-                <a:latin typeface="Trebuchet MS" pitchFamily="34" charset="0"/>
-                <a:ea typeface="Trebuchet MS" pitchFamily="34" charset="-122"/>
-                <a:cs typeface="Trebuchet MS" pitchFamily="34" charset="-120"/>
-              </a:rPr>
-              <a:t>SMOKE</a:t>
-            </a:r>
-            <a:endParaRPr lang="en-US" sz="1800" dirty="0"/>
-          </a:p>
-        </p:txBody>
-      </p:sp>
-      <p:sp>
-        <p:nvSpPr>
-          <p:cNvPr id="27" name="Text 25"/>
-          <p:cNvSpPr/>
-          <p:nvPr/>
-        </p:nvSpPr>
-        <p:spPr>
-          <a:xfrm>
-            <a:off x="9692640" y="2944368"/>
-            <a:ext cx="1993392" cy="548640"/>
-          </a:xfrm>
-          <a:prstGeom prst="rect">
-            <a:avLst/>
-          </a:prstGeom>
-          <a:noFill/>
-          <a:ln/>
-        </p:spPr>
-        <p:txBody>
-          <a:bodyPr wrap="square" rtlCol="0" anchor="ctr"/>
-          <a:lstStyle/>
-          <a:p>
-            <a:pPr algn="ctr" indent="0" marL="0">
-              <a:lnSpc>
-                <a:spcPct val="100000"/>
-              </a:lnSpc>
-              <a:buNone/>
-            </a:pPr>
-            <a:r>
-              <a:rPr lang="en-US" sz="1200" dirty="0">
-                <a:solidFill>
-                  <a:srgbClr val="CADCFC"/>
-                </a:solidFill>
-                <a:latin typeface="Calibri" pitchFamily="34" charset="0"/>
-                <a:ea typeface="Calibri" pitchFamily="34" charset="-122"/>
-                <a:cs typeface="Calibri" pitchFamily="34" charset="-120"/>
-              </a:rPr>
-              <a:t>/health · Newman</a:t>
-            </a:r>
-            <a:endParaRPr lang="en-US" sz="1200" dirty="0"/>
-          </a:p>
-          <a:p>
-            <a:pPr algn="ctr" indent="0" marL="0">
-              <a:lnSpc>
-                <a:spcPct val="100000"/>
-              </a:lnSpc>
-              <a:buNone/>
-            </a:pPr>
-            <a:r>
-              <a:rPr lang="en-US" sz="1200" dirty="0">
-                <a:solidFill>
-                  <a:srgbClr val="CADCFC"/>
-                </a:solidFill>
-                <a:latin typeface="Calibri" pitchFamily="34" charset="0"/>
-                <a:ea typeface="Calibri" pitchFamily="34" charset="-122"/>
-                <a:cs typeface="Calibri" pitchFamily="34" charset="-120"/>
-              </a:rPr>
-              <a:t>E2E · k6</a:t>
-            </a:r>
-            <a:endParaRPr lang="en-US" sz="1200" dirty="0"/>
-          </a:p>
-        </p:txBody>
-      </p:sp>
-      <p:sp>
-        <p:nvSpPr>
-          <p:cNvPr id="28" name="Text 26"/>
-          <p:cNvSpPr/>
-          <p:nvPr/>
-        </p:nvSpPr>
-        <p:spPr>
-          <a:xfrm>
-            <a:off x="548640" y="4069080"/>
-            <a:ext cx="11091672" cy="914400"/>
-          </a:xfrm>
-          <a:prstGeom prst="rect">
-            <a:avLst/>
-          </a:prstGeom>
-          <a:noFill/>
-          <a:ln/>
-        </p:spPr>
-        <p:txBody>
-          <a:bodyPr wrap="square" rtlCol="0" anchor="ctr"/>
-          <a:lstStyle/>
-          <a:p>
-            <a:pPr indent="0" marL="0">
-              <a:lnSpc>
-                <a:spcPct val="120000"/>
-              </a:lnSpc>
-              <a:buNone/>
-            </a:pPr>
-            <a:r>
-              <a:rPr lang="en-US" sz="1500" b="1" dirty="0">
-                <a:solidFill>
-                  <a:srgbClr val="0F2C44"/>
-                </a:solidFill>
-                <a:latin typeface="Calibri" pitchFamily="34" charset="0"/>
-                <a:ea typeface="Calibri" pitchFamily="34" charset="-122"/>
-                <a:cs typeface="Calibri" pitchFamily="34" charset="-120"/>
-              </a:rPr>
-              <a:t>Deploy stratejisi:  </a:t>
-            </a:r>
-            <a:pPr indent="0" marL="0">
-              <a:lnSpc>
-                <a:spcPct val="120000"/>
-              </a:lnSpc>
-              <a:buNone/>
-            </a:pPr>
-            <a:r>
-              <a:rPr lang="en-US" sz="1500" dirty="0">
-                <a:solidFill>
-                  <a:srgbClr val="22303C"/>
-                </a:solidFill>
-                <a:latin typeface="Calibri" pitchFamily="34" charset="0"/>
-                <a:ea typeface="Calibri" pitchFamily="34" charset="-122"/>
-                <a:cs typeface="Calibri" pitchFamily="34" charset="-120"/>
-              </a:rPr>
-              <a:t>Minikube'de gerçek k8s deploy — image yüklenir, manifestler uygulanır, kubectl rollout status beklenir, ardından servise /health smoke. 2 replica ile rolling update; readiness geçmeden trafik yok. Rollback: kubectl rollout undo.</a:t>
-            </a:r>
-            <a:endParaRPr lang="en-US" sz="1500" dirty="0"/>
-          </a:p>
-        </p:txBody>
-      </p:sp>
-      <p:sp>
-        <p:nvSpPr>
-          <p:cNvPr id="29" name="Text 27"/>
-          <p:cNvSpPr/>
-          <p:nvPr/>
-        </p:nvSpPr>
-        <p:spPr>
-          <a:xfrm>
-            <a:off x="548640" y="5212080"/>
-            <a:ext cx="11091672" cy="548640"/>
-          </a:xfrm>
-          <a:prstGeom prst="rect">
-            <a:avLst/>
-          </a:prstGeom>
-          <a:noFill/>
-          <a:ln/>
-        </p:spPr>
-        <p:txBody>
-          <a:bodyPr wrap="square" rtlCol="0" anchor="ctr"/>
-          <a:lstStyle/>
-          <a:p>
-            <a:pPr indent="0" marL="0">
-              <a:buNone/>
-            </a:pPr>
-            <a:r>
-              <a:rPr lang="en-US" sz="1300" i="1" dirty="0">
-                <a:solidFill>
-                  <a:srgbClr val="6E7E8C"/>
-                </a:solidFill>
-                <a:latin typeface="Calibri" pitchFamily="34" charset="0"/>
-                <a:ea typeface="Calibri" pitchFamily="34" charset="-122"/>
-                <a:cs typeface="Calibri" pitchFamily="34" charset="-120"/>
-              </a:rPr>
-              <a:t>Tüm test piramidi otomatik: 293 unit+integration + 25 E2E (Playwright) + k6 p95&lt;500 regresyon kapısı · ruff lint temiz.</a:t>
+              <a:t>Factory Boy + Faker (Room/Booking/Hotel/User) suite genelinde · Postman 7 istek → Newman · öne çıkan: 409 çakışma, iptal sonrası müsaitlik, ownership, kalıcılık.</a:t>
             </a:r>
             <a:endParaRPr lang="en-US" sz="1300" dirty="0"/>
           </a:p>
@@ -5169,12 +3888,13 @@
 
 <file path=ppt/slides/slide6.xml><?xml version="1.0" encoding="utf-8"?>
 <p:sld xmlns:a="http://schemas.openxmlformats.org/drawingml/2006/main" xmlns:r="http://schemas.openxmlformats.org/officeDocument/2006/relationships" xmlns:p="http://schemas.openxmlformats.org/presentationml/2006/main">
-  <p:cSld name="Slide 6">
+  <p:cSld name="Slide 5">
     <p:bg>
       <p:bgPr>
         <a:solidFill>
           <a:srgbClr val="FFFFFF"/>
         </a:solidFill>
+        <a:effectLst/>
       </p:bgPr>
     </p:bg>
     <p:spTree>
@@ -5212,11 +3932,11 @@
           <a:bodyPr wrap="square" rtlCol="0" anchor="ctr"/>
           <a:lstStyle/>
           <a:p>
-            <a:pPr indent="0" marL="0">
-              <a:buNone/>
-            </a:pPr>
-            <a:r>
-              <a:rPr lang="en-US" sz="1200" b="1" spc="200" kern="0" dirty="0">
+            <a:pPr marL="0" indent="0">
+              <a:buNone/>
+            </a:pPr>
+            <a:r>
+              <a:rPr lang="en-US" sz="1200" b="1" kern="0" spc="200" dirty="0">
                 <a:solidFill>
                   <a:srgbClr val="02C39A"/>
                 </a:solidFill>
@@ -5224,7 +3944,7 @@
                 <a:ea typeface="Calibri" pitchFamily="34" charset="-122"/>
                 <a:cs typeface="Calibri" pitchFamily="34" charset="-120"/>
               </a:rPr>
-              <a:t>5 · MONITORING &amp; OBSERVABILITY</a:t>
+              <a:t>4 · CI/CD PIPELINE</a:t>
             </a:r>
             <a:endParaRPr lang="en-US" sz="1200" dirty="0"/>
           </a:p>
@@ -5251,7 +3971,7 @@
           <a:bodyPr wrap="square" rtlCol="0" anchor="ctr"/>
           <a:lstStyle/>
           <a:p>
-            <a:pPr indent="0" marL="0">
+            <a:pPr marL="0" indent="0">
               <a:buNone/>
             </a:pPr>
             <a:r>
@@ -5263,7 +3983,7 @@
                 <a:ea typeface="Trebuchet MS" pitchFamily="34" charset="-122"/>
                 <a:cs typeface="Trebuchet MS" pitchFamily="34" charset="-120"/>
               </a:rPr>
-              <a:t>Prometheus + Grafana — 3 panel</a:t>
+              <a:t>GitHub Actions: lint → test → build → deploy → smoke</a:t>
             </a:r>
             <a:endParaRPr lang="en-US" sz="3200" dirty="0"/>
           </a:p>
@@ -5277,31 +3997,26 @@
         </p:nvSpPr>
         <p:spPr>
           <a:xfrm>
-            <a:off x="548640" y="1828800"/>
-            <a:ext cx="3657600" cy="2468880"/>
+            <a:off x="548640" y="2194560"/>
+            <a:ext cx="1993392" cy="1371600"/>
           </a:xfrm>
           <a:prstGeom prst="roundRect">
             <a:avLst>
-              <a:gd name="adj" fmla="val 2963"/>
+              <a:gd name="adj" fmla="val 6667"/>
             </a:avLst>
           </a:prstGeom>
           <a:solidFill>
-            <a:srgbClr val="F2F6F9"/>
+            <a:srgbClr val="0F2C44"/>
           </a:solidFill>
-          <a:ln w="12700">
-            <a:solidFill>
-              <a:srgbClr val="D8E2EA"/>
-            </a:solidFill>
-            <a:prstDash val="solid"/>
-          </a:ln>
-          <a:effectLst>
-            <a:outerShdw sx="100000" sy="100000" kx="0" ky="0" algn="bl" rotWithShape="0" blurRad="76200" dist="25400" dir="5400000">
-              <a:srgbClr val="9AB0BF">
-                <a:alpha val="25000"/>
-              </a:srgbClr>
-            </a:outerShdw>
-          </a:effectLst>
-        </p:spPr>
+          <a:ln/>
+        </p:spPr>
+        <p:txBody>
+          <a:bodyPr/>
+          <a:lstStyle/>
+          <a:p>
+            <a:endParaRPr lang="tr-TR"/>
+          </a:p>
+        </p:txBody>
       </p:sp>
       <p:sp>
         <p:nvSpPr>
@@ -5311,24 +4026,24 @@
         </p:nvSpPr>
         <p:spPr>
           <a:xfrm>
-            <a:off x="777240" y="2011680"/>
-            <a:ext cx="914400" cy="457200"/>
-          </a:xfrm>
-          <a:prstGeom prst="rect">
-            <a:avLst/>
-          </a:prstGeom>
-          <a:noFill/>
-          <a:ln/>
-        </p:spPr>
-        <p:txBody>
-          <a:bodyPr wrap="square" rtlCol="0" anchor="ctr"/>
-          <a:lstStyle/>
-          <a:p>
-            <a:pPr indent="0" marL="0">
-              <a:buNone/>
-            </a:pPr>
-            <a:r>
-              <a:rPr lang="en-US" sz="2200" b="1" dirty="0">
+            <a:off x="658368" y="2286000"/>
+            <a:ext cx="457200" cy="365760"/>
+          </a:xfrm>
+          <a:prstGeom prst="rect">
+            <a:avLst/>
+          </a:prstGeom>
+          <a:noFill/>
+          <a:ln/>
+        </p:spPr>
+        <p:txBody>
+          <a:bodyPr wrap="square" rtlCol="0" anchor="ctr"/>
+          <a:lstStyle/>
+          <a:p>
+            <a:pPr marL="0" indent="0">
+              <a:buNone/>
+            </a:pPr>
+            <a:r>
+              <a:rPr lang="en-US" sz="1600" b="1" dirty="0">
                 <a:solidFill>
                   <a:srgbClr val="02C39A"/>
                 </a:solidFill>
@@ -5336,9 +4051,9 @@
                 <a:ea typeface="Trebuchet MS" pitchFamily="34" charset="-122"/>
                 <a:cs typeface="Trebuchet MS" pitchFamily="34" charset="-120"/>
               </a:rPr>
-              <a:t>01</a:t>
-            </a:r>
-            <a:endParaRPr lang="en-US" sz="2200" dirty="0"/>
+              <a:t>1</a:t>
+            </a:r>
+            <a:endParaRPr lang="en-US" sz="1600" dirty="0"/>
           </a:p>
         </p:txBody>
       </p:sp>
@@ -5350,34 +4065,34 @@
         </p:nvSpPr>
         <p:spPr>
           <a:xfrm>
-            <a:off x="777240" y="2514600"/>
-            <a:ext cx="3200400" cy="365760"/>
-          </a:xfrm>
-          <a:prstGeom prst="rect">
-            <a:avLst/>
-          </a:prstGeom>
-          <a:noFill/>
-          <a:ln/>
-        </p:spPr>
-        <p:txBody>
-          <a:bodyPr wrap="square" rtlCol="0" anchor="ctr"/>
-          <a:lstStyle/>
-          <a:p>
-            <a:pPr indent="0" marL="0">
-              <a:buNone/>
-            </a:pPr>
-            <a:r>
-              <a:rPr lang="en-US" sz="1700" b="1" dirty="0">
-                <a:solidFill>
-                  <a:srgbClr val="0F2C44"/>
+            <a:off x="548640" y="2560320"/>
+            <a:ext cx="1993392" cy="365760"/>
+          </a:xfrm>
+          <a:prstGeom prst="rect">
+            <a:avLst/>
+          </a:prstGeom>
+          <a:noFill/>
+          <a:ln/>
+        </p:spPr>
+        <p:txBody>
+          <a:bodyPr wrap="square" rtlCol="0" anchor="ctr"/>
+          <a:lstStyle/>
+          <a:p>
+            <a:pPr marL="0" indent="0" algn="ctr">
+              <a:buNone/>
+            </a:pPr>
+            <a:r>
+              <a:rPr lang="en-US" sz="1800" b="1" dirty="0">
+                <a:solidFill>
+                  <a:srgbClr val="FFFFFF"/>
                 </a:solidFill>
                 <a:latin typeface="Trebuchet MS" pitchFamily="34" charset="0"/>
                 <a:ea typeface="Trebuchet MS" pitchFamily="34" charset="-122"/>
                 <a:cs typeface="Trebuchet MS" pitchFamily="34" charset="-120"/>
               </a:rPr>
-              <a:t>Request Latency</a:t>
-            </a:r>
-            <a:endParaRPr lang="en-US" sz="1700" dirty="0"/>
+              <a:t>LINT</a:t>
+            </a:r>
+            <a:endParaRPr lang="en-US" sz="1800" dirty="0"/>
           </a:p>
         </p:txBody>
       </p:sp>
@@ -5389,34 +4104,37 @@
         </p:nvSpPr>
         <p:spPr>
           <a:xfrm>
-            <a:off x="777240" y="2880360"/>
-            <a:ext cx="3200400" cy="320040"/>
-          </a:xfrm>
-          <a:prstGeom prst="rect">
-            <a:avLst/>
-          </a:prstGeom>
-          <a:noFill/>
-          <a:ln/>
-        </p:spPr>
-        <p:txBody>
-          <a:bodyPr wrap="square" rtlCol="0" anchor="ctr"/>
-          <a:lstStyle/>
-          <a:p>
-            <a:pPr indent="0" marL="0">
-              <a:buNone/>
-            </a:pPr>
-            <a:r>
-              <a:rPr lang="en-US" sz="1400" b="1" dirty="0">
-                <a:solidFill>
-                  <a:srgbClr val="1C7293"/>
+            <a:off x="548640" y="2944368"/>
+            <a:ext cx="1993392" cy="548640"/>
+          </a:xfrm>
+          <a:prstGeom prst="rect">
+            <a:avLst/>
+          </a:prstGeom>
+          <a:noFill/>
+          <a:ln/>
+        </p:spPr>
+        <p:txBody>
+          <a:bodyPr wrap="square" rtlCol="0" anchor="ctr"/>
+          <a:lstStyle/>
+          <a:p>
+            <a:pPr marL="0" indent="0" algn="ctr">
+              <a:lnSpc>
+                <a:spcPct val="100000"/>
+              </a:lnSpc>
+              <a:buNone/>
+            </a:pPr>
+            <a:r>
+              <a:rPr lang="en-US" sz="1200" dirty="0">
+                <a:solidFill>
+                  <a:srgbClr val="CADCFC"/>
                 </a:solidFill>
                 <a:latin typeface="Calibri" pitchFamily="34" charset="0"/>
                 <a:ea typeface="Calibri" pitchFamily="34" charset="-122"/>
                 <a:cs typeface="Calibri" pitchFamily="34" charset="-120"/>
               </a:rPr>
-              <a:t>p50 / p95 / p99</a:t>
-            </a:r>
-            <a:endParaRPr lang="en-US" sz="1400" dirty="0"/>
+              <a:t>ruff (E·F·I)</a:t>
+            </a:r>
+            <a:endParaRPr lang="en-US" sz="1200" dirty="0"/>
           </a:p>
         </p:txBody>
       </p:sp>
@@ -5428,332 +4146,508 @@
         </p:nvSpPr>
         <p:spPr>
           <a:xfrm>
-            <a:off x="777240" y="3246120"/>
-            <a:ext cx="3200400" cy="914400"/>
-          </a:xfrm>
-          <a:prstGeom prst="rect">
-            <a:avLst/>
-          </a:prstGeom>
-          <a:noFill/>
-          <a:ln/>
-        </p:spPr>
-        <p:txBody>
-          <a:bodyPr wrap="square" rtlCol="0" anchor="ctr"/>
-          <a:lstStyle/>
-          <a:p>
-            <a:pPr indent="0" marL="0">
+            <a:off x="2523744" y="2194560"/>
+            <a:ext cx="292608" cy="1371600"/>
+          </a:xfrm>
+          <a:prstGeom prst="rect">
+            <a:avLst/>
+          </a:prstGeom>
+          <a:noFill/>
+          <a:ln/>
+        </p:spPr>
+        <p:txBody>
+          <a:bodyPr wrap="square" rtlCol="0" anchor="ctr"/>
+          <a:lstStyle/>
+          <a:p>
+            <a:pPr marL="0" indent="0" algn="ctr">
+              <a:buNone/>
+            </a:pPr>
+            <a:r>
+              <a:rPr lang="en-US" sz="2800" b="1" dirty="0">
+                <a:solidFill>
+                  <a:srgbClr val="1C7293"/>
+                </a:solidFill>
+                <a:latin typeface="Trebuchet MS" pitchFamily="34" charset="0"/>
+                <a:ea typeface="Trebuchet MS" pitchFamily="34" charset="-122"/>
+                <a:cs typeface="Trebuchet MS" pitchFamily="34" charset="-120"/>
+              </a:rPr>
+              <a:t>›</a:t>
+            </a:r>
+            <a:endParaRPr lang="en-US" sz="2800" dirty="0"/>
+          </a:p>
+        </p:txBody>
+      </p:sp>
+      <p:sp>
+        <p:nvSpPr>
+          <p:cNvPr id="9" name="Shape 7"/>
+          <p:cNvSpPr/>
+          <p:nvPr/>
+        </p:nvSpPr>
+        <p:spPr>
+          <a:xfrm>
+            <a:off x="2834640" y="2194560"/>
+            <a:ext cx="1993392" cy="1371600"/>
+          </a:xfrm>
+          <a:prstGeom prst="roundRect">
+            <a:avLst>
+              <a:gd name="adj" fmla="val 6667"/>
+            </a:avLst>
+          </a:prstGeom>
+          <a:solidFill>
+            <a:srgbClr val="0F2C44"/>
+          </a:solidFill>
+          <a:ln/>
+        </p:spPr>
+        <p:txBody>
+          <a:bodyPr/>
+          <a:lstStyle/>
+          <a:p>
+            <a:endParaRPr lang="tr-TR"/>
+          </a:p>
+        </p:txBody>
+      </p:sp>
+      <p:sp>
+        <p:nvSpPr>
+          <p:cNvPr id="10" name="Text 8"/>
+          <p:cNvSpPr/>
+          <p:nvPr/>
+        </p:nvSpPr>
+        <p:spPr>
+          <a:xfrm>
+            <a:off x="2944368" y="2286000"/>
+            <a:ext cx="457200" cy="365760"/>
+          </a:xfrm>
+          <a:prstGeom prst="rect">
+            <a:avLst/>
+          </a:prstGeom>
+          <a:noFill/>
+          <a:ln/>
+        </p:spPr>
+        <p:txBody>
+          <a:bodyPr wrap="square" rtlCol="0" anchor="ctr"/>
+          <a:lstStyle/>
+          <a:p>
+            <a:pPr marL="0" indent="0">
+              <a:buNone/>
+            </a:pPr>
+            <a:r>
+              <a:rPr lang="en-US" sz="1600" b="1" dirty="0">
+                <a:solidFill>
+                  <a:srgbClr val="02C39A"/>
+                </a:solidFill>
+                <a:latin typeface="Trebuchet MS" pitchFamily="34" charset="0"/>
+                <a:ea typeface="Trebuchet MS" pitchFamily="34" charset="-122"/>
+                <a:cs typeface="Trebuchet MS" pitchFamily="34" charset="-120"/>
+              </a:rPr>
+              <a:t>2</a:t>
+            </a:r>
+            <a:endParaRPr lang="en-US" sz="1600" dirty="0"/>
+          </a:p>
+        </p:txBody>
+      </p:sp>
+      <p:sp>
+        <p:nvSpPr>
+          <p:cNvPr id="11" name="Text 9"/>
+          <p:cNvSpPr/>
+          <p:nvPr/>
+        </p:nvSpPr>
+        <p:spPr>
+          <a:xfrm>
+            <a:off x="2834640" y="2560320"/>
+            <a:ext cx="1993392" cy="365760"/>
+          </a:xfrm>
+          <a:prstGeom prst="rect">
+            <a:avLst/>
+          </a:prstGeom>
+          <a:noFill/>
+          <a:ln/>
+        </p:spPr>
+        <p:txBody>
+          <a:bodyPr wrap="square" rtlCol="0" anchor="ctr"/>
+          <a:lstStyle/>
+          <a:p>
+            <a:pPr marL="0" indent="0" algn="ctr">
+              <a:buNone/>
+            </a:pPr>
+            <a:r>
+              <a:rPr lang="en-US" sz="1800" b="1" dirty="0">
+                <a:solidFill>
+                  <a:srgbClr val="FFFFFF"/>
+                </a:solidFill>
+                <a:latin typeface="Trebuchet MS" pitchFamily="34" charset="0"/>
+                <a:ea typeface="Trebuchet MS" pitchFamily="34" charset="-122"/>
+                <a:cs typeface="Trebuchet MS" pitchFamily="34" charset="-120"/>
+              </a:rPr>
+              <a:t>TEST</a:t>
+            </a:r>
+            <a:endParaRPr lang="en-US" sz="1800" dirty="0"/>
+          </a:p>
+        </p:txBody>
+      </p:sp>
+      <p:sp>
+        <p:nvSpPr>
+          <p:cNvPr id="12" name="Text 10"/>
+          <p:cNvSpPr/>
+          <p:nvPr/>
+        </p:nvSpPr>
+        <p:spPr>
+          <a:xfrm>
+            <a:off x="2834640" y="2944368"/>
+            <a:ext cx="1993392" cy="548640"/>
+          </a:xfrm>
+          <a:prstGeom prst="rect">
+            <a:avLst/>
+          </a:prstGeom>
+          <a:noFill/>
+          <a:ln/>
+        </p:spPr>
+        <p:txBody>
+          <a:bodyPr wrap="square" rtlCol="0" anchor="ctr"/>
+          <a:lstStyle/>
+          <a:p>
+            <a:pPr marL="0" indent="0" algn="ctr">
               <a:lnSpc>
-                <a:spcPct val="110000"/>
+                <a:spcPct val="100000"/>
               </a:lnSpc>
               <a:buNone/>
             </a:pPr>
             <a:r>
-              <a:rPr lang="en-US" sz="1300" dirty="0">
-                <a:solidFill>
-                  <a:srgbClr val="22303C"/>
+              <a:rPr lang="en-US" sz="1200" dirty="0">
+                <a:solidFill>
+                  <a:srgbClr val="CADCFC"/>
                 </a:solidFill>
                 <a:latin typeface="Calibri" pitchFamily="34" charset="0"/>
                 <a:ea typeface="Calibri" pitchFamily="34" charset="-122"/>
                 <a:cs typeface="Calibri" pitchFamily="34" charset="-120"/>
               </a:rPr>
-              <a:t>histogram_quantile üzerinden gecikme dağılımı</a:t>
-            </a:r>
-            <a:endParaRPr lang="en-US" sz="1300" dirty="0"/>
-          </a:p>
-        </p:txBody>
-      </p:sp>
-      <p:sp>
-        <p:nvSpPr>
-          <p:cNvPr id="9" name="Shape 7"/>
-          <p:cNvSpPr/>
-          <p:nvPr/>
-        </p:nvSpPr>
-        <p:spPr>
-          <a:xfrm>
-            <a:off x="4389120" y="1828800"/>
-            <a:ext cx="3657600" cy="2468880"/>
-          </a:xfrm>
-          <a:prstGeom prst="roundRect">
-            <a:avLst>
-              <a:gd name="adj" fmla="val 2963"/>
-            </a:avLst>
-          </a:prstGeom>
-          <a:solidFill>
-            <a:srgbClr val="F2F6F9"/>
-          </a:solidFill>
-          <a:ln w="12700">
-            <a:solidFill>
-              <a:srgbClr val="D8E2EA"/>
-            </a:solidFill>
-            <a:prstDash val="solid"/>
-          </a:ln>
-          <a:effectLst>
-            <a:outerShdw sx="100000" sy="100000" kx="0" ky="0" algn="bl" rotWithShape="0" blurRad="76200" dist="25400" dir="5400000">
-              <a:srgbClr val="9AB0BF">
-                <a:alpha val="25000"/>
-              </a:srgbClr>
-            </a:outerShdw>
-          </a:effectLst>
-        </p:spPr>
-      </p:sp>
-      <p:sp>
-        <p:nvSpPr>
-          <p:cNvPr id="10" name="Text 8"/>
-          <p:cNvSpPr/>
-          <p:nvPr/>
-        </p:nvSpPr>
-        <p:spPr>
-          <a:xfrm>
-            <a:off x="4617720" y="2011680"/>
-            <a:ext cx="914400" cy="457200"/>
-          </a:xfrm>
-          <a:prstGeom prst="rect">
-            <a:avLst/>
-          </a:prstGeom>
-          <a:noFill/>
-          <a:ln/>
-        </p:spPr>
-        <p:txBody>
-          <a:bodyPr wrap="square" rtlCol="0" anchor="ctr"/>
-          <a:lstStyle/>
-          <a:p>
-            <a:pPr indent="0" marL="0">
-              <a:buNone/>
-            </a:pPr>
-            <a:r>
-              <a:rPr lang="en-US" sz="2200" b="1" dirty="0">
-                <a:solidFill>
-                  <a:srgbClr val="02C39A"/>
+              <a:t>pytest</a:t>
+            </a:r>
+            <a:endParaRPr lang="en-US" sz="1200" dirty="0"/>
+          </a:p>
+          <a:p>
+            <a:pPr marL="0" indent="0" algn="ctr">
+              <a:lnSpc>
+                <a:spcPct val="100000"/>
+              </a:lnSpc>
+              <a:buNone/>
+            </a:pPr>
+            <a:r>
+              <a:rPr lang="en-US" sz="1200" dirty="0">
+                <a:solidFill>
+                  <a:srgbClr val="CADCFC"/>
+                </a:solidFill>
+                <a:latin typeface="Calibri" pitchFamily="34" charset="0"/>
+                <a:ea typeface="Calibri" pitchFamily="34" charset="-122"/>
+                <a:cs typeface="Calibri" pitchFamily="34" charset="-120"/>
+              </a:rPr>
+              <a:t>cov ≥70%</a:t>
+            </a:r>
+            <a:endParaRPr lang="en-US" sz="1200" dirty="0"/>
+          </a:p>
+        </p:txBody>
+      </p:sp>
+      <p:sp>
+        <p:nvSpPr>
+          <p:cNvPr id="13" name="Text 11"/>
+          <p:cNvSpPr/>
+          <p:nvPr/>
+        </p:nvSpPr>
+        <p:spPr>
+          <a:xfrm>
+            <a:off x="4809744" y="2194560"/>
+            <a:ext cx="292608" cy="1371600"/>
+          </a:xfrm>
+          <a:prstGeom prst="rect">
+            <a:avLst/>
+          </a:prstGeom>
+          <a:noFill/>
+          <a:ln/>
+        </p:spPr>
+        <p:txBody>
+          <a:bodyPr wrap="square" rtlCol="0" anchor="ctr"/>
+          <a:lstStyle/>
+          <a:p>
+            <a:pPr marL="0" indent="0" algn="ctr">
+              <a:buNone/>
+            </a:pPr>
+            <a:r>
+              <a:rPr lang="en-US" sz="2800" b="1" dirty="0">
+                <a:solidFill>
+                  <a:srgbClr val="1C7293"/>
                 </a:solidFill>
                 <a:latin typeface="Trebuchet MS" pitchFamily="34" charset="0"/>
                 <a:ea typeface="Trebuchet MS" pitchFamily="34" charset="-122"/>
                 <a:cs typeface="Trebuchet MS" pitchFamily="34" charset="-120"/>
               </a:rPr>
-              <a:t>02</a:t>
-            </a:r>
-            <a:endParaRPr lang="en-US" sz="2200" dirty="0"/>
-          </a:p>
-        </p:txBody>
-      </p:sp>
-      <p:sp>
-        <p:nvSpPr>
-          <p:cNvPr id="11" name="Text 9"/>
-          <p:cNvSpPr/>
-          <p:nvPr/>
-        </p:nvSpPr>
-        <p:spPr>
-          <a:xfrm>
-            <a:off x="4617720" y="2514600"/>
-            <a:ext cx="3200400" cy="365760"/>
-          </a:xfrm>
-          <a:prstGeom prst="rect">
-            <a:avLst/>
-          </a:prstGeom>
-          <a:noFill/>
-          <a:ln/>
-        </p:spPr>
-        <p:txBody>
-          <a:bodyPr wrap="square" rtlCol="0" anchor="ctr"/>
-          <a:lstStyle/>
-          <a:p>
-            <a:pPr indent="0" marL="0">
-              <a:buNone/>
-            </a:pPr>
-            <a:r>
-              <a:rPr lang="en-US" sz="1700" b="1" dirty="0">
-                <a:solidFill>
-                  <a:srgbClr val="0F2C44"/>
+              <a:t>›</a:t>
+            </a:r>
+            <a:endParaRPr lang="en-US" sz="2800" dirty="0"/>
+          </a:p>
+        </p:txBody>
+      </p:sp>
+      <p:sp>
+        <p:nvSpPr>
+          <p:cNvPr id="14" name="Shape 12"/>
+          <p:cNvSpPr/>
+          <p:nvPr/>
+        </p:nvSpPr>
+        <p:spPr>
+          <a:xfrm>
+            <a:off x="5120640" y="2194560"/>
+            <a:ext cx="1993392" cy="1371600"/>
+          </a:xfrm>
+          <a:prstGeom prst="roundRect">
+            <a:avLst>
+              <a:gd name="adj" fmla="val 6667"/>
+            </a:avLst>
+          </a:prstGeom>
+          <a:solidFill>
+            <a:srgbClr val="0F2C44"/>
+          </a:solidFill>
+          <a:ln/>
+        </p:spPr>
+        <p:txBody>
+          <a:bodyPr/>
+          <a:lstStyle/>
+          <a:p>
+            <a:endParaRPr lang="tr-TR"/>
+          </a:p>
+        </p:txBody>
+      </p:sp>
+      <p:sp>
+        <p:nvSpPr>
+          <p:cNvPr id="15" name="Text 13"/>
+          <p:cNvSpPr/>
+          <p:nvPr/>
+        </p:nvSpPr>
+        <p:spPr>
+          <a:xfrm>
+            <a:off x="5230368" y="2286000"/>
+            <a:ext cx="457200" cy="365760"/>
+          </a:xfrm>
+          <a:prstGeom prst="rect">
+            <a:avLst/>
+          </a:prstGeom>
+          <a:noFill/>
+          <a:ln/>
+        </p:spPr>
+        <p:txBody>
+          <a:bodyPr wrap="square" rtlCol="0" anchor="ctr"/>
+          <a:lstStyle/>
+          <a:p>
+            <a:pPr marL="0" indent="0">
+              <a:buNone/>
+            </a:pPr>
+            <a:r>
+              <a:rPr lang="en-US" sz="1600" b="1" dirty="0">
+                <a:solidFill>
+                  <a:srgbClr val="02C39A"/>
                 </a:solidFill>
                 <a:latin typeface="Trebuchet MS" pitchFamily="34" charset="0"/>
                 <a:ea typeface="Trebuchet MS" pitchFamily="34" charset="-122"/>
                 <a:cs typeface="Trebuchet MS" pitchFamily="34" charset="-120"/>
               </a:rPr>
-              <a:t>Error Rate</a:t>
-            </a:r>
-            <a:endParaRPr lang="en-US" sz="1700" dirty="0"/>
-          </a:p>
-        </p:txBody>
-      </p:sp>
-      <p:sp>
-        <p:nvSpPr>
-          <p:cNvPr id="12" name="Text 10"/>
-          <p:cNvSpPr/>
-          <p:nvPr/>
-        </p:nvSpPr>
-        <p:spPr>
-          <a:xfrm>
-            <a:off x="4617720" y="2880360"/>
-            <a:ext cx="3200400" cy="320040"/>
-          </a:xfrm>
-          <a:prstGeom prst="rect">
-            <a:avLst/>
-          </a:prstGeom>
-          <a:noFill/>
-          <a:ln/>
-        </p:spPr>
-        <p:txBody>
-          <a:bodyPr wrap="square" rtlCol="0" anchor="ctr"/>
-          <a:lstStyle/>
-          <a:p>
-            <a:pPr indent="0" marL="0">
-              <a:buNone/>
-            </a:pPr>
-            <a:r>
-              <a:rPr lang="en-US" sz="1400" b="1" dirty="0">
-                <a:solidFill>
-                  <a:srgbClr val="1C7293"/>
+              <a:t>3</a:t>
+            </a:r>
+            <a:endParaRPr lang="en-US" sz="1600" dirty="0"/>
+          </a:p>
+        </p:txBody>
+      </p:sp>
+      <p:sp>
+        <p:nvSpPr>
+          <p:cNvPr id="16" name="Text 14"/>
+          <p:cNvSpPr/>
+          <p:nvPr/>
+        </p:nvSpPr>
+        <p:spPr>
+          <a:xfrm>
+            <a:off x="5120640" y="2560320"/>
+            <a:ext cx="1993392" cy="365760"/>
+          </a:xfrm>
+          <a:prstGeom prst="rect">
+            <a:avLst/>
+          </a:prstGeom>
+          <a:noFill/>
+          <a:ln/>
+        </p:spPr>
+        <p:txBody>
+          <a:bodyPr wrap="square" rtlCol="0" anchor="ctr"/>
+          <a:lstStyle/>
+          <a:p>
+            <a:pPr marL="0" indent="0" algn="ctr">
+              <a:buNone/>
+            </a:pPr>
+            <a:r>
+              <a:rPr lang="en-US" sz="1800" b="1" dirty="0">
+                <a:solidFill>
+                  <a:srgbClr val="FFFFFF"/>
+                </a:solidFill>
+                <a:latin typeface="Trebuchet MS" pitchFamily="34" charset="0"/>
+                <a:ea typeface="Trebuchet MS" pitchFamily="34" charset="-122"/>
+                <a:cs typeface="Trebuchet MS" pitchFamily="34" charset="-120"/>
+              </a:rPr>
+              <a:t>BUILD</a:t>
+            </a:r>
+            <a:endParaRPr lang="en-US" sz="1800" dirty="0"/>
+          </a:p>
+        </p:txBody>
+      </p:sp>
+      <p:sp>
+        <p:nvSpPr>
+          <p:cNvPr id="17" name="Text 15"/>
+          <p:cNvSpPr/>
+          <p:nvPr/>
+        </p:nvSpPr>
+        <p:spPr>
+          <a:xfrm>
+            <a:off x="5120640" y="2944368"/>
+            <a:ext cx="1993392" cy="548640"/>
+          </a:xfrm>
+          <a:prstGeom prst="rect">
+            <a:avLst/>
+          </a:prstGeom>
+          <a:noFill/>
+          <a:ln/>
+        </p:spPr>
+        <p:txBody>
+          <a:bodyPr wrap="square" rtlCol="0" anchor="ctr"/>
+          <a:lstStyle/>
+          <a:p>
+            <a:pPr marL="0" indent="0" algn="ctr">
+              <a:lnSpc>
+                <a:spcPct val="100000"/>
+              </a:lnSpc>
+              <a:buNone/>
+            </a:pPr>
+            <a:r>
+              <a:rPr lang="en-US" sz="1200" dirty="0">
+                <a:solidFill>
+                  <a:srgbClr val="CADCFC"/>
                 </a:solidFill>
                 <a:latin typeface="Calibri" pitchFamily="34" charset="0"/>
                 <a:ea typeface="Calibri" pitchFamily="34" charset="-122"/>
                 <a:cs typeface="Calibri" pitchFamily="34" charset="-120"/>
               </a:rPr>
-              <a:t>5xx / toplam</a:t>
-            </a:r>
-            <a:endParaRPr lang="en-US" sz="1400" dirty="0"/>
-          </a:p>
-        </p:txBody>
-      </p:sp>
-      <p:sp>
-        <p:nvSpPr>
-          <p:cNvPr id="13" name="Text 11"/>
-          <p:cNvSpPr/>
-          <p:nvPr/>
-        </p:nvSpPr>
-        <p:spPr>
-          <a:xfrm>
-            <a:off x="4617720" y="3246120"/>
-            <a:ext cx="3200400" cy="914400"/>
-          </a:xfrm>
-          <a:prstGeom prst="rect">
-            <a:avLst/>
-          </a:prstGeom>
-          <a:noFill/>
-          <a:ln/>
-        </p:spPr>
-        <p:txBody>
-          <a:bodyPr wrap="square" rtlCol="0" anchor="ctr"/>
-          <a:lstStyle/>
-          <a:p>
-            <a:pPr indent="0" marL="0">
+              <a:t>docker</a:t>
+            </a:r>
+            <a:endParaRPr lang="en-US" sz="1200" dirty="0"/>
+          </a:p>
+          <a:p>
+            <a:pPr marL="0" indent="0" algn="ctr">
               <a:lnSpc>
-                <a:spcPct val="110000"/>
+                <a:spcPct val="100000"/>
               </a:lnSpc>
               <a:buNone/>
             </a:pPr>
             <a:r>
-              <a:rPr lang="en-US" sz="1300" dirty="0">
-                <a:solidFill>
-                  <a:srgbClr val="22303C"/>
+              <a:rPr lang="en-US" sz="1200" dirty="0">
+                <a:solidFill>
+                  <a:srgbClr val="CADCFC"/>
                 </a:solidFill>
                 <a:latin typeface="Calibri" pitchFamily="34" charset="0"/>
                 <a:ea typeface="Calibri" pitchFamily="34" charset="-122"/>
                 <a:cs typeface="Calibri" pitchFamily="34" charset="-120"/>
               </a:rPr>
-              <a:t>hata oranı zaman serisi (yük altında %0)</a:t>
-            </a:r>
-            <a:endParaRPr lang="en-US" sz="1300" dirty="0"/>
-          </a:p>
-        </p:txBody>
-      </p:sp>
-      <p:sp>
-        <p:nvSpPr>
-          <p:cNvPr id="14" name="Shape 12"/>
-          <p:cNvSpPr/>
-          <p:nvPr/>
-        </p:nvSpPr>
-        <p:spPr>
-          <a:xfrm>
-            <a:off x="8229600" y="1828800"/>
-            <a:ext cx="3657600" cy="2468880"/>
-          </a:xfrm>
-          <a:prstGeom prst="roundRect">
-            <a:avLst>
-              <a:gd name="adj" fmla="val 2963"/>
-            </a:avLst>
-          </a:prstGeom>
-          <a:solidFill>
-            <a:srgbClr val="F2F6F9"/>
-          </a:solidFill>
-          <a:ln w="12700">
-            <a:solidFill>
-              <a:srgbClr val="D8E2EA"/>
-            </a:solidFill>
-            <a:prstDash val="solid"/>
-          </a:ln>
-          <a:effectLst>
-            <a:outerShdw sx="100000" sy="100000" kx="0" ky="0" algn="bl" rotWithShape="0" blurRad="76200" dist="25400" dir="5400000">
-              <a:srgbClr val="9AB0BF">
-                <a:alpha val="25000"/>
-              </a:srgbClr>
-            </a:outerShdw>
-          </a:effectLst>
-        </p:spPr>
-      </p:sp>
-      <p:sp>
-        <p:nvSpPr>
-          <p:cNvPr id="15" name="Text 13"/>
-          <p:cNvSpPr/>
-          <p:nvPr/>
-        </p:nvSpPr>
-        <p:spPr>
-          <a:xfrm>
-            <a:off x="8458200" y="2011680"/>
-            <a:ext cx="914400" cy="457200"/>
-          </a:xfrm>
-          <a:prstGeom prst="rect">
-            <a:avLst/>
-          </a:prstGeom>
-          <a:noFill/>
-          <a:ln/>
-        </p:spPr>
-        <p:txBody>
-          <a:bodyPr wrap="square" rtlCol="0" anchor="ctr"/>
-          <a:lstStyle/>
-          <a:p>
-            <a:pPr indent="0" marL="0">
-              <a:buNone/>
-            </a:pPr>
-            <a:r>
-              <a:rPr lang="en-US" sz="2200" b="1" dirty="0">
-                <a:solidFill>
-                  <a:srgbClr val="02C39A"/>
+              <a:t>multi-stage</a:t>
+            </a:r>
+            <a:endParaRPr lang="en-US" sz="1200" dirty="0"/>
+          </a:p>
+        </p:txBody>
+      </p:sp>
+      <p:sp>
+        <p:nvSpPr>
+          <p:cNvPr id="18" name="Text 16"/>
+          <p:cNvSpPr/>
+          <p:nvPr/>
+        </p:nvSpPr>
+        <p:spPr>
+          <a:xfrm>
+            <a:off x="7095744" y="2194560"/>
+            <a:ext cx="292608" cy="1371600"/>
+          </a:xfrm>
+          <a:prstGeom prst="rect">
+            <a:avLst/>
+          </a:prstGeom>
+          <a:noFill/>
+          <a:ln/>
+        </p:spPr>
+        <p:txBody>
+          <a:bodyPr wrap="square" rtlCol="0" anchor="ctr"/>
+          <a:lstStyle/>
+          <a:p>
+            <a:pPr marL="0" indent="0" algn="ctr">
+              <a:buNone/>
+            </a:pPr>
+            <a:r>
+              <a:rPr lang="en-US" sz="2800" b="1" dirty="0">
+                <a:solidFill>
+                  <a:srgbClr val="1C7293"/>
                 </a:solidFill>
                 <a:latin typeface="Trebuchet MS" pitchFamily="34" charset="0"/>
                 <a:ea typeface="Trebuchet MS" pitchFamily="34" charset="-122"/>
                 <a:cs typeface="Trebuchet MS" pitchFamily="34" charset="-120"/>
               </a:rPr>
-              <a:t>03</a:t>
-            </a:r>
-            <a:endParaRPr lang="en-US" sz="2200" dirty="0"/>
-          </a:p>
-        </p:txBody>
-      </p:sp>
-      <p:sp>
-        <p:nvSpPr>
-          <p:cNvPr id="16" name="Text 14"/>
-          <p:cNvSpPr/>
-          <p:nvPr/>
-        </p:nvSpPr>
-        <p:spPr>
-          <a:xfrm>
-            <a:off x="8458200" y="2514600"/>
-            <a:ext cx="3200400" cy="365760"/>
-          </a:xfrm>
-          <a:prstGeom prst="rect">
-            <a:avLst/>
-          </a:prstGeom>
-          <a:noFill/>
-          <a:ln/>
-        </p:spPr>
-        <p:txBody>
-          <a:bodyPr wrap="square" rtlCol="0" anchor="ctr"/>
-          <a:lstStyle/>
-          <a:p>
-            <a:pPr indent="0" marL="0">
-              <a:buNone/>
-            </a:pPr>
-            <a:r>
-              <a:rPr lang="en-US" sz="1700" b="1" dirty="0">
+              <a:t>›</a:t>
+            </a:r>
+            <a:endParaRPr lang="en-US" sz="2800" dirty="0"/>
+          </a:p>
+        </p:txBody>
+      </p:sp>
+      <p:sp>
+        <p:nvSpPr>
+          <p:cNvPr id="19" name="Shape 17"/>
+          <p:cNvSpPr/>
+          <p:nvPr/>
+        </p:nvSpPr>
+        <p:spPr>
+          <a:xfrm>
+            <a:off x="7406640" y="2194560"/>
+            <a:ext cx="1993392" cy="1371600"/>
+          </a:xfrm>
+          <a:prstGeom prst="roundRect">
+            <a:avLst>
+              <a:gd name="adj" fmla="val 6667"/>
+            </a:avLst>
+          </a:prstGeom>
+          <a:solidFill>
+            <a:srgbClr val="02C39A"/>
+          </a:solidFill>
+          <a:ln/>
+        </p:spPr>
+        <p:txBody>
+          <a:bodyPr/>
+          <a:lstStyle/>
+          <a:p>
+            <a:endParaRPr lang="tr-TR"/>
+          </a:p>
+        </p:txBody>
+      </p:sp>
+      <p:sp>
+        <p:nvSpPr>
+          <p:cNvPr id="20" name="Text 18"/>
+          <p:cNvSpPr/>
+          <p:nvPr/>
+        </p:nvSpPr>
+        <p:spPr>
+          <a:xfrm>
+            <a:off x="7516368" y="2286000"/>
+            <a:ext cx="457200" cy="365760"/>
+          </a:xfrm>
+          <a:prstGeom prst="rect">
+            <a:avLst/>
+          </a:prstGeom>
+          <a:noFill/>
+          <a:ln/>
+        </p:spPr>
+        <p:txBody>
+          <a:bodyPr wrap="square" rtlCol="0" anchor="ctr"/>
+          <a:lstStyle/>
+          <a:p>
+            <a:pPr marL="0" indent="0">
+              <a:buNone/>
+            </a:pPr>
+            <a:r>
+              <a:rPr lang="en-US" sz="1600" b="1" dirty="0">
                 <a:solidFill>
                   <a:srgbClr val="0F2C44"/>
                 </a:solidFill>
@@ -5761,178 +4655,410 @@
                 <a:ea typeface="Trebuchet MS" pitchFamily="34" charset="-122"/>
                 <a:cs typeface="Trebuchet MS" pitchFamily="34" charset="-120"/>
               </a:rPr>
-              <a:t>Throughput</a:t>
-            </a:r>
-            <a:endParaRPr lang="en-US" sz="1700" dirty="0"/>
-          </a:p>
-        </p:txBody>
-      </p:sp>
-      <p:sp>
-        <p:nvSpPr>
-          <p:cNvPr id="17" name="Text 15"/>
-          <p:cNvSpPr/>
-          <p:nvPr/>
-        </p:nvSpPr>
-        <p:spPr>
-          <a:xfrm>
-            <a:off x="8458200" y="2880360"/>
-            <a:ext cx="3200400" cy="320040"/>
-          </a:xfrm>
-          <a:prstGeom prst="rect">
-            <a:avLst/>
-          </a:prstGeom>
-          <a:noFill/>
-          <a:ln/>
-        </p:spPr>
-        <p:txBody>
-          <a:bodyPr wrap="square" rtlCol="0" anchor="ctr"/>
-          <a:lstStyle/>
-          <a:p>
-            <a:pPr indent="0" marL="0">
-              <a:buNone/>
-            </a:pPr>
-            <a:r>
-              <a:rPr lang="en-US" sz="1400" b="1" dirty="0">
-                <a:solidFill>
-                  <a:srgbClr val="1C7293"/>
+              <a:t>4</a:t>
+            </a:r>
+            <a:endParaRPr lang="en-US" sz="1600" dirty="0"/>
+          </a:p>
+        </p:txBody>
+      </p:sp>
+      <p:sp>
+        <p:nvSpPr>
+          <p:cNvPr id="21" name="Text 19"/>
+          <p:cNvSpPr/>
+          <p:nvPr/>
+        </p:nvSpPr>
+        <p:spPr>
+          <a:xfrm>
+            <a:off x="7406640" y="2560320"/>
+            <a:ext cx="1993392" cy="365760"/>
+          </a:xfrm>
+          <a:prstGeom prst="rect">
+            <a:avLst/>
+          </a:prstGeom>
+          <a:noFill/>
+          <a:ln/>
+        </p:spPr>
+        <p:txBody>
+          <a:bodyPr wrap="square" rtlCol="0" anchor="ctr"/>
+          <a:lstStyle/>
+          <a:p>
+            <a:pPr marL="0" indent="0" algn="ctr">
+              <a:buNone/>
+            </a:pPr>
+            <a:r>
+              <a:rPr lang="en-US" sz="1800" b="1" dirty="0">
+                <a:solidFill>
+                  <a:srgbClr val="0F2C44"/>
+                </a:solidFill>
+                <a:latin typeface="Trebuchet MS" pitchFamily="34" charset="0"/>
+                <a:ea typeface="Trebuchet MS" pitchFamily="34" charset="-122"/>
+                <a:cs typeface="Trebuchet MS" pitchFamily="34" charset="-120"/>
+              </a:rPr>
+              <a:t>DEPLOY</a:t>
+            </a:r>
+            <a:endParaRPr lang="en-US" sz="1800" dirty="0"/>
+          </a:p>
+        </p:txBody>
+      </p:sp>
+      <p:sp>
+        <p:nvSpPr>
+          <p:cNvPr id="22" name="Text 20"/>
+          <p:cNvSpPr/>
+          <p:nvPr/>
+        </p:nvSpPr>
+        <p:spPr>
+          <a:xfrm>
+            <a:off x="7406640" y="2944368"/>
+            <a:ext cx="1993392" cy="548640"/>
+          </a:xfrm>
+          <a:prstGeom prst="rect">
+            <a:avLst/>
+          </a:prstGeom>
+          <a:noFill/>
+          <a:ln/>
+        </p:spPr>
+        <p:txBody>
+          <a:bodyPr wrap="square" rtlCol="0" anchor="ctr"/>
+          <a:lstStyle/>
+          <a:p>
+            <a:pPr marL="0" indent="0" algn="ctr">
+              <a:lnSpc>
+                <a:spcPct val="100000"/>
+              </a:lnSpc>
+              <a:buNone/>
+            </a:pPr>
+            <a:r>
+              <a:rPr lang="en-US" sz="1200" dirty="0">
+                <a:solidFill>
+                  <a:srgbClr val="0F2C44"/>
                 </a:solidFill>
                 <a:latin typeface="Calibri" pitchFamily="34" charset="0"/>
                 <a:ea typeface="Calibri" pitchFamily="34" charset="-122"/>
                 <a:cs typeface="Calibri" pitchFamily="34" charset="-120"/>
               </a:rPr>
-              <a:t>req/s (handler)</a:t>
-            </a:r>
-            <a:endParaRPr lang="en-US" sz="1400" dirty="0"/>
-          </a:p>
-        </p:txBody>
-      </p:sp>
-      <p:sp>
-        <p:nvSpPr>
-          <p:cNvPr id="18" name="Text 16"/>
-          <p:cNvSpPr/>
-          <p:nvPr/>
-        </p:nvSpPr>
-        <p:spPr>
-          <a:xfrm>
-            <a:off x="8458200" y="3246120"/>
-            <a:ext cx="3200400" cy="914400"/>
-          </a:xfrm>
-          <a:prstGeom prst="rect">
-            <a:avLst/>
-          </a:prstGeom>
-          <a:noFill/>
-          <a:ln/>
-        </p:spPr>
-        <p:txBody>
-          <a:bodyPr wrap="square" rtlCol="0" anchor="ctr"/>
-          <a:lstStyle/>
-          <a:p>
-            <a:pPr indent="0" marL="0">
+              <a:t>Minikube</a:t>
+            </a:r>
+            <a:endParaRPr lang="en-US" sz="1200" dirty="0"/>
+          </a:p>
+          <a:p>
+            <a:pPr marL="0" indent="0" algn="ctr">
               <a:lnSpc>
-                <a:spcPct val="110000"/>
+                <a:spcPct val="100000"/>
               </a:lnSpc>
               <a:buNone/>
             </a:pPr>
             <a:r>
-              <a:rPr lang="en-US" sz="1300" dirty="0">
-                <a:solidFill>
-                  <a:srgbClr val="22303C"/>
+              <a:rPr lang="en-US" sz="1200" dirty="0">
+                <a:solidFill>
+                  <a:srgbClr val="0F2C44"/>
                 </a:solidFill>
                 <a:latin typeface="Calibri" pitchFamily="34" charset="0"/>
                 <a:ea typeface="Calibri" pitchFamily="34" charset="-122"/>
                 <a:cs typeface="Calibri" pitchFamily="34" charset="-120"/>
               </a:rPr>
-              <a:t>uç bazında istek hızı</a:t>
-            </a:r>
-            <a:endParaRPr lang="en-US" sz="1300" dirty="0"/>
-          </a:p>
-        </p:txBody>
-      </p:sp>
-      <p:sp>
-        <p:nvSpPr>
-          <p:cNvPr id="19" name="Shape 17"/>
-          <p:cNvSpPr/>
-          <p:nvPr/>
-        </p:nvSpPr>
-        <p:spPr>
-          <a:xfrm>
-            <a:off x="548640" y="4617720"/>
-            <a:ext cx="11091672" cy="1188720"/>
+              <a:t>kubectl apply</a:t>
+            </a:r>
+            <a:endParaRPr lang="en-US" sz="1200" dirty="0"/>
+          </a:p>
+        </p:txBody>
+      </p:sp>
+      <p:sp>
+        <p:nvSpPr>
+          <p:cNvPr id="23" name="Text 21"/>
+          <p:cNvSpPr/>
+          <p:nvPr/>
+        </p:nvSpPr>
+        <p:spPr>
+          <a:xfrm>
+            <a:off x="9381744" y="2194560"/>
+            <a:ext cx="292608" cy="1371600"/>
+          </a:xfrm>
+          <a:prstGeom prst="rect">
+            <a:avLst/>
+          </a:prstGeom>
+          <a:noFill/>
+          <a:ln/>
+        </p:spPr>
+        <p:txBody>
+          <a:bodyPr wrap="square" rtlCol="0" anchor="ctr"/>
+          <a:lstStyle/>
+          <a:p>
+            <a:pPr marL="0" indent="0" algn="ctr">
+              <a:buNone/>
+            </a:pPr>
+            <a:r>
+              <a:rPr lang="en-US" sz="2800" b="1" dirty="0">
+                <a:solidFill>
+                  <a:srgbClr val="1C7293"/>
+                </a:solidFill>
+                <a:latin typeface="Trebuchet MS" pitchFamily="34" charset="0"/>
+                <a:ea typeface="Trebuchet MS" pitchFamily="34" charset="-122"/>
+                <a:cs typeface="Trebuchet MS" pitchFamily="34" charset="-120"/>
+              </a:rPr>
+              <a:t>›</a:t>
+            </a:r>
+            <a:endParaRPr lang="en-US" sz="2800" dirty="0"/>
+          </a:p>
+        </p:txBody>
+      </p:sp>
+      <p:sp>
+        <p:nvSpPr>
+          <p:cNvPr id="24" name="Shape 22"/>
+          <p:cNvSpPr/>
+          <p:nvPr/>
+        </p:nvSpPr>
+        <p:spPr>
+          <a:xfrm>
+            <a:off x="9692640" y="2194560"/>
+            <a:ext cx="1993392" cy="1371600"/>
           </a:xfrm>
           <a:prstGeom prst="roundRect">
             <a:avLst>
-              <a:gd name="adj" fmla="val 6154"/>
+              <a:gd name="adj" fmla="val 6667"/>
             </a:avLst>
           </a:prstGeom>
           <a:solidFill>
             <a:srgbClr val="0F2C44"/>
           </a:solidFill>
           <a:ln/>
-          <a:effectLst>
-            <a:outerShdw sx="100000" sy="100000" kx="0" ky="0" algn="bl" rotWithShape="0" blurRad="76200" dist="25400" dir="5400000">
-              <a:srgbClr val="9AB0BF">
-                <a:alpha val="25000"/>
-              </a:srgbClr>
-            </a:outerShdw>
-          </a:effectLst>
-        </p:spPr>
-      </p:sp>
-      <p:sp>
-        <p:nvSpPr>
-          <p:cNvPr id="20" name="Text 18"/>
-          <p:cNvSpPr/>
-          <p:nvPr/>
-        </p:nvSpPr>
-        <p:spPr>
-          <a:xfrm>
-            <a:off x="822960" y="4846320"/>
-            <a:ext cx="10543032" cy="777240"/>
-          </a:xfrm>
-          <a:prstGeom prst="rect">
-            <a:avLst/>
-          </a:prstGeom>
-          <a:noFill/>
-          <a:ln/>
-        </p:spPr>
-        <p:txBody>
-          <a:bodyPr wrap="square" rtlCol="0" anchor="ctr"/>
-          <a:lstStyle/>
-          <a:p>
-            <a:pPr indent="0" marL="0">
+        </p:spPr>
+        <p:txBody>
+          <a:bodyPr/>
+          <a:lstStyle/>
+          <a:p>
+            <a:endParaRPr lang="tr-TR"/>
+          </a:p>
+        </p:txBody>
+      </p:sp>
+      <p:sp>
+        <p:nvSpPr>
+          <p:cNvPr id="25" name="Text 23"/>
+          <p:cNvSpPr/>
+          <p:nvPr/>
+        </p:nvSpPr>
+        <p:spPr>
+          <a:xfrm>
+            <a:off x="9802368" y="2286000"/>
+            <a:ext cx="457200" cy="365760"/>
+          </a:xfrm>
+          <a:prstGeom prst="rect">
+            <a:avLst/>
+          </a:prstGeom>
+          <a:noFill/>
+          <a:ln/>
+        </p:spPr>
+        <p:txBody>
+          <a:bodyPr wrap="square" rtlCol="0" anchor="ctr"/>
+          <a:lstStyle/>
+          <a:p>
+            <a:pPr marL="0" indent="0">
+              <a:buNone/>
+            </a:pPr>
+            <a:r>
+              <a:rPr lang="en-US" sz="1600" b="1" dirty="0">
+                <a:solidFill>
+                  <a:srgbClr val="02C39A"/>
+                </a:solidFill>
+                <a:latin typeface="Trebuchet MS" pitchFamily="34" charset="0"/>
+                <a:ea typeface="Trebuchet MS" pitchFamily="34" charset="-122"/>
+                <a:cs typeface="Trebuchet MS" pitchFamily="34" charset="-120"/>
+              </a:rPr>
+              <a:t>5</a:t>
+            </a:r>
+            <a:endParaRPr lang="en-US" sz="1600" dirty="0"/>
+          </a:p>
+        </p:txBody>
+      </p:sp>
+      <p:sp>
+        <p:nvSpPr>
+          <p:cNvPr id="26" name="Text 24"/>
+          <p:cNvSpPr/>
+          <p:nvPr/>
+        </p:nvSpPr>
+        <p:spPr>
+          <a:xfrm>
+            <a:off x="9692640" y="2560320"/>
+            <a:ext cx="1993392" cy="365760"/>
+          </a:xfrm>
+          <a:prstGeom prst="rect">
+            <a:avLst/>
+          </a:prstGeom>
+          <a:noFill/>
+          <a:ln/>
+        </p:spPr>
+        <p:txBody>
+          <a:bodyPr wrap="square" rtlCol="0" anchor="ctr"/>
+          <a:lstStyle/>
+          <a:p>
+            <a:pPr marL="0" indent="0" algn="ctr">
+              <a:buNone/>
+            </a:pPr>
+            <a:r>
+              <a:rPr lang="en-US" sz="1800" b="1" dirty="0">
+                <a:solidFill>
+                  <a:srgbClr val="FFFFFF"/>
+                </a:solidFill>
+                <a:latin typeface="Trebuchet MS" pitchFamily="34" charset="0"/>
+                <a:ea typeface="Trebuchet MS" pitchFamily="34" charset="-122"/>
+                <a:cs typeface="Trebuchet MS" pitchFamily="34" charset="-120"/>
+              </a:rPr>
+              <a:t>SMOKE</a:t>
+            </a:r>
+            <a:endParaRPr lang="en-US" sz="1800" dirty="0"/>
+          </a:p>
+        </p:txBody>
+      </p:sp>
+      <p:sp>
+        <p:nvSpPr>
+          <p:cNvPr id="27" name="Text 25"/>
+          <p:cNvSpPr/>
+          <p:nvPr/>
+        </p:nvSpPr>
+        <p:spPr>
+          <a:xfrm>
+            <a:off x="9692640" y="2944368"/>
+            <a:ext cx="1993392" cy="548640"/>
+          </a:xfrm>
+          <a:prstGeom prst="rect">
+            <a:avLst/>
+          </a:prstGeom>
+          <a:noFill/>
+          <a:ln/>
+        </p:spPr>
+        <p:txBody>
+          <a:bodyPr wrap="square" rtlCol="0" anchor="ctr"/>
+          <a:lstStyle/>
+          <a:p>
+            <a:pPr marL="0" indent="0" algn="ctr">
               <a:lnSpc>
-                <a:spcPct val="115000"/>
+                <a:spcPct val="100000"/>
               </a:lnSpc>
               <a:buNone/>
             </a:pPr>
             <a:r>
-              <a:rPr lang="en-US" sz="1400" b="1" dirty="0">
-                <a:solidFill>
-                  <a:srgbClr val="02C39A"/>
+              <a:rPr lang="en-US" sz="1200" dirty="0">
+                <a:solidFill>
+                  <a:srgbClr val="CADCFC"/>
                 </a:solidFill>
                 <a:latin typeface="Calibri" pitchFamily="34" charset="0"/>
                 <a:ea typeface="Calibri" pitchFamily="34" charset="-122"/>
                 <a:cs typeface="Calibri" pitchFamily="34" charset="-120"/>
               </a:rPr>
-              <a:t>Bonus — OpenTelemetry → Jaeger:  </a:t>
-            </a:r>
-            <a:pPr indent="0" marL="0">
+              <a:t>/health · Newman</a:t>
+            </a:r>
+            <a:endParaRPr lang="en-US" sz="1200" dirty="0"/>
+          </a:p>
+          <a:p>
+            <a:pPr marL="0" indent="0" algn="ctr">
               <a:lnSpc>
-                <a:spcPct val="115000"/>
+                <a:spcPct val="100000"/>
               </a:lnSpc>
               <a:buNone/>
             </a:pPr>
             <a:r>
-              <a:rPr lang="en-US" sz="1400" dirty="0">
-                <a:solidFill>
-                  <a:srgbClr val="FFFFFF"/>
+              <a:rPr lang="en-US" sz="1200" dirty="0">
+                <a:solidFill>
+                  <a:srgbClr val="CADCFC"/>
                 </a:solidFill>
                 <a:latin typeface="Calibri" pitchFamily="34" charset="0"/>
                 <a:ea typeface="Calibri" pitchFamily="34" charset="-122"/>
                 <a:cs typeface="Calibri" pitchFamily="34" charset="-120"/>
               </a:rPr>
-              <a:t>FastAPI ve SQLAlchemy otomatik enstrümantasyonu; OTLP gRPC ile span'ler Jaeger UI'da (:16686). Bir config bayrağı ile açılıp kapanır (testte kapalı). Latency spike'ında ilgili SQL/booking span'ine inilir.</a:t>
-            </a:r>
-            <a:endParaRPr lang="en-US" sz="1400" dirty="0"/>
+              <a:t>E2E · k6</a:t>
+            </a:r>
+            <a:endParaRPr lang="en-US" sz="1200" dirty="0"/>
+          </a:p>
+        </p:txBody>
+      </p:sp>
+      <p:sp>
+        <p:nvSpPr>
+          <p:cNvPr id="28" name="Text 26"/>
+          <p:cNvSpPr/>
+          <p:nvPr/>
+        </p:nvSpPr>
+        <p:spPr>
+          <a:xfrm>
+            <a:off x="548640" y="4069080"/>
+            <a:ext cx="11091672" cy="914400"/>
+          </a:xfrm>
+          <a:prstGeom prst="rect">
+            <a:avLst/>
+          </a:prstGeom>
+          <a:noFill/>
+          <a:ln/>
+        </p:spPr>
+        <p:txBody>
+          <a:bodyPr wrap="square" rtlCol="0" anchor="ctr"/>
+          <a:lstStyle/>
+          <a:p>
+            <a:pPr marL="0" indent="0">
+              <a:lnSpc>
+                <a:spcPct val="120000"/>
+              </a:lnSpc>
+              <a:buNone/>
+            </a:pPr>
+            <a:r>
+              <a:rPr lang="en-US" sz="1500" b="1" dirty="0">
+                <a:solidFill>
+                  <a:srgbClr val="0F2C44"/>
+                </a:solidFill>
+                <a:latin typeface="Calibri" pitchFamily="34" charset="0"/>
+                <a:ea typeface="Calibri" pitchFamily="34" charset="-122"/>
+                <a:cs typeface="Calibri" pitchFamily="34" charset="-120"/>
+              </a:rPr>
+              <a:t>Deploy stratejisi:  </a:t>
+            </a:r>
+            <a:r>
+              <a:rPr lang="en-US" sz="1500" dirty="0">
+                <a:solidFill>
+                  <a:srgbClr val="22303C"/>
+                </a:solidFill>
+                <a:latin typeface="Calibri" pitchFamily="34" charset="0"/>
+                <a:ea typeface="Calibri" pitchFamily="34" charset="-122"/>
+                <a:cs typeface="Calibri" pitchFamily="34" charset="-120"/>
+              </a:rPr>
+              <a:t>Minikube'de gerçek k8s deploy — image yüklenir, manifestler uygulanır, kubectl rollout status beklenir, ardından servise /health smoke. 2 replica ile rolling update; readiness geçmeden trafik yok. Rollback: kubectl rollout undo.</a:t>
+            </a:r>
+            <a:endParaRPr lang="en-US" sz="1500" dirty="0"/>
+          </a:p>
+        </p:txBody>
+      </p:sp>
+      <p:sp>
+        <p:nvSpPr>
+          <p:cNvPr id="29" name="Text 27"/>
+          <p:cNvSpPr/>
+          <p:nvPr/>
+        </p:nvSpPr>
+        <p:spPr>
+          <a:xfrm>
+            <a:off x="548640" y="5212080"/>
+            <a:ext cx="11091672" cy="548640"/>
+          </a:xfrm>
+          <a:prstGeom prst="rect">
+            <a:avLst/>
+          </a:prstGeom>
+          <a:noFill/>
+          <a:ln/>
+        </p:spPr>
+        <p:txBody>
+          <a:bodyPr wrap="square" rtlCol="0" anchor="ctr"/>
+          <a:lstStyle/>
+          <a:p>
+            <a:pPr marL="0" indent="0">
+              <a:buNone/>
+            </a:pPr>
+            <a:r>
+              <a:rPr lang="en-US" sz="1300" i="1" dirty="0">
+                <a:solidFill>
+                  <a:srgbClr val="6E7E8C"/>
+                </a:solidFill>
+                <a:latin typeface="Calibri" pitchFamily="34" charset="0"/>
+                <a:ea typeface="Calibri" pitchFamily="34" charset="-122"/>
+                <a:cs typeface="Calibri" pitchFamily="34" charset="-120"/>
+              </a:rPr>
+              <a:t>Tüm test piramidi otomatik: 293 unit+integration + 25 E2E (Playwright) + k6 p95&lt;500 regresyon kapısı · ruff lint temiz.</a:t>
+            </a:r>
+            <a:endParaRPr lang="en-US" sz="1300" dirty="0"/>
           </a:p>
         </p:txBody>
       </p:sp>
@@ -5946,12 +5072,13 @@
 
 <file path=ppt/slides/slide7.xml><?xml version="1.0" encoding="utf-8"?>
 <p:sld xmlns:a="http://schemas.openxmlformats.org/drawingml/2006/main" xmlns:r="http://schemas.openxmlformats.org/officeDocument/2006/relationships" xmlns:p="http://schemas.openxmlformats.org/presentationml/2006/main">
-  <p:cSld name="Slide 7">
+  <p:cSld name="Slide 6">
     <p:bg>
       <p:bgPr>
         <a:solidFill>
-          <a:srgbClr val="0F2C44"/>
+          <a:srgbClr val="FFFFFF"/>
         </a:solidFill>
+        <a:effectLst/>
       </p:bgPr>
     </p:bg>
     <p:spTree>
@@ -5970,50 +5097,30 @@
       </p:grpSpPr>
       <p:sp>
         <p:nvSpPr>
-          <p:cNvPr id="2" name="Shape 0"/>
-          <p:cNvSpPr/>
-          <p:nvPr/>
-        </p:nvSpPr>
-        <p:spPr>
-          <a:xfrm>
-            <a:off x="0" y="0"/>
-            <a:ext cx="12188952" cy="1280160"/>
-          </a:xfrm>
-          <a:prstGeom prst="rect">
-            <a:avLst/>
-          </a:prstGeom>
-          <a:solidFill>
-            <a:srgbClr val="0B2138"/>
-          </a:solidFill>
-          <a:ln/>
-        </p:spPr>
-      </p:sp>
-      <p:sp>
-        <p:nvSpPr>
-          <p:cNvPr id="3" name="Text 1"/>
-          <p:cNvSpPr/>
-          <p:nvPr/>
-        </p:nvSpPr>
-        <p:spPr>
-          <a:xfrm>
-            <a:off x="548640" y="320040"/>
-            <a:ext cx="7315200" cy="274320"/>
-          </a:xfrm>
-          <a:prstGeom prst="rect">
-            <a:avLst/>
-          </a:prstGeom>
-          <a:noFill/>
-          <a:ln/>
-        </p:spPr>
-        <p:txBody>
-          <a:bodyPr wrap="square" rtlCol="0" anchor="ctr"/>
-          <a:lstStyle/>
-          <a:p>
-            <a:pPr indent="0" marL="0">
-              <a:buNone/>
-            </a:pPr>
-            <a:r>
-              <a:rPr lang="en-US" sz="1200" b="1" spc="200" kern="0" dirty="0">
+          <p:cNvPr id="2" name="Text 0"/>
+          <p:cNvSpPr/>
+          <p:nvPr/>
+        </p:nvSpPr>
+        <p:spPr>
+          <a:xfrm>
+            <a:off x="548640" y="411480"/>
+            <a:ext cx="11091672" cy="274320"/>
+          </a:xfrm>
+          <a:prstGeom prst="rect">
+            <a:avLst/>
+          </a:prstGeom>
+          <a:noFill/>
+          <a:ln/>
+        </p:spPr>
+        <p:txBody>
+          <a:bodyPr wrap="square" rtlCol="0" anchor="ctr"/>
+          <a:lstStyle/>
+          <a:p>
+            <a:pPr marL="0" indent="0">
+              <a:buNone/>
+            </a:pPr>
+            <a:r>
+              <a:rPr lang="en-US" sz="1200" b="1" kern="0" spc="200" dirty="0">
                 <a:solidFill>
                   <a:srgbClr val="02C39A"/>
                 </a:solidFill>
@@ -6021,7 +5128,7 @@
                 <a:ea typeface="Calibri" pitchFamily="34" charset="-122"/>
                 <a:cs typeface="Calibri" pitchFamily="34" charset="-120"/>
               </a:rPr>
-              <a:t>6 · SAYILAR</a:t>
+              <a:t>5 · MONITORING &amp; OBSERVABILITY</a:t>
             </a:r>
             <a:endParaRPr lang="en-US" sz="1200" dirty="0"/>
           </a:p>
@@ -6029,96 +5136,110 @@
       </p:sp>
       <p:sp>
         <p:nvSpPr>
-          <p:cNvPr id="4" name="Text 2"/>
-          <p:cNvSpPr/>
-          <p:nvPr/>
-        </p:nvSpPr>
-        <p:spPr>
-          <a:xfrm>
-            <a:off x="548640" y="548640"/>
-            <a:ext cx="10058400" cy="548640"/>
-          </a:xfrm>
-          <a:prstGeom prst="rect">
-            <a:avLst/>
-          </a:prstGeom>
-          <a:noFill/>
-          <a:ln/>
-        </p:spPr>
-        <p:txBody>
-          <a:bodyPr wrap="square" rtlCol="0" anchor="ctr"/>
-          <a:lstStyle/>
-          <a:p>
-            <a:pPr indent="0" marL="0">
-              <a:buNone/>
-            </a:pPr>
-            <a:r>
-              <a:rPr lang="en-US" sz="3000" b="1" dirty="0">
-                <a:solidFill>
-                  <a:srgbClr val="FFFFFF"/>
+          <p:cNvPr id="3" name="Text 1"/>
+          <p:cNvSpPr/>
+          <p:nvPr/>
+        </p:nvSpPr>
+        <p:spPr>
+          <a:xfrm>
+            <a:off x="548640" y="658368"/>
+            <a:ext cx="11091672" cy="685800"/>
+          </a:xfrm>
+          <a:prstGeom prst="rect">
+            <a:avLst/>
+          </a:prstGeom>
+          <a:noFill/>
+          <a:ln/>
+        </p:spPr>
+        <p:txBody>
+          <a:bodyPr wrap="square" rtlCol="0" anchor="ctr"/>
+          <a:lstStyle/>
+          <a:p>
+            <a:pPr marL="0" indent="0">
+              <a:buNone/>
+            </a:pPr>
+            <a:r>
+              <a:rPr lang="en-US" sz="3200" b="1" dirty="0">
+                <a:solidFill>
+                  <a:srgbClr val="0F2C44"/>
                 </a:solidFill>
                 <a:latin typeface="Trebuchet MS" pitchFamily="34" charset="0"/>
                 <a:ea typeface="Trebuchet MS" pitchFamily="34" charset="-122"/>
                 <a:cs typeface="Trebuchet MS" pitchFamily="34" charset="-120"/>
               </a:rPr>
-              <a:t>Projeyi anlatan rakamlar</a:t>
-            </a:r>
-            <a:endParaRPr lang="en-US" sz="3000" dirty="0"/>
-          </a:p>
-        </p:txBody>
-      </p:sp>
-      <p:sp>
-        <p:nvSpPr>
-          <p:cNvPr id="5" name="Shape 3"/>
-          <p:cNvSpPr/>
-          <p:nvPr/>
-        </p:nvSpPr>
-        <p:spPr>
-          <a:xfrm>
-            <a:off x="548640" y="1600200"/>
-            <a:ext cx="2679192" cy="1920240"/>
+              <a:t>Prometheus + Grafana — 3 panel</a:t>
+            </a:r>
+            <a:endParaRPr lang="en-US" sz="3200" dirty="0"/>
+          </a:p>
+        </p:txBody>
+      </p:sp>
+      <p:sp>
+        <p:nvSpPr>
+          <p:cNvPr id="4" name="Shape 2"/>
+          <p:cNvSpPr/>
+          <p:nvPr/>
+        </p:nvSpPr>
+        <p:spPr>
+          <a:xfrm>
+            <a:off x="548640" y="1828800"/>
+            <a:ext cx="3657600" cy="2468880"/>
           </a:xfrm>
           <a:prstGeom prst="roundRect">
             <a:avLst>
-              <a:gd name="adj" fmla="val 3810"/>
+              <a:gd name="adj" fmla="val 2963"/>
             </a:avLst>
           </a:prstGeom>
           <a:solidFill>
-            <a:srgbClr val="16395A"/>
+            <a:srgbClr val="F2F6F9"/>
           </a:solidFill>
           <a:ln w="12700">
             <a:solidFill>
-              <a:srgbClr val="1C7293"/>
+              <a:srgbClr val="D8E2EA"/>
             </a:solidFill>
             <a:prstDash val="solid"/>
           </a:ln>
-        </p:spPr>
-      </p:sp>
-      <p:sp>
-        <p:nvSpPr>
-          <p:cNvPr id="6" name="Text 4"/>
-          <p:cNvSpPr/>
-          <p:nvPr/>
-        </p:nvSpPr>
-        <p:spPr>
-          <a:xfrm>
-            <a:off x="640080" y="1892808"/>
-            <a:ext cx="2496312" cy="868680"/>
-          </a:xfrm>
-          <a:prstGeom prst="rect">
-            <a:avLst/>
-          </a:prstGeom>
-          <a:noFill/>
-          <a:ln/>
-        </p:spPr>
-        <p:txBody>
-          <a:bodyPr wrap="square" rtlCol="0" anchor="ctr"/>
-          <a:lstStyle/>
-          <a:p>
-            <a:pPr algn="ctr" indent="0" marL="0">
-              <a:buNone/>
-            </a:pPr>
-            <a:r>
-              <a:rPr lang="en-US" sz="3800" b="1" dirty="0">
+          <a:effectLst>
+            <a:outerShdw blurRad="76200" dist="25400" dir="5400000" algn="bl" rotWithShape="0">
+              <a:srgbClr val="9AB0BF">
+                <a:alpha val="25000"/>
+              </a:srgbClr>
+            </a:outerShdw>
+          </a:effectLst>
+        </p:spPr>
+        <p:txBody>
+          <a:bodyPr/>
+          <a:lstStyle/>
+          <a:p>
+            <a:endParaRPr lang="tr-TR"/>
+          </a:p>
+        </p:txBody>
+      </p:sp>
+      <p:sp>
+        <p:nvSpPr>
+          <p:cNvPr id="5" name="Text 3"/>
+          <p:cNvSpPr/>
+          <p:nvPr/>
+        </p:nvSpPr>
+        <p:spPr>
+          <a:xfrm>
+            <a:off x="777240" y="2011680"/>
+            <a:ext cx="914400" cy="457200"/>
+          </a:xfrm>
+          <a:prstGeom prst="rect">
+            <a:avLst/>
+          </a:prstGeom>
+          <a:noFill/>
+          <a:ln/>
+        </p:spPr>
+        <p:txBody>
+          <a:bodyPr wrap="square" rtlCol="0" anchor="ctr"/>
+          <a:lstStyle/>
+          <a:p>
+            <a:pPr marL="0" indent="0">
+              <a:buNone/>
+            </a:pPr>
+            <a:r>
+              <a:rPr lang="en-US" sz="2200" b="1" dirty="0">
                 <a:solidFill>
                   <a:srgbClr val="02C39A"/>
                 </a:solidFill>
@@ -6126,9 +5247,48 @@
                 <a:ea typeface="Trebuchet MS" pitchFamily="34" charset="-122"/>
                 <a:cs typeface="Trebuchet MS" pitchFamily="34" charset="-120"/>
               </a:rPr>
-              <a:t>%98.5</a:t>
-            </a:r>
-            <a:endParaRPr lang="en-US" sz="3800" dirty="0"/>
+              <a:t>01</a:t>
+            </a:r>
+            <a:endParaRPr lang="en-US" sz="2200" dirty="0"/>
+          </a:p>
+        </p:txBody>
+      </p:sp>
+      <p:sp>
+        <p:nvSpPr>
+          <p:cNvPr id="6" name="Text 4"/>
+          <p:cNvSpPr/>
+          <p:nvPr/>
+        </p:nvSpPr>
+        <p:spPr>
+          <a:xfrm>
+            <a:off x="777240" y="2514600"/>
+            <a:ext cx="3200400" cy="365760"/>
+          </a:xfrm>
+          <a:prstGeom prst="rect">
+            <a:avLst/>
+          </a:prstGeom>
+          <a:noFill/>
+          <a:ln/>
+        </p:spPr>
+        <p:txBody>
+          <a:bodyPr wrap="square" rtlCol="0" anchor="ctr"/>
+          <a:lstStyle/>
+          <a:p>
+            <a:pPr marL="0" indent="0">
+              <a:buNone/>
+            </a:pPr>
+            <a:r>
+              <a:rPr lang="en-US" sz="1700" b="1" dirty="0">
+                <a:solidFill>
+                  <a:srgbClr val="0F2C44"/>
+                </a:solidFill>
+                <a:latin typeface="Trebuchet MS" pitchFamily="34" charset="0"/>
+                <a:ea typeface="Trebuchet MS" pitchFamily="34" charset="-122"/>
+                <a:cs typeface="Trebuchet MS" pitchFamily="34" charset="-120"/>
+              </a:rPr>
+              <a:t>Request Latency</a:t>
+            </a:r>
+            <a:endParaRPr lang="en-US" sz="1700" dirty="0"/>
           </a:p>
         </p:txBody>
       </p:sp>
@@ -6140,35 +5300,74 @@
         </p:nvSpPr>
         <p:spPr>
           <a:xfrm>
-            <a:off x="685800" y="2788920"/>
-            <a:ext cx="2404872" cy="640080"/>
-          </a:xfrm>
-          <a:prstGeom prst="rect">
-            <a:avLst/>
-          </a:prstGeom>
-          <a:noFill/>
-          <a:ln/>
-        </p:spPr>
-        <p:txBody>
-          <a:bodyPr wrap="square" rtlCol="0" anchor="ctr"/>
-          <a:lstStyle/>
-          <a:p>
-            <a:pPr algn="ctr" indent="0" marL="0">
-              <a:lnSpc>
-                <a:spcPct val="105000"/>
-              </a:lnSpc>
-              <a:buNone/>
-            </a:pPr>
-            <a:r>
-              <a:rPr lang="en-US" sz="1300" dirty="0">
-                <a:solidFill>
-                  <a:srgbClr val="CADCFC"/>
+            <a:off x="777240" y="2880360"/>
+            <a:ext cx="3200400" cy="320040"/>
+          </a:xfrm>
+          <a:prstGeom prst="rect">
+            <a:avLst/>
+          </a:prstGeom>
+          <a:noFill/>
+          <a:ln/>
+        </p:spPr>
+        <p:txBody>
+          <a:bodyPr wrap="square" rtlCol="0" anchor="ctr"/>
+          <a:lstStyle/>
+          <a:p>
+            <a:pPr marL="0" indent="0">
+              <a:buNone/>
+            </a:pPr>
+            <a:r>
+              <a:rPr lang="en-US" sz="1400" b="1" dirty="0">
+                <a:solidFill>
+                  <a:srgbClr val="1C7293"/>
                 </a:solidFill>
                 <a:latin typeface="Calibri" pitchFamily="34" charset="0"/>
                 <a:ea typeface="Calibri" pitchFamily="34" charset="-122"/>
                 <a:cs typeface="Calibri" pitchFamily="34" charset="-120"/>
               </a:rPr>
-              <a:t>test coverage (hedef ≥70)</a:t>
+              <a:t>p50 / p95 / p99</a:t>
+            </a:r>
+            <a:endParaRPr lang="en-US" sz="1400" dirty="0"/>
+          </a:p>
+        </p:txBody>
+      </p:sp>
+      <p:sp>
+        <p:nvSpPr>
+          <p:cNvPr id="8" name="Text 6"/>
+          <p:cNvSpPr/>
+          <p:nvPr/>
+        </p:nvSpPr>
+        <p:spPr>
+          <a:xfrm>
+            <a:off x="777240" y="3246120"/>
+            <a:ext cx="3200400" cy="914400"/>
+          </a:xfrm>
+          <a:prstGeom prst="rect">
+            <a:avLst/>
+          </a:prstGeom>
+          <a:noFill/>
+          <a:ln/>
+        </p:spPr>
+        <p:txBody>
+          <a:bodyPr wrap="square" rtlCol="0" anchor="ctr"/>
+          <a:lstStyle/>
+          <a:p>
+            <a:pPr marL="0" indent="0">
+              <a:lnSpc>
+                <a:spcPct val="110000"/>
+              </a:lnSpc>
+              <a:buNone/>
+            </a:pPr>
+            <a:r>
+              <a:rPr lang="en-US" sz="1300" dirty="0">
+                <a:solidFill>
+                  <a:srgbClr val="22303C"/>
+                </a:solidFill>
+                <a:latin typeface="Calibri" pitchFamily="34" charset="0"/>
+                <a:ea typeface="Calibri" pitchFamily="34" charset="-122"/>
+                <a:cs typeface="Calibri" pitchFamily="34" charset="-120"/>
+              </a:rPr>
+              <a:t>histogram_quantile üzerinden gecikme dağılımı</a:t>
             </a:r>
             <a:endParaRPr lang="en-US" sz="1300" dirty="0"/>
           </a:p>
@@ -6176,57 +5375,71 @@
       </p:sp>
       <p:sp>
         <p:nvSpPr>
-          <p:cNvPr id="8" name="Shape 6"/>
-          <p:cNvSpPr/>
-          <p:nvPr/>
-        </p:nvSpPr>
-        <p:spPr>
-          <a:xfrm>
-            <a:off x="3483864" y="1600200"/>
-            <a:ext cx="2679192" cy="1920240"/>
+          <p:cNvPr id="9" name="Shape 7"/>
+          <p:cNvSpPr/>
+          <p:nvPr/>
+        </p:nvSpPr>
+        <p:spPr>
+          <a:xfrm>
+            <a:off x="4389120" y="1828800"/>
+            <a:ext cx="3657600" cy="2468880"/>
           </a:xfrm>
           <a:prstGeom prst="roundRect">
             <a:avLst>
-              <a:gd name="adj" fmla="val 3810"/>
+              <a:gd name="adj" fmla="val 2963"/>
             </a:avLst>
           </a:prstGeom>
           <a:solidFill>
-            <a:srgbClr val="16395A"/>
+            <a:srgbClr val="F2F6F9"/>
           </a:solidFill>
           <a:ln w="12700">
             <a:solidFill>
-              <a:srgbClr val="1C7293"/>
+              <a:srgbClr val="D8E2EA"/>
             </a:solidFill>
             <a:prstDash val="solid"/>
           </a:ln>
-        </p:spPr>
-      </p:sp>
-      <p:sp>
-        <p:nvSpPr>
-          <p:cNvPr id="9" name="Text 7"/>
-          <p:cNvSpPr/>
-          <p:nvPr/>
-        </p:nvSpPr>
-        <p:spPr>
-          <a:xfrm>
-            <a:off x="3575304" y="1892808"/>
-            <a:ext cx="2496312" cy="868680"/>
-          </a:xfrm>
-          <a:prstGeom prst="rect">
-            <a:avLst/>
-          </a:prstGeom>
-          <a:noFill/>
-          <a:ln/>
-        </p:spPr>
-        <p:txBody>
-          <a:bodyPr wrap="square" rtlCol="0" anchor="ctr"/>
-          <a:lstStyle/>
-          <a:p>
-            <a:pPr algn="ctr" indent="0" marL="0">
-              <a:buNone/>
-            </a:pPr>
-            <a:r>
-              <a:rPr lang="en-US" sz="3800" b="1" dirty="0">
+          <a:effectLst>
+            <a:outerShdw blurRad="76200" dist="25400" dir="5400000" algn="bl" rotWithShape="0">
+              <a:srgbClr val="9AB0BF">
+                <a:alpha val="25000"/>
+              </a:srgbClr>
+            </a:outerShdw>
+          </a:effectLst>
+        </p:spPr>
+        <p:txBody>
+          <a:bodyPr/>
+          <a:lstStyle/>
+          <a:p>
+            <a:endParaRPr lang="tr-TR"/>
+          </a:p>
+        </p:txBody>
+      </p:sp>
+      <p:sp>
+        <p:nvSpPr>
+          <p:cNvPr id="10" name="Text 8"/>
+          <p:cNvSpPr/>
+          <p:nvPr/>
+        </p:nvSpPr>
+        <p:spPr>
+          <a:xfrm>
+            <a:off x="4617720" y="2011680"/>
+            <a:ext cx="914400" cy="457200"/>
+          </a:xfrm>
+          <a:prstGeom prst="rect">
+            <a:avLst/>
+          </a:prstGeom>
+          <a:noFill/>
+          <a:ln/>
+        </p:spPr>
+        <p:txBody>
+          <a:bodyPr wrap="square" rtlCol="0" anchor="ctr"/>
+          <a:lstStyle/>
+          <a:p>
+            <a:pPr marL="0" indent="0">
+              <a:buNone/>
+            </a:pPr>
+            <a:r>
+              <a:rPr lang="en-US" sz="2200" b="1" dirty="0">
                 <a:solidFill>
                   <a:srgbClr val="02C39A"/>
                 </a:solidFill>
@@ -6234,49 +5447,127 @@
                 <a:ea typeface="Trebuchet MS" pitchFamily="34" charset="-122"/>
                 <a:cs typeface="Trebuchet MS" pitchFamily="34" charset="-120"/>
               </a:rPr>
-              <a:t>293</a:t>
-            </a:r>
-            <a:endParaRPr lang="en-US" sz="3800" dirty="0"/>
-          </a:p>
-        </p:txBody>
-      </p:sp>
-      <p:sp>
-        <p:nvSpPr>
-          <p:cNvPr id="10" name="Text 8"/>
-          <p:cNvSpPr/>
-          <p:nvPr/>
-        </p:nvSpPr>
-        <p:spPr>
-          <a:xfrm>
-            <a:off x="3621024" y="2788920"/>
-            <a:ext cx="2404872" cy="640080"/>
-          </a:xfrm>
-          <a:prstGeom prst="rect">
-            <a:avLst/>
-          </a:prstGeom>
-          <a:noFill/>
-          <a:ln/>
-        </p:spPr>
-        <p:txBody>
-          <a:bodyPr wrap="square" rtlCol="0" anchor="ctr"/>
-          <a:lstStyle/>
-          <a:p>
-            <a:pPr algn="ctr" indent="0" marL="0">
-              <a:lnSpc>
-                <a:spcPct val="105000"/>
-              </a:lnSpc>
-              <a:buNone/>
-            </a:pPr>
-            <a:r>
-              <a:rPr lang="en-US" sz="1300" dirty="0">
-                <a:solidFill>
-                  <a:srgbClr val="CADCFC"/>
+              <a:t>02</a:t>
+            </a:r>
+            <a:endParaRPr lang="en-US" sz="2200" dirty="0"/>
+          </a:p>
+        </p:txBody>
+      </p:sp>
+      <p:sp>
+        <p:nvSpPr>
+          <p:cNvPr id="11" name="Text 9"/>
+          <p:cNvSpPr/>
+          <p:nvPr/>
+        </p:nvSpPr>
+        <p:spPr>
+          <a:xfrm>
+            <a:off x="4617720" y="2514600"/>
+            <a:ext cx="3200400" cy="365760"/>
+          </a:xfrm>
+          <a:prstGeom prst="rect">
+            <a:avLst/>
+          </a:prstGeom>
+          <a:noFill/>
+          <a:ln/>
+        </p:spPr>
+        <p:txBody>
+          <a:bodyPr wrap="square" rtlCol="0" anchor="ctr"/>
+          <a:lstStyle/>
+          <a:p>
+            <a:pPr marL="0" indent="0">
+              <a:buNone/>
+            </a:pPr>
+            <a:r>
+              <a:rPr lang="en-US" sz="1700" b="1" dirty="0">
+                <a:solidFill>
+                  <a:srgbClr val="0F2C44"/>
+                </a:solidFill>
+                <a:latin typeface="Trebuchet MS" pitchFamily="34" charset="0"/>
+                <a:ea typeface="Trebuchet MS" pitchFamily="34" charset="-122"/>
+                <a:cs typeface="Trebuchet MS" pitchFamily="34" charset="-120"/>
+              </a:rPr>
+              <a:t>Error Rate</a:t>
+            </a:r>
+            <a:endParaRPr lang="en-US" sz="1700" dirty="0"/>
+          </a:p>
+        </p:txBody>
+      </p:sp>
+      <p:sp>
+        <p:nvSpPr>
+          <p:cNvPr id="12" name="Text 10"/>
+          <p:cNvSpPr/>
+          <p:nvPr/>
+        </p:nvSpPr>
+        <p:spPr>
+          <a:xfrm>
+            <a:off x="4617720" y="2880360"/>
+            <a:ext cx="3200400" cy="320040"/>
+          </a:xfrm>
+          <a:prstGeom prst="rect">
+            <a:avLst/>
+          </a:prstGeom>
+          <a:noFill/>
+          <a:ln/>
+        </p:spPr>
+        <p:txBody>
+          <a:bodyPr wrap="square" rtlCol="0" anchor="ctr"/>
+          <a:lstStyle/>
+          <a:p>
+            <a:pPr marL="0" indent="0">
+              <a:buNone/>
+            </a:pPr>
+            <a:r>
+              <a:rPr lang="en-US" sz="1400" b="1" dirty="0">
+                <a:solidFill>
+                  <a:srgbClr val="1C7293"/>
                 </a:solidFill>
                 <a:latin typeface="Calibri" pitchFamily="34" charset="0"/>
                 <a:ea typeface="Calibri" pitchFamily="34" charset="-122"/>
                 <a:cs typeface="Calibri" pitchFamily="34" charset="-120"/>
               </a:rPr>
-              <a:t>unit + integration testi · 0 hata</a:t>
+              <a:t>5xx / toplam</a:t>
+            </a:r>
+            <a:endParaRPr lang="en-US" sz="1400" dirty="0"/>
+          </a:p>
+        </p:txBody>
+      </p:sp>
+      <p:sp>
+        <p:nvSpPr>
+          <p:cNvPr id="13" name="Text 11"/>
+          <p:cNvSpPr/>
+          <p:nvPr/>
+        </p:nvSpPr>
+        <p:spPr>
+          <a:xfrm>
+            <a:off x="4617720" y="3246120"/>
+            <a:ext cx="3200400" cy="914400"/>
+          </a:xfrm>
+          <a:prstGeom prst="rect">
+            <a:avLst/>
+          </a:prstGeom>
+          <a:noFill/>
+          <a:ln/>
+        </p:spPr>
+        <p:txBody>
+          <a:bodyPr wrap="square" rtlCol="0" anchor="ctr"/>
+          <a:lstStyle/>
+          <a:p>
+            <a:pPr marL="0" indent="0">
+              <a:lnSpc>
+                <a:spcPct val="110000"/>
+              </a:lnSpc>
+              <a:buNone/>
+            </a:pPr>
+            <a:r>
+              <a:rPr lang="en-US" sz="1300" dirty="0">
+                <a:solidFill>
+                  <a:srgbClr val="22303C"/>
+                </a:solidFill>
+                <a:latin typeface="Calibri" pitchFamily="34" charset="0"/>
+                <a:ea typeface="Calibri" pitchFamily="34" charset="-122"/>
+                <a:cs typeface="Calibri" pitchFamily="34" charset="-120"/>
+              </a:rPr>
+              <a:t>hata oranı zaman serisi (yük altında %0)</a:t>
             </a:r>
             <a:endParaRPr lang="en-US" sz="1300" dirty="0"/>
           </a:p>
@@ -6284,57 +5575,71 @@
       </p:sp>
       <p:sp>
         <p:nvSpPr>
-          <p:cNvPr id="11" name="Shape 9"/>
-          <p:cNvSpPr/>
-          <p:nvPr/>
-        </p:nvSpPr>
-        <p:spPr>
-          <a:xfrm>
-            <a:off x="6419088" y="1600200"/>
-            <a:ext cx="2679192" cy="1920240"/>
+          <p:cNvPr id="14" name="Shape 12"/>
+          <p:cNvSpPr/>
+          <p:nvPr/>
+        </p:nvSpPr>
+        <p:spPr>
+          <a:xfrm>
+            <a:off x="8229600" y="1828800"/>
+            <a:ext cx="3657600" cy="2468880"/>
           </a:xfrm>
           <a:prstGeom prst="roundRect">
             <a:avLst>
-              <a:gd name="adj" fmla="val 3810"/>
+              <a:gd name="adj" fmla="val 2963"/>
             </a:avLst>
           </a:prstGeom>
           <a:solidFill>
-            <a:srgbClr val="16395A"/>
+            <a:srgbClr val="F2F6F9"/>
           </a:solidFill>
           <a:ln w="12700">
             <a:solidFill>
-              <a:srgbClr val="1C7293"/>
+              <a:srgbClr val="D8E2EA"/>
             </a:solidFill>
             <a:prstDash val="solid"/>
           </a:ln>
-        </p:spPr>
-      </p:sp>
-      <p:sp>
-        <p:nvSpPr>
-          <p:cNvPr id="12" name="Text 10"/>
-          <p:cNvSpPr/>
-          <p:nvPr/>
-        </p:nvSpPr>
-        <p:spPr>
-          <a:xfrm>
-            <a:off x="6510528" y="1892808"/>
-            <a:ext cx="2496312" cy="868680"/>
-          </a:xfrm>
-          <a:prstGeom prst="rect">
-            <a:avLst/>
-          </a:prstGeom>
-          <a:noFill/>
-          <a:ln/>
-        </p:spPr>
-        <p:txBody>
-          <a:bodyPr wrap="square" rtlCol="0" anchor="ctr"/>
-          <a:lstStyle/>
-          <a:p>
-            <a:pPr algn="ctr" indent="0" marL="0">
-              <a:buNone/>
-            </a:pPr>
-            <a:r>
-              <a:rPr lang="en-US" sz="3800" b="1" dirty="0">
+          <a:effectLst>
+            <a:outerShdw blurRad="76200" dist="25400" dir="5400000" algn="bl" rotWithShape="0">
+              <a:srgbClr val="9AB0BF">
+                <a:alpha val="25000"/>
+              </a:srgbClr>
+            </a:outerShdw>
+          </a:effectLst>
+        </p:spPr>
+        <p:txBody>
+          <a:bodyPr/>
+          <a:lstStyle/>
+          <a:p>
+            <a:endParaRPr lang="tr-TR"/>
+          </a:p>
+        </p:txBody>
+      </p:sp>
+      <p:sp>
+        <p:nvSpPr>
+          <p:cNvPr id="15" name="Text 13"/>
+          <p:cNvSpPr/>
+          <p:nvPr/>
+        </p:nvSpPr>
+        <p:spPr>
+          <a:xfrm>
+            <a:off x="8458200" y="2011680"/>
+            <a:ext cx="914400" cy="457200"/>
+          </a:xfrm>
+          <a:prstGeom prst="rect">
+            <a:avLst/>
+          </a:prstGeom>
+          <a:noFill/>
+          <a:ln/>
+        </p:spPr>
+        <p:txBody>
+          <a:bodyPr wrap="square" rtlCol="0" anchor="ctr"/>
+          <a:lstStyle/>
+          <a:p>
+            <a:pPr marL="0" indent="0">
+              <a:buNone/>
+            </a:pPr>
+            <a:r>
+              <a:rPr lang="en-US" sz="2200" b="1" dirty="0">
                 <a:solidFill>
                   <a:srgbClr val="02C39A"/>
                 </a:solidFill>
@@ -6342,157 +5647,127 @@
                 <a:ea typeface="Trebuchet MS" pitchFamily="34" charset="-122"/>
                 <a:cs typeface="Trebuchet MS" pitchFamily="34" charset="-120"/>
               </a:rPr>
-              <a:t>306</a:t>
-            </a:r>
-            <a:endParaRPr lang="en-US" sz="3800" dirty="0"/>
-          </a:p>
-        </p:txBody>
-      </p:sp>
-      <p:sp>
-        <p:nvSpPr>
-          <p:cNvPr id="13" name="Text 11"/>
-          <p:cNvSpPr/>
-          <p:nvPr/>
-        </p:nvSpPr>
-        <p:spPr>
-          <a:xfrm>
-            <a:off x="6556248" y="2788920"/>
-            <a:ext cx="2404872" cy="640080"/>
-          </a:xfrm>
-          <a:prstGeom prst="rect">
-            <a:avLst/>
-          </a:prstGeom>
-          <a:noFill/>
-          <a:ln/>
-        </p:spPr>
-        <p:txBody>
-          <a:bodyPr wrap="square" rtlCol="0" anchor="ctr"/>
-          <a:lstStyle/>
-          <a:p>
-            <a:pPr algn="ctr" indent="0" marL="0">
-              <a:lnSpc>
-                <a:spcPct val="105000"/>
-              </a:lnSpc>
-              <a:buNone/>
-            </a:pPr>
-            <a:r>
-              <a:rPr lang="en-US" sz="1300" dirty="0">
-                <a:solidFill>
-                  <a:srgbClr val="CADCFC"/>
+              <a:t>03</a:t>
+            </a:r>
+            <a:endParaRPr lang="en-US" sz="2200" dirty="0"/>
+          </a:p>
+        </p:txBody>
+      </p:sp>
+      <p:sp>
+        <p:nvSpPr>
+          <p:cNvPr id="16" name="Text 14"/>
+          <p:cNvSpPr/>
+          <p:nvPr/>
+        </p:nvSpPr>
+        <p:spPr>
+          <a:xfrm>
+            <a:off x="8458200" y="2514600"/>
+            <a:ext cx="3200400" cy="365760"/>
+          </a:xfrm>
+          <a:prstGeom prst="rect">
+            <a:avLst/>
+          </a:prstGeom>
+          <a:noFill/>
+          <a:ln/>
+        </p:spPr>
+        <p:txBody>
+          <a:bodyPr wrap="square" rtlCol="0" anchor="ctr"/>
+          <a:lstStyle/>
+          <a:p>
+            <a:pPr marL="0" indent="0">
+              <a:buNone/>
+            </a:pPr>
+            <a:r>
+              <a:rPr lang="en-US" sz="1700" b="1" dirty="0">
+                <a:solidFill>
+                  <a:srgbClr val="0F2C44"/>
+                </a:solidFill>
+                <a:latin typeface="Trebuchet MS" pitchFamily="34" charset="0"/>
+                <a:ea typeface="Trebuchet MS" pitchFamily="34" charset="-122"/>
+                <a:cs typeface="Trebuchet MS" pitchFamily="34" charset="-120"/>
+              </a:rPr>
+              <a:t>Throughput</a:t>
+            </a:r>
+            <a:endParaRPr lang="en-US" sz="1700" dirty="0"/>
+          </a:p>
+        </p:txBody>
+      </p:sp>
+      <p:sp>
+        <p:nvSpPr>
+          <p:cNvPr id="17" name="Text 15"/>
+          <p:cNvSpPr/>
+          <p:nvPr/>
+        </p:nvSpPr>
+        <p:spPr>
+          <a:xfrm>
+            <a:off x="8458200" y="2880360"/>
+            <a:ext cx="3200400" cy="320040"/>
+          </a:xfrm>
+          <a:prstGeom prst="rect">
+            <a:avLst/>
+          </a:prstGeom>
+          <a:noFill/>
+          <a:ln/>
+        </p:spPr>
+        <p:txBody>
+          <a:bodyPr wrap="square" rtlCol="0" anchor="ctr"/>
+          <a:lstStyle/>
+          <a:p>
+            <a:pPr marL="0" indent="0">
+              <a:buNone/>
+            </a:pPr>
+            <a:r>
+              <a:rPr lang="en-US" sz="1400" b="1" dirty="0">
+                <a:solidFill>
+                  <a:srgbClr val="1C7293"/>
                 </a:solidFill>
                 <a:latin typeface="Calibri" pitchFamily="34" charset="0"/>
                 <a:ea typeface="Calibri" pitchFamily="34" charset="-122"/>
                 <a:cs typeface="Calibri" pitchFamily="34" charset="-120"/>
               </a:rPr>
-              <a:t>toplam test fonksiyonu</a:t>
-            </a:r>
-            <a:endParaRPr lang="en-US" sz="1300" dirty="0"/>
-          </a:p>
-        </p:txBody>
-      </p:sp>
-      <p:sp>
-        <p:nvSpPr>
-          <p:cNvPr id="14" name="Shape 12"/>
-          <p:cNvSpPr/>
-          <p:nvPr/>
-        </p:nvSpPr>
-        <p:spPr>
-          <a:xfrm>
-            <a:off x="9354312" y="1600200"/>
-            <a:ext cx="2679192" cy="1920240"/>
-          </a:xfrm>
-          <a:prstGeom prst="roundRect">
-            <a:avLst>
-              <a:gd name="adj" fmla="val 3810"/>
-            </a:avLst>
-          </a:prstGeom>
-          <a:solidFill>
-            <a:srgbClr val="16395A"/>
-          </a:solidFill>
-          <a:ln w="12700">
-            <a:solidFill>
-              <a:srgbClr val="1C7293"/>
-            </a:solidFill>
-            <a:prstDash val="solid"/>
-          </a:ln>
-        </p:spPr>
-      </p:sp>
-      <p:sp>
-        <p:nvSpPr>
-          <p:cNvPr id="15" name="Text 13"/>
-          <p:cNvSpPr/>
-          <p:nvPr/>
-        </p:nvSpPr>
-        <p:spPr>
-          <a:xfrm>
-            <a:off x="9445752" y="1892808"/>
-            <a:ext cx="2496312" cy="868680"/>
-          </a:xfrm>
-          <a:prstGeom prst="rect">
-            <a:avLst/>
-          </a:prstGeom>
-          <a:noFill/>
-          <a:ln/>
-        </p:spPr>
-        <p:txBody>
-          <a:bodyPr wrap="square" rtlCol="0" anchor="ctr"/>
-          <a:lstStyle/>
-          <a:p>
-            <a:pPr algn="ctr" indent="0" marL="0">
-              <a:buNone/>
-            </a:pPr>
-            <a:r>
-              <a:rPr lang="en-US" sz="3800" b="1" dirty="0">
-                <a:solidFill>
-                  <a:srgbClr val="02C39A"/>
-                </a:solidFill>
-                <a:latin typeface="Trebuchet MS" pitchFamily="34" charset="0"/>
-                <a:ea typeface="Trebuchet MS" pitchFamily="34" charset="-122"/>
-                <a:cs typeface="Trebuchet MS" pitchFamily="34" charset="-120"/>
-              </a:rPr>
-              <a:t>465 ms</a:t>
-            </a:r>
-            <a:endParaRPr lang="en-US" sz="3800" dirty="0"/>
-          </a:p>
-        </p:txBody>
-      </p:sp>
-      <p:sp>
-        <p:nvSpPr>
-          <p:cNvPr id="16" name="Text 14"/>
-          <p:cNvSpPr/>
-          <p:nvPr/>
-        </p:nvSpPr>
-        <p:spPr>
-          <a:xfrm>
-            <a:off x="9491472" y="2788920"/>
-            <a:ext cx="2404872" cy="640080"/>
-          </a:xfrm>
-          <a:prstGeom prst="rect">
-            <a:avLst/>
-          </a:prstGeom>
-          <a:noFill/>
-          <a:ln/>
-        </p:spPr>
-        <p:txBody>
-          <a:bodyPr wrap="square" rtlCol="0" anchor="ctr"/>
-          <a:lstStyle/>
-          <a:p>
-            <a:pPr algn="ctr" indent="0" marL="0">
+              <a:t>req/s (handler)</a:t>
+            </a:r>
+            <a:endParaRPr lang="en-US" sz="1400" dirty="0"/>
+          </a:p>
+        </p:txBody>
+      </p:sp>
+      <p:sp>
+        <p:nvSpPr>
+          <p:cNvPr id="18" name="Text 16"/>
+          <p:cNvSpPr/>
+          <p:nvPr/>
+        </p:nvSpPr>
+        <p:spPr>
+          <a:xfrm>
+            <a:off x="8458200" y="3246120"/>
+            <a:ext cx="3200400" cy="914400"/>
+          </a:xfrm>
+          <a:prstGeom prst="rect">
+            <a:avLst/>
+          </a:prstGeom>
+          <a:noFill/>
+          <a:ln/>
+        </p:spPr>
+        <p:txBody>
+          <a:bodyPr wrap="square" rtlCol="0" anchor="ctr"/>
+          <a:lstStyle/>
+          <a:p>
+            <a:pPr marL="0" indent="0">
               <a:lnSpc>
-                <a:spcPct val="105000"/>
+                <a:spcPct val="110000"/>
               </a:lnSpc>
               <a:buNone/>
             </a:pPr>
             <a:r>
               <a:rPr lang="en-US" sz="1300" dirty="0">
                 <a:solidFill>
-                  <a:srgbClr val="CADCFC"/>
+                  <a:srgbClr val="22303C"/>
                 </a:solidFill>
                 <a:latin typeface="Calibri" pitchFamily="34" charset="0"/>
                 <a:ea typeface="Calibri" pitchFamily="34" charset="-122"/>
                 <a:cs typeface="Calibri" pitchFamily="34" charset="-120"/>
               </a:rPr>
-              <a:t>k6 p95 (&lt;500, CI kapısı)</a:t>
+              <a:t>uç bazında istek hızı</a:t>
             </a:r>
             <a:endParaRPr lang="en-US" sz="1300" dirty="0"/>
           </a:p>
@@ -6500,433 +5775,90 @@
       </p:sp>
       <p:sp>
         <p:nvSpPr>
-          <p:cNvPr id="17" name="Shape 15"/>
-          <p:cNvSpPr/>
-          <p:nvPr/>
-        </p:nvSpPr>
-        <p:spPr>
-          <a:xfrm>
-            <a:off x="548640" y="3794760"/>
-            <a:ext cx="2679192" cy="1920240"/>
+          <p:cNvPr id="19" name="Shape 17"/>
+          <p:cNvSpPr/>
+          <p:nvPr/>
+        </p:nvSpPr>
+        <p:spPr>
+          <a:xfrm>
+            <a:off x="548640" y="4617720"/>
+            <a:ext cx="11091672" cy="1188720"/>
           </a:xfrm>
           <a:prstGeom prst="roundRect">
             <a:avLst>
-              <a:gd name="adj" fmla="val 3810"/>
+              <a:gd name="adj" fmla="val 6154"/>
             </a:avLst>
           </a:prstGeom>
           <a:solidFill>
-            <a:srgbClr val="16395A"/>
+            <a:srgbClr val="0F2C44"/>
           </a:solidFill>
-          <a:ln w="12700">
-            <a:solidFill>
-              <a:srgbClr val="1C7293"/>
-            </a:solidFill>
-            <a:prstDash val="solid"/>
-          </a:ln>
-        </p:spPr>
-      </p:sp>
-      <p:sp>
-        <p:nvSpPr>
-          <p:cNvPr id="18" name="Text 16"/>
-          <p:cNvSpPr/>
-          <p:nvPr/>
-        </p:nvSpPr>
-        <p:spPr>
-          <a:xfrm>
-            <a:off x="640080" y="4087368"/>
-            <a:ext cx="2496312" cy="868680"/>
-          </a:xfrm>
-          <a:prstGeom prst="rect">
-            <a:avLst/>
-          </a:prstGeom>
-          <a:noFill/>
-          <a:ln/>
-        </p:spPr>
-        <p:txBody>
-          <a:bodyPr wrap="square" rtlCol="0" anchor="ctr"/>
-          <a:lstStyle/>
-          <a:p>
-            <a:pPr algn="ctr" indent="0" marL="0">
-              <a:buNone/>
-            </a:pPr>
-            <a:r>
-              <a:rPr lang="en-US" sz="3800" b="1" dirty="0">
+          <a:ln/>
+          <a:effectLst>
+            <a:outerShdw blurRad="76200" dist="25400" dir="5400000" algn="bl" rotWithShape="0">
+              <a:srgbClr val="9AB0BF">
+                <a:alpha val="25000"/>
+              </a:srgbClr>
+            </a:outerShdw>
+          </a:effectLst>
+        </p:spPr>
+        <p:txBody>
+          <a:bodyPr/>
+          <a:lstStyle/>
+          <a:p>
+            <a:endParaRPr lang="tr-TR"/>
+          </a:p>
+        </p:txBody>
+      </p:sp>
+      <p:sp>
+        <p:nvSpPr>
+          <p:cNvPr id="20" name="Text 18"/>
+          <p:cNvSpPr/>
+          <p:nvPr/>
+        </p:nvSpPr>
+        <p:spPr>
+          <a:xfrm>
+            <a:off x="822960" y="4846320"/>
+            <a:ext cx="10543032" cy="777240"/>
+          </a:xfrm>
+          <a:prstGeom prst="rect">
+            <a:avLst/>
+          </a:prstGeom>
+          <a:noFill/>
+          <a:ln/>
+        </p:spPr>
+        <p:txBody>
+          <a:bodyPr wrap="square" rtlCol="0" anchor="ctr"/>
+          <a:lstStyle/>
+          <a:p>
+            <a:pPr marL="0" indent="0">
+              <a:lnSpc>
+                <a:spcPct val="115000"/>
+              </a:lnSpc>
+              <a:buNone/>
+            </a:pPr>
+            <a:r>
+              <a:rPr lang="en-US" sz="1400" b="1" dirty="0">
                 <a:solidFill>
                   <a:srgbClr val="02C39A"/>
-                </a:solidFill>
-                <a:latin typeface="Trebuchet MS" pitchFamily="34" charset="0"/>
-                <a:ea typeface="Trebuchet MS" pitchFamily="34" charset="-122"/>
-                <a:cs typeface="Trebuchet MS" pitchFamily="34" charset="-120"/>
-              </a:rPr>
-              <a:t>34</a:t>
-            </a:r>
-            <a:endParaRPr lang="en-US" sz="3800" dirty="0"/>
-          </a:p>
-        </p:txBody>
-      </p:sp>
-      <p:sp>
-        <p:nvSpPr>
-          <p:cNvPr id="19" name="Text 17"/>
-          <p:cNvSpPr/>
-          <p:nvPr/>
-        </p:nvSpPr>
-        <p:spPr>
-          <a:xfrm>
-            <a:off x="685800" y="4983480"/>
-            <a:ext cx="2404872" cy="640080"/>
-          </a:xfrm>
-          <a:prstGeom prst="rect">
-            <a:avLst/>
-          </a:prstGeom>
-          <a:noFill/>
-          <a:ln/>
-        </p:spPr>
-        <p:txBody>
-          <a:bodyPr wrap="square" rtlCol="0" anchor="ctr"/>
-          <a:lstStyle/>
-          <a:p>
-            <a:pPr algn="ctr" indent="0" marL="0">
-              <a:lnSpc>
-                <a:spcPct val="105000"/>
-              </a:lnSpc>
-              <a:buNone/>
-            </a:pPr>
-            <a:r>
-              <a:rPr lang="en-US" sz="1300" dirty="0">
-                <a:solidFill>
-                  <a:srgbClr val="CADCFC"/>
                 </a:solidFill>
                 <a:latin typeface="Calibri" pitchFamily="34" charset="0"/>
                 <a:ea typeface="Calibri" pitchFamily="34" charset="-122"/>
                 <a:cs typeface="Calibri" pitchFamily="34" charset="-120"/>
               </a:rPr>
-              <a:t>REST API ucu</a:t>
-            </a:r>
-            <a:endParaRPr lang="en-US" sz="1300" dirty="0"/>
-          </a:p>
-        </p:txBody>
-      </p:sp>
-      <p:sp>
-        <p:nvSpPr>
-          <p:cNvPr id="20" name="Shape 18"/>
-          <p:cNvSpPr/>
-          <p:nvPr/>
-        </p:nvSpPr>
-        <p:spPr>
-          <a:xfrm>
-            <a:off x="3483864" y="3794760"/>
-            <a:ext cx="2679192" cy="1920240"/>
-          </a:xfrm>
-          <a:prstGeom prst="roundRect">
-            <a:avLst>
-              <a:gd name="adj" fmla="val 3810"/>
-            </a:avLst>
-          </a:prstGeom>
-          <a:solidFill>
-            <a:srgbClr val="16395A"/>
-          </a:solidFill>
-          <a:ln w="12700">
-            <a:solidFill>
-              <a:srgbClr val="1C7293"/>
-            </a:solidFill>
-            <a:prstDash val="solid"/>
-          </a:ln>
-        </p:spPr>
-      </p:sp>
-      <p:sp>
-        <p:nvSpPr>
-          <p:cNvPr id="21" name="Text 19"/>
-          <p:cNvSpPr/>
-          <p:nvPr/>
-        </p:nvSpPr>
-        <p:spPr>
-          <a:xfrm>
-            <a:off x="3575304" y="4087368"/>
-            <a:ext cx="2496312" cy="868680"/>
-          </a:xfrm>
-          <a:prstGeom prst="rect">
-            <a:avLst/>
-          </a:prstGeom>
-          <a:noFill/>
-          <a:ln/>
-        </p:spPr>
-        <p:txBody>
-          <a:bodyPr wrap="square" rtlCol="0" anchor="ctr"/>
-          <a:lstStyle/>
-          <a:p>
-            <a:pPr algn="ctr" indent="0" marL="0">
-              <a:buNone/>
-            </a:pPr>
-            <a:r>
-              <a:rPr lang="en-US" sz="3800" b="1" dirty="0">
-                <a:solidFill>
-                  <a:srgbClr val="02C39A"/>
-                </a:solidFill>
-                <a:latin typeface="Trebuchet MS" pitchFamily="34" charset="0"/>
-                <a:ea typeface="Trebuchet MS" pitchFamily="34" charset="-122"/>
-                <a:cs typeface="Trebuchet MS" pitchFamily="34" charset="-120"/>
-              </a:rPr>
-              <a:t>25</a:t>
-            </a:r>
-            <a:endParaRPr lang="en-US" sz="3800" dirty="0"/>
-          </a:p>
-        </p:txBody>
-      </p:sp>
-      <p:sp>
-        <p:nvSpPr>
-          <p:cNvPr id="22" name="Text 20"/>
-          <p:cNvSpPr/>
-          <p:nvPr/>
-        </p:nvSpPr>
-        <p:spPr>
-          <a:xfrm>
-            <a:off x="3621024" y="4983480"/>
-            <a:ext cx="2404872" cy="640080"/>
-          </a:xfrm>
-          <a:prstGeom prst="rect">
-            <a:avLst/>
-          </a:prstGeom>
-          <a:noFill/>
-          <a:ln/>
-        </p:spPr>
-        <p:txBody>
-          <a:bodyPr wrap="square" rtlCol="0" anchor="ctr"/>
-          <a:lstStyle/>
-          <a:p>
-            <a:pPr algn="ctr" indent="0" marL="0">
-              <a:lnSpc>
-                <a:spcPct val="105000"/>
-              </a:lnSpc>
-              <a:buNone/>
-            </a:pPr>
-            <a:r>
-              <a:rPr lang="en-US" sz="1300" dirty="0">
-                <a:solidFill>
-                  <a:srgbClr val="CADCFC"/>
+              <a:t>Bonus — OpenTelemetry → Jaeger:  </a:t>
+            </a:r>
+            <a:r>
+              <a:rPr lang="en-US" sz="1400" dirty="0">
+                <a:solidFill>
+                  <a:srgbClr val="FFFFFF"/>
                 </a:solidFill>
                 <a:latin typeface="Calibri" pitchFamily="34" charset="0"/>
                 <a:ea typeface="Calibri" pitchFamily="34" charset="-122"/>
                 <a:cs typeface="Calibri" pitchFamily="34" charset="-120"/>
               </a:rPr>
-              <a:t>Playwright E2E (CI'da)</a:t>
-            </a:r>
-            <a:endParaRPr lang="en-US" sz="1300" dirty="0"/>
-          </a:p>
-        </p:txBody>
-      </p:sp>
-      <p:sp>
-        <p:nvSpPr>
-          <p:cNvPr id="23" name="Shape 21"/>
-          <p:cNvSpPr/>
-          <p:nvPr/>
-        </p:nvSpPr>
-        <p:spPr>
-          <a:xfrm>
-            <a:off x="6419088" y="3794760"/>
-            <a:ext cx="2679192" cy="1920240"/>
-          </a:xfrm>
-          <a:prstGeom prst="roundRect">
-            <a:avLst>
-              <a:gd name="adj" fmla="val 3810"/>
-            </a:avLst>
-          </a:prstGeom>
-          <a:solidFill>
-            <a:srgbClr val="16395A"/>
-          </a:solidFill>
-          <a:ln w="12700">
-            <a:solidFill>
-              <a:srgbClr val="1C7293"/>
-            </a:solidFill>
-            <a:prstDash val="solid"/>
-          </a:ln>
-        </p:spPr>
-      </p:sp>
-      <p:sp>
-        <p:nvSpPr>
-          <p:cNvPr id="24" name="Text 22"/>
-          <p:cNvSpPr/>
-          <p:nvPr/>
-        </p:nvSpPr>
-        <p:spPr>
-          <a:xfrm>
-            <a:off x="6510528" y="4087368"/>
-            <a:ext cx="2496312" cy="868680"/>
-          </a:xfrm>
-          <a:prstGeom prst="rect">
-            <a:avLst/>
-          </a:prstGeom>
-          <a:noFill/>
-          <a:ln/>
-        </p:spPr>
-        <p:txBody>
-          <a:bodyPr wrap="square" rtlCol="0" anchor="ctr"/>
-          <a:lstStyle/>
-          <a:p>
-            <a:pPr algn="ctr" indent="0" marL="0">
-              <a:buNone/>
-            </a:pPr>
-            <a:r>
-              <a:rPr lang="en-US" sz="3800" b="1" dirty="0">
-                <a:solidFill>
-                  <a:srgbClr val="02C39A"/>
-                </a:solidFill>
-                <a:latin typeface="Trebuchet MS" pitchFamily="34" charset="0"/>
-                <a:ea typeface="Trebuchet MS" pitchFamily="34" charset="-122"/>
-                <a:cs typeface="Trebuchet MS" pitchFamily="34" charset="-120"/>
-              </a:rPr>
-              <a:t>3</a:t>
-            </a:r>
-            <a:endParaRPr lang="en-US" sz="3800" dirty="0"/>
-          </a:p>
-        </p:txBody>
-      </p:sp>
-      <p:sp>
-        <p:nvSpPr>
-          <p:cNvPr id="25" name="Text 23"/>
-          <p:cNvSpPr/>
-          <p:nvPr/>
-        </p:nvSpPr>
-        <p:spPr>
-          <a:xfrm>
-            <a:off x="6556248" y="4983480"/>
-            <a:ext cx="2404872" cy="640080"/>
-          </a:xfrm>
-          <a:prstGeom prst="rect">
-            <a:avLst/>
-          </a:prstGeom>
-          <a:noFill/>
-          <a:ln/>
-        </p:spPr>
-        <p:txBody>
-          <a:bodyPr wrap="square" rtlCol="0" anchor="ctr"/>
-          <a:lstStyle/>
-          <a:p>
-            <a:pPr algn="ctr" indent="0" marL="0">
-              <a:lnSpc>
-                <a:spcPct val="105000"/>
-              </a:lnSpc>
-              <a:buNone/>
-            </a:pPr>
-            <a:r>
-              <a:rPr lang="en-US" sz="1300" dirty="0">
-                <a:solidFill>
-                  <a:srgbClr val="CADCFC"/>
-                </a:solidFill>
-                <a:latin typeface="Calibri" pitchFamily="34" charset="0"/>
-                <a:ea typeface="Calibri" pitchFamily="34" charset="-122"/>
-                <a:cs typeface="Calibri" pitchFamily="34" charset="-120"/>
-              </a:rPr>
-              <a:t>Grafana paneli</a:t>
-            </a:r>
-            <a:endParaRPr lang="en-US" sz="1300" dirty="0"/>
-          </a:p>
-        </p:txBody>
-      </p:sp>
-      <p:sp>
-        <p:nvSpPr>
-          <p:cNvPr id="26" name="Shape 24"/>
-          <p:cNvSpPr/>
-          <p:nvPr/>
-        </p:nvSpPr>
-        <p:spPr>
-          <a:xfrm>
-            <a:off x="9354312" y="3794760"/>
-            <a:ext cx="2679192" cy="1920240"/>
-          </a:xfrm>
-          <a:prstGeom prst="roundRect">
-            <a:avLst>
-              <a:gd name="adj" fmla="val 3810"/>
-            </a:avLst>
-          </a:prstGeom>
-          <a:solidFill>
-            <a:srgbClr val="16395A"/>
-          </a:solidFill>
-          <a:ln w="12700">
-            <a:solidFill>
-              <a:srgbClr val="1C7293"/>
-            </a:solidFill>
-            <a:prstDash val="solid"/>
-          </a:ln>
-        </p:spPr>
-      </p:sp>
-      <p:sp>
-        <p:nvSpPr>
-          <p:cNvPr id="27" name="Text 25"/>
-          <p:cNvSpPr/>
-          <p:nvPr/>
-        </p:nvSpPr>
-        <p:spPr>
-          <a:xfrm>
-            <a:off x="9445752" y="4087368"/>
-            <a:ext cx="2496312" cy="868680"/>
-          </a:xfrm>
-          <a:prstGeom prst="rect">
-            <a:avLst/>
-          </a:prstGeom>
-          <a:noFill/>
-          <a:ln/>
-        </p:spPr>
-        <p:txBody>
-          <a:bodyPr wrap="square" rtlCol="0" anchor="ctr"/>
-          <a:lstStyle/>
-          <a:p>
-            <a:pPr algn="ctr" indent="0" marL="0">
-              <a:buNone/>
-            </a:pPr>
-            <a:r>
-              <a:rPr lang="en-US" sz="3800" b="1" dirty="0">
-                <a:solidFill>
-                  <a:srgbClr val="02C39A"/>
-                </a:solidFill>
-                <a:latin typeface="Trebuchet MS" pitchFamily="34" charset="0"/>
-                <a:ea typeface="Trebuchet MS" pitchFamily="34" charset="-122"/>
-                <a:cs typeface="Trebuchet MS" pitchFamily="34" charset="-120"/>
-              </a:rPr>
-              <a:t>+5</a:t>
-            </a:r>
-            <a:endParaRPr lang="en-US" sz="3800" dirty="0"/>
-          </a:p>
-        </p:txBody>
-      </p:sp>
-      <p:sp>
-        <p:nvSpPr>
-          <p:cNvPr id="28" name="Text 26"/>
-          <p:cNvSpPr/>
-          <p:nvPr/>
-        </p:nvSpPr>
-        <p:spPr>
-          <a:xfrm>
-            <a:off x="9491472" y="4983480"/>
-            <a:ext cx="2404872" cy="640080"/>
-          </a:xfrm>
-          <a:prstGeom prst="rect">
-            <a:avLst/>
-          </a:prstGeom>
-          <a:noFill/>
-          <a:ln/>
-        </p:spPr>
-        <p:txBody>
-          <a:bodyPr wrap="square" rtlCol="0" anchor="ctr"/>
-          <a:lstStyle/>
-          <a:p>
-            <a:pPr algn="ctr" indent="0" marL="0">
-              <a:lnSpc>
-                <a:spcPct val="105000"/>
-              </a:lnSpc>
-              <a:buNone/>
-            </a:pPr>
-            <a:r>
-              <a:rPr lang="en-US" sz="1300" dirty="0">
-                <a:solidFill>
-                  <a:srgbClr val="CADCFC"/>
-                </a:solidFill>
-                <a:latin typeface="Calibri" pitchFamily="34" charset="0"/>
-                <a:ea typeface="Calibri" pitchFamily="34" charset="-122"/>
-                <a:cs typeface="Calibri" pitchFamily="34" charset="-120"/>
-              </a:rPr>
-              <a:t>OpenTelemetry bonus</a:t>
-            </a:r>
-            <a:endParaRPr lang="en-US" sz="1300" dirty="0"/>
+              <a:t>FastAPI ve SQLAlchemy otomatik enstrümantasyonu; OTLP gRPC ile span'ler Jaeger UI'da (:16686). Bir config bayrağı ile açılıp kapanır (testte kapalı). Latency spike'ında ilgili SQL/booking span'ine inilir.</a:t>
+            </a:r>
+            <a:endParaRPr lang="en-US" sz="1400" dirty="0"/>
           </a:p>
         </p:txBody>
       </p:sp>
@@ -6940,12 +5872,13 @@
 
 <file path=ppt/slides/slide8.xml><?xml version="1.0" encoding="utf-8"?>
 <p:sld xmlns:a="http://schemas.openxmlformats.org/drawingml/2006/main" xmlns:r="http://schemas.openxmlformats.org/officeDocument/2006/relationships" xmlns:p="http://schemas.openxmlformats.org/presentationml/2006/main">
-  <p:cSld name="Slide 8">
+  <p:cSld name="Slide 7">
     <p:bg>
       <p:bgPr>
         <a:solidFill>
           <a:srgbClr val="0F2C44"/>
         </a:solidFill>
+        <a:effectLst/>
       </p:bgPr>
     </p:bg>
     <p:spTree>
@@ -6971,6 +5904,1064 @@
         <p:spPr>
           <a:xfrm>
             <a:off x="0" y="0"/>
+            <a:ext cx="12188952" cy="1280160"/>
+          </a:xfrm>
+          <a:prstGeom prst="rect">
+            <a:avLst/>
+          </a:prstGeom>
+          <a:solidFill>
+            <a:srgbClr val="0B2138"/>
+          </a:solidFill>
+          <a:ln/>
+        </p:spPr>
+        <p:txBody>
+          <a:bodyPr/>
+          <a:lstStyle/>
+          <a:p>
+            <a:endParaRPr lang="tr-TR"/>
+          </a:p>
+        </p:txBody>
+      </p:sp>
+      <p:sp>
+        <p:nvSpPr>
+          <p:cNvPr id="3" name="Text 1"/>
+          <p:cNvSpPr/>
+          <p:nvPr/>
+        </p:nvSpPr>
+        <p:spPr>
+          <a:xfrm>
+            <a:off x="548640" y="320040"/>
+            <a:ext cx="7315200" cy="274320"/>
+          </a:xfrm>
+          <a:prstGeom prst="rect">
+            <a:avLst/>
+          </a:prstGeom>
+          <a:noFill/>
+          <a:ln/>
+        </p:spPr>
+        <p:txBody>
+          <a:bodyPr wrap="square" rtlCol="0" anchor="ctr"/>
+          <a:lstStyle/>
+          <a:p>
+            <a:pPr marL="0" indent="0">
+              <a:buNone/>
+            </a:pPr>
+            <a:r>
+              <a:rPr lang="en-US" sz="1200" b="1" kern="0" spc="200" dirty="0">
+                <a:solidFill>
+                  <a:srgbClr val="02C39A"/>
+                </a:solidFill>
+                <a:latin typeface="Calibri" pitchFamily="34" charset="0"/>
+                <a:ea typeface="Calibri" pitchFamily="34" charset="-122"/>
+                <a:cs typeface="Calibri" pitchFamily="34" charset="-120"/>
+              </a:rPr>
+              <a:t>6 · SAYILAR</a:t>
+            </a:r>
+            <a:endParaRPr lang="en-US" sz="1200" dirty="0"/>
+          </a:p>
+        </p:txBody>
+      </p:sp>
+      <p:sp>
+        <p:nvSpPr>
+          <p:cNvPr id="4" name="Text 2"/>
+          <p:cNvSpPr/>
+          <p:nvPr/>
+        </p:nvSpPr>
+        <p:spPr>
+          <a:xfrm>
+            <a:off x="548640" y="548640"/>
+            <a:ext cx="10058400" cy="548640"/>
+          </a:xfrm>
+          <a:prstGeom prst="rect">
+            <a:avLst/>
+          </a:prstGeom>
+          <a:noFill/>
+          <a:ln/>
+        </p:spPr>
+        <p:txBody>
+          <a:bodyPr wrap="square" rtlCol="0" anchor="ctr"/>
+          <a:lstStyle/>
+          <a:p>
+            <a:pPr marL="0" indent="0">
+              <a:buNone/>
+            </a:pPr>
+            <a:r>
+              <a:rPr lang="en-US" sz="3000" b="1" dirty="0">
+                <a:solidFill>
+                  <a:srgbClr val="FFFFFF"/>
+                </a:solidFill>
+                <a:latin typeface="Trebuchet MS" pitchFamily="34" charset="0"/>
+                <a:ea typeface="Trebuchet MS" pitchFamily="34" charset="-122"/>
+                <a:cs typeface="Trebuchet MS" pitchFamily="34" charset="-120"/>
+              </a:rPr>
+              <a:t>Projeyi anlatan rakamlar</a:t>
+            </a:r>
+            <a:endParaRPr lang="en-US" sz="3000" dirty="0"/>
+          </a:p>
+        </p:txBody>
+      </p:sp>
+      <p:sp>
+        <p:nvSpPr>
+          <p:cNvPr id="5" name="Shape 3"/>
+          <p:cNvSpPr/>
+          <p:nvPr/>
+        </p:nvSpPr>
+        <p:spPr>
+          <a:xfrm>
+            <a:off x="548640" y="1600200"/>
+            <a:ext cx="2679192" cy="1920240"/>
+          </a:xfrm>
+          <a:prstGeom prst="roundRect">
+            <a:avLst>
+              <a:gd name="adj" fmla="val 3810"/>
+            </a:avLst>
+          </a:prstGeom>
+          <a:solidFill>
+            <a:srgbClr val="16395A"/>
+          </a:solidFill>
+          <a:ln w="12700">
+            <a:solidFill>
+              <a:srgbClr val="1C7293"/>
+            </a:solidFill>
+            <a:prstDash val="solid"/>
+          </a:ln>
+        </p:spPr>
+        <p:txBody>
+          <a:bodyPr/>
+          <a:lstStyle/>
+          <a:p>
+            <a:endParaRPr lang="tr-TR"/>
+          </a:p>
+        </p:txBody>
+      </p:sp>
+      <p:sp>
+        <p:nvSpPr>
+          <p:cNvPr id="6" name="Text 4"/>
+          <p:cNvSpPr/>
+          <p:nvPr/>
+        </p:nvSpPr>
+        <p:spPr>
+          <a:xfrm>
+            <a:off x="640080" y="1892808"/>
+            <a:ext cx="2496312" cy="868680"/>
+          </a:xfrm>
+          <a:prstGeom prst="rect">
+            <a:avLst/>
+          </a:prstGeom>
+          <a:noFill/>
+          <a:ln/>
+        </p:spPr>
+        <p:txBody>
+          <a:bodyPr wrap="square" rtlCol="0" anchor="ctr"/>
+          <a:lstStyle/>
+          <a:p>
+            <a:pPr marL="0" indent="0" algn="ctr">
+              <a:buNone/>
+            </a:pPr>
+            <a:r>
+              <a:rPr lang="en-US" sz="3800" b="1" dirty="0">
+                <a:solidFill>
+                  <a:srgbClr val="02C39A"/>
+                </a:solidFill>
+                <a:latin typeface="Trebuchet MS" pitchFamily="34" charset="0"/>
+                <a:ea typeface="Trebuchet MS" pitchFamily="34" charset="-122"/>
+                <a:cs typeface="Trebuchet MS" pitchFamily="34" charset="-120"/>
+              </a:rPr>
+              <a:t>%98.5</a:t>
+            </a:r>
+            <a:endParaRPr lang="en-US" sz="3800" dirty="0"/>
+          </a:p>
+        </p:txBody>
+      </p:sp>
+      <p:sp>
+        <p:nvSpPr>
+          <p:cNvPr id="7" name="Text 5"/>
+          <p:cNvSpPr/>
+          <p:nvPr/>
+        </p:nvSpPr>
+        <p:spPr>
+          <a:xfrm>
+            <a:off x="685800" y="2788920"/>
+            <a:ext cx="2404872" cy="640080"/>
+          </a:xfrm>
+          <a:prstGeom prst="rect">
+            <a:avLst/>
+          </a:prstGeom>
+          <a:noFill/>
+          <a:ln/>
+        </p:spPr>
+        <p:txBody>
+          <a:bodyPr wrap="square" rtlCol="0" anchor="ctr"/>
+          <a:lstStyle/>
+          <a:p>
+            <a:pPr marL="0" indent="0" algn="ctr">
+              <a:lnSpc>
+                <a:spcPct val="105000"/>
+              </a:lnSpc>
+              <a:buNone/>
+            </a:pPr>
+            <a:r>
+              <a:rPr lang="en-US" sz="1300" dirty="0">
+                <a:solidFill>
+                  <a:srgbClr val="CADCFC"/>
+                </a:solidFill>
+                <a:latin typeface="Calibri" pitchFamily="34" charset="0"/>
+                <a:ea typeface="Calibri" pitchFamily="34" charset="-122"/>
+                <a:cs typeface="Calibri" pitchFamily="34" charset="-120"/>
+              </a:rPr>
+              <a:t>test coverage (hedef ≥70)</a:t>
+            </a:r>
+            <a:endParaRPr lang="en-US" sz="1300" dirty="0"/>
+          </a:p>
+        </p:txBody>
+      </p:sp>
+      <p:sp>
+        <p:nvSpPr>
+          <p:cNvPr id="8" name="Shape 6"/>
+          <p:cNvSpPr/>
+          <p:nvPr/>
+        </p:nvSpPr>
+        <p:spPr>
+          <a:xfrm>
+            <a:off x="3483864" y="1600200"/>
+            <a:ext cx="2679192" cy="1920240"/>
+          </a:xfrm>
+          <a:prstGeom prst="roundRect">
+            <a:avLst>
+              <a:gd name="adj" fmla="val 3810"/>
+            </a:avLst>
+          </a:prstGeom>
+          <a:solidFill>
+            <a:srgbClr val="16395A"/>
+          </a:solidFill>
+          <a:ln w="12700">
+            <a:solidFill>
+              <a:srgbClr val="1C7293"/>
+            </a:solidFill>
+            <a:prstDash val="solid"/>
+          </a:ln>
+        </p:spPr>
+        <p:txBody>
+          <a:bodyPr/>
+          <a:lstStyle/>
+          <a:p>
+            <a:endParaRPr lang="tr-TR"/>
+          </a:p>
+        </p:txBody>
+      </p:sp>
+      <p:sp>
+        <p:nvSpPr>
+          <p:cNvPr id="9" name="Text 7"/>
+          <p:cNvSpPr/>
+          <p:nvPr/>
+        </p:nvSpPr>
+        <p:spPr>
+          <a:xfrm>
+            <a:off x="3575304" y="1892808"/>
+            <a:ext cx="2496312" cy="868680"/>
+          </a:xfrm>
+          <a:prstGeom prst="rect">
+            <a:avLst/>
+          </a:prstGeom>
+          <a:noFill/>
+          <a:ln/>
+        </p:spPr>
+        <p:txBody>
+          <a:bodyPr wrap="square" rtlCol="0" anchor="ctr"/>
+          <a:lstStyle/>
+          <a:p>
+            <a:pPr marL="0" indent="0" algn="ctr">
+              <a:buNone/>
+            </a:pPr>
+            <a:r>
+              <a:rPr lang="en-US" sz="3800" b="1" dirty="0">
+                <a:solidFill>
+                  <a:srgbClr val="02C39A"/>
+                </a:solidFill>
+                <a:latin typeface="Trebuchet MS" pitchFamily="34" charset="0"/>
+                <a:ea typeface="Trebuchet MS" pitchFamily="34" charset="-122"/>
+                <a:cs typeface="Trebuchet MS" pitchFamily="34" charset="-120"/>
+              </a:rPr>
+              <a:t>293</a:t>
+            </a:r>
+            <a:endParaRPr lang="en-US" sz="3800" dirty="0"/>
+          </a:p>
+        </p:txBody>
+      </p:sp>
+      <p:sp>
+        <p:nvSpPr>
+          <p:cNvPr id="10" name="Text 8"/>
+          <p:cNvSpPr/>
+          <p:nvPr/>
+        </p:nvSpPr>
+        <p:spPr>
+          <a:xfrm>
+            <a:off x="3621024" y="2788920"/>
+            <a:ext cx="2404872" cy="640080"/>
+          </a:xfrm>
+          <a:prstGeom prst="rect">
+            <a:avLst/>
+          </a:prstGeom>
+          <a:noFill/>
+          <a:ln/>
+        </p:spPr>
+        <p:txBody>
+          <a:bodyPr wrap="square" rtlCol="0" anchor="ctr"/>
+          <a:lstStyle/>
+          <a:p>
+            <a:pPr marL="0" indent="0" algn="ctr">
+              <a:lnSpc>
+                <a:spcPct val="105000"/>
+              </a:lnSpc>
+              <a:buNone/>
+            </a:pPr>
+            <a:r>
+              <a:rPr lang="en-US" sz="1300" dirty="0">
+                <a:solidFill>
+                  <a:srgbClr val="CADCFC"/>
+                </a:solidFill>
+                <a:latin typeface="Calibri" pitchFamily="34" charset="0"/>
+                <a:ea typeface="Calibri" pitchFamily="34" charset="-122"/>
+                <a:cs typeface="Calibri" pitchFamily="34" charset="-120"/>
+              </a:rPr>
+              <a:t>unit + integration testi · 0 hata</a:t>
+            </a:r>
+            <a:endParaRPr lang="en-US" sz="1300" dirty="0"/>
+          </a:p>
+        </p:txBody>
+      </p:sp>
+      <p:sp>
+        <p:nvSpPr>
+          <p:cNvPr id="11" name="Shape 9"/>
+          <p:cNvSpPr/>
+          <p:nvPr/>
+        </p:nvSpPr>
+        <p:spPr>
+          <a:xfrm>
+            <a:off x="6419088" y="1600200"/>
+            <a:ext cx="2679192" cy="1920240"/>
+          </a:xfrm>
+          <a:prstGeom prst="roundRect">
+            <a:avLst>
+              <a:gd name="adj" fmla="val 3810"/>
+            </a:avLst>
+          </a:prstGeom>
+          <a:solidFill>
+            <a:srgbClr val="16395A"/>
+          </a:solidFill>
+          <a:ln w="12700">
+            <a:solidFill>
+              <a:srgbClr val="1C7293"/>
+            </a:solidFill>
+            <a:prstDash val="solid"/>
+          </a:ln>
+        </p:spPr>
+        <p:txBody>
+          <a:bodyPr/>
+          <a:lstStyle/>
+          <a:p>
+            <a:endParaRPr lang="tr-TR"/>
+          </a:p>
+        </p:txBody>
+      </p:sp>
+      <p:sp>
+        <p:nvSpPr>
+          <p:cNvPr id="12" name="Text 10"/>
+          <p:cNvSpPr/>
+          <p:nvPr/>
+        </p:nvSpPr>
+        <p:spPr>
+          <a:xfrm>
+            <a:off x="6510528" y="1892808"/>
+            <a:ext cx="2496312" cy="868680"/>
+          </a:xfrm>
+          <a:prstGeom prst="rect">
+            <a:avLst/>
+          </a:prstGeom>
+          <a:noFill/>
+          <a:ln/>
+        </p:spPr>
+        <p:txBody>
+          <a:bodyPr wrap="square" rtlCol="0" anchor="ctr"/>
+          <a:lstStyle/>
+          <a:p>
+            <a:pPr marL="0" indent="0" algn="ctr">
+              <a:buNone/>
+            </a:pPr>
+            <a:r>
+              <a:rPr lang="en-US" sz="3800" b="1" dirty="0">
+                <a:solidFill>
+                  <a:srgbClr val="02C39A"/>
+                </a:solidFill>
+                <a:latin typeface="Trebuchet MS" pitchFamily="34" charset="0"/>
+                <a:ea typeface="Trebuchet MS" pitchFamily="34" charset="-122"/>
+                <a:cs typeface="Trebuchet MS" pitchFamily="34" charset="-120"/>
+              </a:rPr>
+              <a:t>306</a:t>
+            </a:r>
+            <a:endParaRPr lang="en-US" sz="3800" dirty="0"/>
+          </a:p>
+        </p:txBody>
+      </p:sp>
+      <p:sp>
+        <p:nvSpPr>
+          <p:cNvPr id="13" name="Text 11"/>
+          <p:cNvSpPr/>
+          <p:nvPr/>
+        </p:nvSpPr>
+        <p:spPr>
+          <a:xfrm>
+            <a:off x="6556248" y="2788920"/>
+            <a:ext cx="2404872" cy="640080"/>
+          </a:xfrm>
+          <a:prstGeom prst="rect">
+            <a:avLst/>
+          </a:prstGeom>
+          <a:noFill/>
+          <a:ln/>
+        </p:spPr>
+        <p:txBody>
+          <a:bodyPr wrap="square" rtlCol="0" anchor="ctr"/>
+          <a:lstStyle/>
+          <a:p>
+            <a:pPr marL="0" indent="0" algn="ctr">
+              <a:lnSpc>
+                <a:spcPct val="105000"/>
+              </a:lnSpc>
+              <a:buNone/>
+            </a:pPr>
+            <a:r>
+              <a:rPr lang="en-US" sz="1300" dirty="0">
+                <a:solidFill>
+                  <a:srgbClr val="CADCFC"/>
+                </a:solidFill>
+                <a:latin typeface="Calibri" pitchFamily="34" charset="0"/>
+                <a:ea typeface="Calibri" pitchFamily="34" charset="-122"/>
+                <a:cs typeface="Calibri" pitchFamily="34" charset="-120"/>
+              </a:rPr>
+              <a:t>toplam test fonksiyonu</a:t>
+            </a:r>
+            <a:endParaRPr lang="en-US" sz="1300" dirty="0"/>
+          </a:p>
+        </p:txBody>
+      </p:sp>
+      <p:sp>
+        <p:nvSpPr>
+          <p:cNvPr id="14" name="Shape 12"/>
+          <p:cNvSpPr/>
+          <p:nvPr/>
+        </p:nvSpPr>
+        <p:spPr>
+          <a:xfrm>
+            <a:off x="9354312" y="1600200"/>
+            <a:ext cx="2679192" cy="1920240"/>
+          </a:xfrm>
+          <a:prstGeom prst="roundRect">
+            <a:avLst>
+              <a:gd name="adj" fmla="val 3810"/>
+            </a:avLst>
+          </a:prstGeom>
+          <a:solidFill>
+            <a:srgbClr val="16395A"/>
+          </a:solidFill>
+          <a:ln w="12700">
+            <a:solidFill>
+              <a:srgbClr val="1C7293"/>
+            </a:solidFill>
+            <a:prstDash val="solid"/>
+          </a:ln>
+        </p:spPr>
+        <p:txBody>
+          <a:bodyPr/>
+          <a:lstStyle/>
+          <a:p>
+            <a:endParaRPr lang="tr-TR"/>
+          </a:p>
+        </p:txBody>
+      </p:sp>
+      <p:sp>
+        <p:nvSpPr>
+          <p:cNvPr id="15" name="Text 13"/>
+          <p:cNvSpPr/>
+          <p:nvPr/>
+        </p:nvSpPr>
+        <p:spPr>
+          <a:xfrm>
+            <a:off x="9445752" y="1892808"/>
+            <a:ext cx="2496312" cy="868680"/>
+          </a:xfrm>
+          <a:prstGeom prst="rect">
+            <a:avLst/>
+          </a:prstGeom>
+          <a:noFill/>
+          <a:ln/>
+        </p:spPr>
+        <p:txBody>
+          <a:bodyPr wrap="square" rtlCol="0" anchor="ctr"/>
+          <a:lstStyle/>
+          <a:p>
+            <a:pPr marL="0" indent="0" algn="ctr">
+              <a:buNone/>
+            </a:pPr>
+            <a:r>
+              <a:rPr lang="en-US" sz="3800" b="1" dirty="0">
+                <a:solidFill>
+                  <a:srgbClr val="02C39A"/>
+                </a:solidFill>
+                <a:latin typeface="Trebuchet MS" pitchFamily="34" charset="0"/>
+                <a:ea typeface="Trebuchet MS" pitchFamily="34" charset="-122"/>
+                <a:cs typeface="Trebuchet MS" pitchFamily="34" charset="-120"/>
+              </a:rPr>
+              <a:t>465 ms</a:t>
+            </a:r>
+            <a:endParaRPr lang="en-US" sz="3800" dirty="0"/>
+          </a:p>
+        </p:txBody>
+      </p:sp>
+      <p:sp>
+        <p:nvSpPr>
+          <p:cNvPr id="16" name="Text 14"/>
+          <p:cNvSpPr/>
+          <p:nvPr/>
+        </p:nvSpPr>
+        <p:spPr>
+          <a:xfrm>
+            <a:off x="9491472" y="2788920"/>
+            <a:ext cx="2404872" cy="640080"/>
+          </a:xfrm>
+          <a:prstGeom prst="rect">
+            <a:avLst/>
+          </a:prstGeom>
+          <a:noFill/>
+          <a:ln/>
+        </p:spPr>
+        <p:txBody>
+          <a:bodyPr wrap="square" rtlCol="0" anchor="ctr"/>
+          <a:lstStyle/>
+          <a:p>
+            <a:pPr marL="0" indent="0" algn="ctr">
+              <a:lnSpc>
+                <a:spcPct val="105000"/>
+              </a:lnSpc>
+              <a:buNone/>
+            </a:pPr>
+            <a:r>
+              <a:rPr lang="en-US" sz="1300" dirty="0">
+                <a:solidFill>
+                  <a:srgbClr val="CADCFC"/>
+                </a:solidFill>
+                <a:latin typeface="Calibri" pitchFamily="34" charset="0"/>
+                <a:ea typeface="Calibri" pitchFamily="34" charset="-122"/>
+                <a:cs typeface="Calibri" pitchFamily="34" charset="-120"/>
+              </a:rPr>
+              <a:t>k6 p95 (&lt;500, CI kapısı)</a:t>
+            </a:r>
+            <a:endParaRPr lang="en-US" sz="1300" dirty="0"/>
+          </a:p>
+        </p:txBody>
+      </p:sp>
+      <p:sp>
+        <p:nvSpPr>
+          <p:cNvPr id="17" name="Shape 15"/>
+          <p:cNvSpPr/>
+          <p:nvPr/>
+        </p:nvSpPr>
+        <p:spPr>
+          <a:xfrm>
+            <a:off x="548640" y="3794760"/>
+            <a:ext cx="2679192" cy="1920240"/>
+          </a:xfrm>
+          <a:prstGeom prst="roundRect">
+            <a:avLst>
+              <a:gd name="adj" fmla="val 3810"/>
+            </a:avLst>
+          </a:prstGeom>
+          <a:solidFill>
+            <a:srgbClr val="16395A"/>
+          </a:solidFill>
+          <a:ln w="12700">
+            <a:solidFill>
+              <a:srgbClr val="1C7293"/>
+            </a:solidFill>
+            <a:prstDash val="solid"/>
+          </a:ln>
+        </p:spPr>
+        <p:txBody>
+          <a:bodyPr/>
+          <a:lstStyle/>
+          <a:p>
+            <a:endParaRPr lang="tr-TR"/>
+          </a:p>
+        </p:txBody>
+      </p:sp>
+      <p:sp>
+        <p:nvSpPr>
+          <p:cNvPr id="18" name="Text 16"/>
+          <p:cNvSpPr/>
+          <p:nvPr/>
+        </p:nvSpPr>
+        <p:spPr>
+          <a:xfrm>
+            <a:off x="640080" y="4087368"/>
+            <a:ext cx="2496312" cy="868680"/>
+          </a:xfrm>
+          <a:prstGeom prst="rect">
+            <a:avLst/>
+          </a:prstGeom>
+          <a:noFill/>
+          <a:ln/>
+        </p:spPr>
+        <p:txBody>
+          <a:bodyPr wrap="square" rtlCol="0" anchor="ctr"/>
+          <a:lstStyle/>
+          <a:p>
+            <a:pPr marL="0" indent="0" algn="ctr">
+              <a:buNone/>
+            </a:pPr>
+            <a:r>
+              <a:rPr lang="en-US" sz="3800" b="1" dirty="0">
+                <a:solidFill>
+                  <a:srgbClr val="02C39A"/>
+                </a:solidFill>
+                <a:latin typeface="Trebuchet MS" pitchFamily="34" charset="0"/>
+                <a:ea typeface="Trebuchet MS" pitchFamily="34" charset="-122"/>
+                <a:cs typeface="Trebuchet MS" pitchFamily="34" charset="-120"/>
+              </a:rPr>
+              <a:t>34</a:t>
+            </a:r>
+            <a:endParaRPr lang="en-US" sz="3800" dirty="0"/>
+          </a:p>
+        </p:txBody>
+      </p:sp>
+      <p:sp>
+        <p:nvSpPr>
+          <p:cNvPr id="19" name="Text 17"/>
+          <p:cNvSpPr/>
+          <p:nvPr/>
+        </p:nvSpPr>
+        <p:spPr>
+          <a:xfrm>
+            <a:off x="685800" y="4983480"/>
+            <a:ext cx="2404872" cy="640080"/>
+          </a:xfrm>
+          <a:prstGeom prst="rect">
+            <a:avLst/>
+          </a:prstGeom>
+          <a:noFill/>
+          <a:ln/>
+        </p:spPr>
+        <p:txBody>
+          <a:bodyPr wrap="square" rtlCol="0" anchor="ctr"/>
+          <a:lstStyle/>
+          <a:p>
+            <a:pPr marL="0" indent="0" algn="ctr">
+              <a:lnSpc>
+                <a:spcPct val="105000"/>
+              </a:lnSpc>
+              <a:buNone/>
+            </a:pPr>
+            <a:r>
+              <a:rPr lang="en-US" sz="1300" dirty="0">
+                <a:solidFill>
+                  <a:srgbClr val="CADCFC"/>
+                </a:solidFill>
+                <a:latin typeface="Calibri" pitchFamily="34" charset="0"/>
+                <a:ea typeface="Calibri" pitchFamily="34" charset="-122"/>
+                <a:cs typeface="Calibri" pitchFamily="34" charset="-120"/>
+              </a:rPr>
+              <a:t>REST API ucu</a:t>
+            </a:r>
+            <a:endParaRPr lang="en-US" sz="1300" dirty="0"/>
+          </a:p>
+        </p:txBody>
+      </p:sp>
+      <p:sp>
+        <p:nvSpPr>
+          <p:cNvPr id="20" name="Shape 18"/>
+          <p:cNvSpPr/>
+          <p:nvPr/>
+        </p:nvSpPr>
+        <p:spPr>
+          <a:xfrm>
+            <a:off x="3483864" y="3794760"/>
+            <a:ext cx="2679192" cy="1920240"/>
+          </a:xfrm>
+          <a:prstGeom prst="roundRect">
+            <a:avLst>
+              <a:gd name="adj" fmla="val 3810"/>
+            </a:avLst>
+          </a:prstGeom>
+          <a:solidFill>
+            <a:srgbClr val="16395A"/>
+          </a:solidFill>
+          <a:ln w="12700">
+            <a:solidFill>
+              <a:srgbClr val="1C7293"/>
+            </a:solidFill>
+            <a:prstDash val="solid"/>
+          </a:ln>
+        </p:spPr>
+        <p:txBody>
+          <a:bodyPr/>
+          <a:lstStyle/>
+          <a:p>
+            <a:endParaRPr lang="tr-TR"/>
+          </a:p>
+        </p:txBody>
+      </p:sp>
+      <p:sp>
+        <p:nvSpPr>
+          <p:cNvPr id="21" name="Text 19"/>
+          <p:cNvSpPr/>
+          <p:nvPr/>
+        </p:nvSpPr>
+        <p:spPr>
+          <a:xfrm>
+            <a:off x="3575304" y="4087368"/>
+            <a:ext cx="2496312" cy="868680"/>
+          </a:xfrm>
+          <a:prstGeom prst="rect">
+            <a:avLst/>
+          </a:prstGeom>
+          <a:noFill/>
+          <a:ln/>
+        </p:spPr>
+        <p:txBody>
+          <a:bodyPr wrap="square" rtlCol="0" anchor="ctr"/>
+          <a:lstStyle/>
+          <a:p>
+            <a:pPr marL="0" indent="0" algn="ctr">
+              <a:buNone/>
+            </a:pPr>
+            <a:r>
+              <a:rPr lang="en-US" sz="3800" b="1" dirty="0">
+                <a:solidFill>
+                  <a:srgbClr val="02C39A"/>
+                </a:solidFill>
+                <a:latin typeface="Trebuchet MS" pitchFamily="34" charset="0"/>
+                <a:ea typeface="Trebuchet MS" pitchFamily="34" charset="-122"/>
+                <a:cs typeface="Trebuchet MS" pitchFamily="34" charset="-120"/>
+              </a:rPr>
+              <a:t>25</a:t>
+            </a:r>
+            <a:endParaRPr lang="en-US" sz="3800" dirty="0"/>
+          </a:p>
+        </p:txBody>
+      </p:sp>
+      <p:sp>
+        <p:nvSpPr>
+          <p:cNvPr id="22" name="Text 20"/>
+          <p:cNvSpPr/>
+          <p:nvPr/>
+        </p:nvSpPr>
+        <p:spPr>
+          <a:xfrm>
+            <a:off x="3621024" y="4983480"/>
+            <a:ext cx="2404872" cy="640080"/>
+          </a:xfrm>
+          <a:prstGeom prst="rect">
+            <a:avLst/>
+          </a:prstGeom>
+          <a:noFill/>
+          <a:ln/>
+        </p:spPr>
+        <p:txBody>
+          <a:bodyPr wrap="square" rtlCol="0" anchor="ctr"/>
+          <a:lstStyle/>
+          <a:p>
+            <a:pPr marL="0" indent="0" algn="ctr">
+              <a:lnSpc>
+                <a:spcPct val="105000"/>
+              </a:lnSpc>
+              <a:buNone/>
+            </a:pPr>
+            <a:r>
+              <a:rPr lang="en-US" sz="1300" dirty="0">
+                <a:solidFill>
+                  <a:srgbClr val="CADCFC"/>
+                </a:solidFill>
+                <a:latin typeface="Calibri" pitchFamily="34" charset="0"/>
+                <a:ea typeface="Calibri" pitchFamily="34" charset="-122"/>
+                <a:cs typeface="Calibri" pitchFamily="34" charset="-120"/>
+              </a:rPr>
+              <a:t>Playwright E2E (CI'da)</a:t>
+            </a:r>
+            <a:endParaRPr lang="en-US" sz="1300" dirty="0"/>
+          </a:p>
+        </p:txBody>
+      </p:sp>
+      <p:sp>
+        <p:nvSpPr>
+          <p:cNvPr id="23" name="Shape 21"/>
+          <p:cNvSpPr/>
+          <p:nvPr/>
+        </p:nvSpPr>
+        <p:spPr>
+          <a:xfrm>
+            <a:off x="6419088" y="3794760"/>
+            <a:ext cx="2679192" cy="1920240"/>
+          </a:xfrm>
+          <a:prstGeom prst="roundRect">
+            <a:avLst>
+              <a:gd name="adj" fmla="val 3810"/>
+            </a:avLst>
+          </a:prstGeom>
+          <a:solidFill>
+            <a:srgbClr val="16395A"/>
+          </a:solidFill>
+          <a:ln w="12700">
+            <a:solidFill>
+              <a:srgbClr val="1C7293"/>
+            </a:solidFill>
+            <a:prstDash val="solid"/>
+          </a:ln>
+        </p:spPr>
+        <p:txBody>
+          <a:bodyPr/>
+          <a:lstStyle/>
+          <a:p>
+            <a:endParaRPr lang="tr-TR"/>
+          </a:p>
+        </p:txBody>
+      </p:sp>
+      <p:sp>
+        <p:nvSpPr>
+          <p:cNvPr id="24" name="Text 22"/>
+          <p:cNvSpPr/>
+          <p:nvPr/>
+        </p:nvSpPr>
+        <p:spPr>
+          <a:xfrm>
+            <a:off x="6510528" y="4087368"/>
+            <a:ext cx="2496312" cy="868680"/>
+          </a:xfrm>
+          <a:prstGeom prst="rect">
+            <a:avLst/>
+          </a:prstGeom>
+          <a:noFill/>
+          <a:ln/>
+        </p:spPr>
+        <p:txBody>
+          <a:bodyPr wrap="square" rtlCol="0" anchor="ctr"/>
+          <a:lstStyle/>
+          <a:p>
+            <a:pPr marL="0" indent="0" algn="ctr">
+              <a:buNone/>
+            </a:pPr>
+            <a:r>
+              <a:rPr lang="en-US" sz="3800" b="1" dirty="0">
+                <a:solidFill>
+                  <a:srgbClr val="02C39A"/>
+                </a:solidFill>
+                <a:latin typeface="Trebuchet MS" pitchFamily="34" charset="0"/>
+                <a:ea typeface="Trebuchet MS" pitchFamily="34" charset="-122"/>
+                <a:cs typeface="Trebuchet MS" pitchFamily="34" charset="-120"/>
+              </a:rPr>
+              <a:t>3</a:t>
+            </a:r>
+            <a:endParaRPr lang="en-US" sz="3800" dirty="0"/>
+          </a:p>
+        </p:txBody>
+      </p:sp>
+      <p:sp>
+        <p:nvSpPr>
+          <p:cNvPr id="25" name="Text 23"/>
+          <p:cNvSpPr/>
+          <p:nvPr/>
+        </p:nvSpPr>
+        <p:spPr>
+          <a:xfrm>
+            <a:off x="6556248" y="4983480"/>
+            <a:ext cx="2404872" cy="640080"/>
+          </a:xfrm>
+          <a:prstGeom prst="rect">
+            <a:avLst/>
+          </a:prstGeom>
+          <a:noFill/>
+          <a:ln/>
+        </p:spPr>
+        <p:txBody>
+          <a:bodyPr wrap="square" rtlCol="0" anchor="ctr"/>
+          <a:lstStyle/>
+          <a:p>
+            <a:pPr marL="0" indent="0" algn="ctr">
+              <a:lnSpc>
+                <a:spcPct val="105000"/>
+              </a:lnSpc>
+              <a:buNone/>
+            </a:pPr>
+            <a:r>
+              <a:rPr lang="en-US" sz="1300" dirty="0">
+                <a:solidFill>
+                  <a:srgbClr val="CADCFC"/>
+                </a:solidFill>
+                <a:latin typeface="Calibri" pitchFamily="34" charset="0"/>
+                <a:ea typeface="Calibri" pitchFamily="34" charset="-122"/>
+                <a:cs typeface="Calibri" pitchFamily="34" charset="-120"/>
+              </a:rPr>
+              <a:t>Grafana paneli</a:t>
+            </a:r>
+            <a:endParaRPr lang="en-US" sz="1300" dirty="0"/>
+          </a:p>
+        </p:txBody>
+      </p:sp>
+      <p:sp>
+        <p:nvSpPr>
+          <p:cNvPr id="26" name="Shape 24"/>
+          <p:cNvSpPr/>
+          <p:nvPr/>
+        </p:nvSpPr>
+        <p:spPr>
+          <a:xfrm>
+            <a:off x="9354312" y="3794760"/>
+            <a:ext cx="2679192" cy="1920240"/>
+          </a:xfrm>
+          <a:prstGeom prst="roundRect">
+            <a:avLst>
+              <a:gd name="adj" fmla="val 3810"/>
+            </a:avLst>
+          </a:prstGeom>
+          <a:solidFill>
+            <a:srgbClr val="16395A"/>
+          </a:solidFill>
+          <a:ln w="12700">
+            <a:solidFill>
+              <a:srgbClr val="1C7293"/>
+            </a:solidFill>
+            <a:prstDash val="solid"/>
+          </a:ln>
+        </p:spPr>
+        <p:txBody>
+          <a:bodyPr/>
+          <a:lstStyle/>
+          <a:p>
+            <a:endParaRPr lang="tr-TR"/>
+          </a:p>
+        </p:txBody>
+      </p:sp>
+      <p:sp>
+        <p:nvSpPr>
+          <p:cNvPr id="27" name="Text 25"/>
+          <p:cNvSpPr/>
+          <p:nvPr/>
+        </p:nvSpPr>
+        <p:spPr>
+          <a:xfrm>
+            <a:off x="9445752" y="4087368"/>
+            <a:ext cx="2496312" cy="868680"/>
+          </a:xfrm>
+          <a:prstGeom prst="rect">
+            <a:avLst/>
+          </a:prstGeom>
+          <a:noFill/>
+          <a:ln/>
+        </p:spPr>
+        <p:txBody>
+          <a:bodyPr wrap="square" rtlCol="0" anchor="ctr"/>
+          <a:lstStyle/>
+          <a:p>
+            <a:pPr marL="0" indent="0" algn="ctr">
+              <a:buNone/>
+            </a:pPr>
+            <a:r>
+              <a:rPr lang="en-US" sz="3800" b="1" dirty="0">
+                <a:solidFill>
+                  <a:srgbClr val="02C39A"/>
+                </a:solidFill>
+                <a:latin typeface="Trebuchet MS" pitchFamily="34" charset="0"/>
+                <a:ea typeface="Trebuchet MS" pitchFamily="34" charset="-122"/>
+                <a:cs typeface="Trebuchet MS" pitchFamily="34" charset="-120"/>
+              </a:rPr>
+              <a:t>+5</a:t>
+            </a:r>
+            <a:endParaRPr lang="en-US" sz="3800" dirty="0"/>
+          </a:p>
+        </p:txBody>
+      </p:sp>
+      <p:sp>
+        <p:nvSpPr>
+          <p:cNvPr id="28" name="Text 26"/>
+          <p:cNvSpPr/>
+          <p:nvPr/>
+        </p:nvSpPr>
+        <p:spPr>
+          <a:xfrm>
+            <a:off x="9491472" y="4983480"/>
+            <a:ext cx="2404872" cy="640080"/>
+          </a:xfrm>
+          <a:prstGeom prst="rect">
+            <a:avLst/>
+          </a:prstGeom>
+          <a:noFill/>
+          <a:ln/>
+        </p:spPr>
+        <p:txBody>
+          <a:bodyPr wrap="square" rtlCol="0" anchor="ctr"/>
+          <a:lstStyle/>
+          <a:p>
+            <a:pPr marL="0" indent="0" algn="ctr">
+              <a:lnSpc>
+                <a:spcPct val="105000"/>
+              </a:lnSpc>
+              <a:buNone/>
+            </a:pPr>
+            <a:r>
+              <a:rPr lang="en-US" sz="1300" dirty="0">
+                <a:solidFill>
+                  <a:srgbClr val="CADCFC"/>
+                </a:solidFill>
+                <a:latin typeface="Calibri" pitchFamily="34" charset="0"/>
+                <a:ea typeface="Calibri" pitchFamily="34" charset="-122"/>
+                <a:cs typeface="Calibri" pitchFamily="34" charset="-120"/>
+              </a:rPr>
+              <a:t>OpenTelemetry bonus</a:t>
+            </a:r>
+            <a:endParaRPr lang="en-US" sz="1300" dirty="0"/>
+          </a:p>
+        </p:txBody>
+      </p:sp>
+    </p:spTree>
+  </p:cSld>
+  <p:clrMapOvr>
+    <a:masterClrMapping/>
+  </p:clrMapOvr>
+</p:sld>
+</file>
+
+<file path=ppt/slides/slide9.xml><?xml version="1.0" encoding="utf-8"?>
+<p:sld xmlns:a="http://schemas.openxmlformats.org/drawingml/2006/main" xmlns:r="http://schemas.openxmlformats.org/officeDocument/2006/relationships" xmlns:p="http://schemas.openxmlformats.org/presentationml/2006/main">
+  <p:cSld name="Slide 8">
+    <p:bg>
+      <p:bgPr>
+        <a:solidFill>
+          <a:srgbClr val="0F2C44"/>
+        </a:solidFill>
+        <a:effectLst/>
+      </p:bgPr>
+    </p:bg>
+    <p:spTree>
+      <p:nvGrpSpPr>
+        <p:cNvPr id="1" name=""/>
+        <p:cNvGrpSpPr/>
+        <p:nvPr/>
+      </p:nvGrpSpPr>
+      <p:grpSpPr>
+        <a:xfrm>
+          <a:off x="0" y="0"/>
+          <a:ext cx="0" cy="0"/>
+          <a:chOff x="0" y="0"/>
+          <a:chExt cx="0" cy="0"/>
+        </a:xfrm>
+      </p:grpSpPr>
+      <p:sp>
+        <p:nvSpPr>
+          <p:cNvPr id="2" name="Shape 0"/>
+          <p:cNvSpPr/>
+          <p:nvPr/>
+        </p:nvSpPr>
+        <p:spPr>
+          <a:xfrm>
+            <a:off x="0" y="0"/>
             <a:ext cx="164592" cy="6858000"/>
           </a:xfrm>
           <a:prstGeom prst="rect">
@@ -6981,6 +6972,13 @@
           </a:solidFill>
           <a:ln/>
         </p:spPr>
+        <p:txBody>
+          <a:bodyPr/>
+          <a:lstStyle/>
+          <a:p>
+            <a:endParaRPr lang="tr-TR"/>
+          </a:p>
+        </p:txBody>
       </p:sp>
       <p:sp>
         <p:nvSpPr>
@@ -7003,11 +7001,11 @@
           <a:bodyPr wrap="square" rtlCol="0" anchor="ctr"/>
           <a:lstStyle/>
           <a:p>
-            <a:pPr indent="0" marL="0">
-              <a:buNone/>
-            </a:pPr>
-            <a:r>
-              <a:rPr lang="en-US" sz="1200" b="1" spc="200" kern="0" dirty="0">
+            <a:pPr marL="0" indent="0">
+              <a:buNone/>
+            </a:pPr>
+            <a:r>
+              <a:rPr lang="en-US" sz="1200" b="1" kern="0" spc="200" dirty="0">
                 <a:solidFill>
                   <a:srgbClr val="02C39A"/>
                 </a:solidFill>
@@ -7042,7 +7040,7 @@
           <a:bodyPr wrap="square" rtlCol="0" anchor="ctr"/>
           <a:lstStyle/>
           <a:p>
-            <a:pPr indent="0" marL="0">
+            <a:pPr marL="0" indent="0">
               <a:buNone/>
             </a:pPr>
             <a:r>
@@ -7081,11 +7079,11 @@
           <a:bodyPr wrap="square" rtlCol="0" anchor="ctr"/>
           <a:lstStyle/>
           <a:p>
-            <a:pPr indent="0" marL="0">
-              <a:buNone/>
-            </a:pPr>
-            <a:r>
-              <a:rPr lang="en-US" sz="1300" b="1" spc="100" kern="0" dirty="0">
+            <a:pPr marL="0" indent="0">
+              <a:buNone/>
+            </a:pPr>
+            <a:r>
+              <a:rPr lang="en-US" sz="1300" b="1" kern="0" spc="100" dirty="0">
                 <a:solidFill>
                   <a:srgbClr val="02C39A"/>
                 </a:solidFill>
@@ -7140,48 +7138,8 @@
                 <a:cs typeface="Calibri" pitchFamily="34" charset="-120"/>
               </a:rPr>
               <a:t>Testcontainers ile gerçek PostgreSQL — mock'tan daha güvenilir integration testi.
-</a:t>
-            </a:r>
-            <a:pPr indent="0" marL="0">
-              <a:lnSpc>
-                <a:spcPct val="120000"/>
-              </a:lnSpc>
-              <a:spcAft>
-                <a:spcPts val="1000"/>
-              </a:spcAft>
-              <a:buNone/>
-            </a:pPr>
-            <a:r>
-              <a:rPr lang="en-US" sz="1600" dirty="0">
-                <a:solidFill>
-                  <a:srgbClr val="FFFFFF"/>
-                </a:solidFill>
-                <a:latin typeface="Calibri" pitchFamily="34" charset="0"/>
-                <a:ea typeface="Calibri" pitchFamily="34" charset="-122"/>
-                <a:cs typeface="Calibri" pitchFamily="34" charset="-120"/>
-              </a:rPr>
-              <a:t>Factory Boy + Faker — gerçekçi, bakımı kolay test verisi suite genelinde.
-</a:t>
-            </a:r>
-            <a:pPr indent="0" marL="0">
-              <a:lnSpc>
-                <a:spcPct val="120000"/>
-              </a:lnSpc>
-              <a:spcAft>
-                <a:spcPts val="1000"/>
-              </a:spcAft>
-              <a:buNone/>
-            </a:pPr>
-            <a:r>
-              <a:rPr lang="en-US" sz="1600" dirty="0">
-                <a:solidFill>
-                  <a:srgbClr val="FFFFFF"/>
-                </a:solidFill>
-                <a:latin typeface="Calibri" pitchFamily="34" charset="0"/>
-                <a:ea typeface="Calibri" pitchFamily="34" charset="-122"/>
-                <a:cs typeface="Calibri" pitchFamily="34" charset="-120"/>
-              </a:rPr>
-              <a:t>Metrik + trace birlikte — latency spike'ında doğrudan span'e inmek.</a:t>
+Factory Boy + Faker — gerçekçi, bakımı kolay test verisi suite genelinde.
+Metrik + trace birlikte — latency spike'ında doğrudan span'e inmek.</a:t>
             </a:r>
             <a:endParaRPr lang="en-US" sz="1600" dirty="0"/>
           </a:p>
@@ -7208,11 +7166,11 @@
           <a:bodyPr wrap="square" rtlCol="0" anchor="ctr"/>
           <a:lstStyle/>
           <a:p>
-            <a:pPr indent="0" marL="0">
-              <a:buNone/>
-            </a:pPr>
-            <a:r>
-              <a:rPr lang="en-US" sz="1300" b="1" spc="100" kern="0" dirty="0">
+            <a:pPr marL="0" indent="0">
+              <a:buNone/>
+            </a:pPr>
+            <a:r>
+              <a:rPr lang="en-US" sz="1300" b="1" kern="0" spc="100" dirty="0">
                 <a:solidFill>
                   <a:srgbClr val="02C39A"/>
                 </a:solidFill>
@@ -7267,48 +7225,8 @@
                 <a:cs typeface="Calibri" pitchFamily="34" charset="-120"/>
               </a:rPr>
               <a:t>Async SQLAlchemy + fixture yaşam döngüsü ile test izolasyonu.
-</a:t>
-            </a:r>
-            <a:pPr indent="0" marL="0">
-              <a:lnSpc>
-                <a:spcPct val="120000"/>
-              </a:lnSpc>
-              <a:spcAft>
-                <a:spcPts val="1000"/>
-              </a:spcAft>
-              <a:buNone/>
-            </a:pPr>
-            <a:r>
-              <a:rPr lang="en-US" sz="1600" dirty="0">
-                <a:solidFill>
-                  <a:srgbClr val="FFFFFF"/>
-                </a:solidFill>
-                <a:latin typeface="Calibri" pitchFamily="34" charset="0"/>
-                <a:ea typeface="Calibri" pitchFamily="34" charset="-122"/>
-                <a:cs typeface="Calibri" pitchFamily="34" charset="-120"/>
-              </a:rPr>
-              <a:t>Test gürültüsü/dayanıklılık: OTel'i test'te kapatmak, LocalStack'i Docker yoksa skip etmek.
-</a:t>
-            </a:r>
-            <a:pPr indent="0" marL="0">
-              <a:lnSpc>
-                <a:spcPct val="120000"/>
-              </a:lnSpc>
-              <a:spcAft>
-                <a:spcPts val="1000"/>
-              </a:spcAft>
-              <a:buNone/>
-            </a:pPr>
-            <a:r>
-              <a:rPr lang="en-US" sz="1600" dirty="0">
-                <a:solidFill>
-                  <a:srgbClr val="FFFFFF"/>
-                </a:solidFill>
-                <a:latin typeface="Calibri" pitchFamily="34" charset="0"/>
-                <a:ea typeface="Calibri" pitchFamily="34" charset="-122"/>
-                <a:cs typeface="Calibri" pitchFamily="34" charset="-120"/>
-              </a:rPr>
-              <a:t>CI'da gerçek Minikube deploy + E2E/k6 otomasyonu (canlı stack + seed).</a:t>
+Test gürültüsü/dayanıklılık: OTel'i test'te kapatmak, LocalStack'i Docker yoksa skip etmek.
+CI'da gerçek Minikube deploy + E2E/k6 otomasyonu (canlı stack + seed).</a:t>
             </a:r>
             <a:endParaRPr lang="en-US" sz="1600" dirty="0"/>
           </a:p>
@@ -7336,6 +7254,13 @@
             <a:prstDash val="solid"/>
           </a:ln>
         </p:spPr>
+        <p:txBody>
+          <a:bodyPr/>
+          <a:lstStyle/>
+          <a:p>
+            <a:endParaRPr lang="tr-TR"/>
+          </a:p>
+        </p:txBody>
       </p:sp>
       <p:sp>
         <p:nvSpPr>
@@ -7358,7 +7283,7 @@
           <a:bodyPr wrap="square" rtlCol="0" anchor="ctr"/>
           <a:lstStyle/>
           <a:p>
-            <a:pPr indent="0" marL="0">
+            <a:pPr marL="0" indent="0">
               <a:buNone/>
             </a:pPr>
             <a:r>
@@ -7397,7 +7322,7 @@
           <a:bodyPr wrap="square" rtlCol="0" anchor="ctr"/>
           <a:lstStyle/>
           <a:p>
-            <a:pPr algn="r" indent="0" marL="0">
+            <a:pPr marL="0" indent="0" algn="r">
               <a:buNone/>
             </a:pPr>
             <a:r>
@@ -7716,4 +7641,319 @@
     </a:ext>
   </a:extLst>
 </a:theme>
+</file>
+
+<file path=ppt/theme/theme2.xml><?xml version="1.0" encoding="utf-8"?>
+<a:theme xmlns:a="http://schemas.openxmlformats.org/drawingml/2006/main" name="Office Teması">
+  <a:themeElements>
+    <a:clrScheme name="Office">
+      <a:dk1>
+        <a:sysClr val="windowText" lastClr="000000"/>
+      </a:dk1>
+      <a:lt1>
+        <a:sysClr val="window" lastClr="FFFFFF"/>
+      </a:lt1>
+      <a:dk2>
+        <a:srgbClr val="0E2841"/>
+      </a:dk2>
+      <a:lt2>
+        <a:srgbClr val="E8E8E8"/>
+      </a:lt2>
+      <a:accent1>
+        <a:srgbClr val="156082"/>
+      </a:accent1>
+      <a:accent2>
+        <a:srgbClr val="E97132"/>
+      </a:accent2>
+      <a:accent3>
+        <a:srgbClr val="196B24"/>
+      </a:accent3>
+      <a:accent4>
+        <a:srgbClr val="0F9ED5"/>
+      </a:accent4>
+      <a:accent5>
+        <a:srgbClr val="A02B93"/>
+      </a:accent5>
+      <a:accent6>
+        <a:srgbClr val="4EA72E"/>
+      </a:accent6>
+      <a:hlink>
+        <a:srgbClr val="467886"/>
+      </a:hlink>
+      <a:folHlink>
+        <a:srgbClr val="96607D"/>
+      </a:folHlink>
+    </a:clrScheme>
+    <a:fontScheme name="Office">
+      <a:majorFont>
+        <a:latin typeface="Aptos Display" panose="02110004020202020204"/>
+        <a:ea typeface=""/>
+        <a:cs typeface=""/>
+        <a:font script="Jpan" typeface="游ゴシック Light"/>
+        <a:font script="Hang" typeface="맑은 고딕"/>
+        <a:font script="Hans" typeface="等线 Light"/>
+        <a:font script="Hant" typeface="新細明體"/>
+        <a:font script="Arab" typeface="Times New Roman"/>
+        <a:font script="Hebr" typeface="Times New Roman"/>
+        <a:font script="Thai" typeface="Angsana New"/>
+        <a:font script="Ethi" typeface="Nyala"/>
+        <a:font script="Beng" typeface="Vrinda"/>
+        <a:font script="Gujr" typeface="Shruti"/>
+        <a:font script="Khmr" typeface="MoolBoran"/>
+        <a:font script="Knda" typeface="Tunga"/>
+        <a:font script="Guru" typeface="Raavi"/>
+        <a:font script="Cans" typeface="Euphemia"/>
+        <a:font script="Cher" typeface="Plantagenet Cherokee"/>
+        <a:font script="Yiii" typeface="Microsoft Yi Baiti"/>
+        <a:font script="Tibt" typeface="Microsoft Himalaya"/>
+        <a:font script="Thaa" typeface="MV Boli"/>
+        <a:font script="Deva" typeface="Mangal"/>
+        <a:font script="Telu" typeface="Gautami"/>
+        <a:font script="Taml" typeface="Latha"/>
+        <a:font script="Syrc" typeface="Estrangelo Edessa"/>
+        <a:font script="Orya" typeface="Kalinga"/>
+        <a:font script="Mlym" typeface="Kartika"/>
+        <a:font script="Laoo" typeface="DokChampa"/>
+        <a:font script="Sinh" typeface="Iskoola Pota"/>
+        <a:font script="Mong" typeface="Mongolian Baiti"/>
+        <a:font script="Viet" typeface="Times New Roman"/>
+        <a:font script="Uigh" typeface="Microsoft Uighur"/>
+        <a:font script="Geor" typeface="Sylfaen"/>
+        <a:font script="Armn" typeface="Arial"/>
+        <a:font script="Bugi" typeface="Leelawadee UI"/>
+        <a:font script="Bopo" typeface="Microsoft JhengHei"/>
+        <a:font script="Java" typeface="Javanese Text"/>
+        <a:font script="Lisu" typeface="Segoe UI"/>
+        <a:font script="Mymr" typeface="Myanmar Text"/>
+        <a:font script="Nkoo" typeface="Ebrima"/>
+        <a:font script="Olck" typeface="Nirmala UI"/>
+        <a:font script="Osma" typeface="Ebrima"/>
+        <a:font script="Phag" typeface="Phagspa"/>
+        <a:font script="Syrn" typeface="Estrangelo Edessa"/>
+        <a:font script="Syrj" typeface="Estrangelo Edessa"/>
+        <a:font script="Syre" typeface="Estrangelo Edessa"/>
+        <a:font script="Sora" typeface="Nirmala UI"/>
+        <a:font script="Tale" typeface="Microsoft Tai Le"/>
+        <a:font script="Talu" typeface="Microsoft New Tai Lue"/>
+        <a:font script="Tfng" typeface="Ebrima"/>
+      </a:majorFont>
+      <a:minorFont>
+        <a:latin typeface="Aptos" panose="02110004020202020204"/>
+        <a:ea typeface=""/>
+        <a:cs typeface=""/>
+        <a:font script="Jpan" typeface="游ゴシック"/>
+        <a:font script="Hang" typeface="맑은 고딕"/>
+        <a:font script="Hans" typeface="等线"/>
+        <a:font script="Hant" typeface="新細明體"/>
+        <a:font script="Arab" typeface="Arial"/>
+        <a:font script="Hebr" typeface="Arial"/>
+        <a:font script="Thai" typeface="Cordia New"/>
+        <a:font script="Ethi" typeface="Nyala"/>
+        <a:font script="Beng" typeface="Vrinda"/>
+        <a:font script="Gujr" typeface="Shruti"/>
+        <a:font script="Khmr" typeface="DaunPenh"/>
+        <a:font script="Knda" typeface="Tunga"/>
+        <a:font script="Guru" typeface="Raavi"/>
+        <a:font script="Cans" typeface="Euphemia"/>
+        <a:font script="Cher" typeface="Plantagenet Cherokee"/>
+        <a:font script="Yiii" typeface="Microsoft Yi Baiti"/>
+        <a:font script="Tibt" typeface="Microsoft Himalaya"/>
+        <a:font script="Thaa" typeface="MV Boli"/>
+        <a:font script="Deva" typeface="Mangal"/>
+        <a:font script="Telu" typeface="Gautami"/>
+        <a:font script="Taml" typeface="Latha"/>
+        <a:font script="Syrc" typeface="Estrangelo Edessa"/>
+        <a:font script="Orya" typeface="Kalinga"/>
+        <a:font script="Mlym" typeface="Kartika"/>
+        <a:font script="Laoo" typeface="DokChampa"/>
+        <a:font script="Sinh" typeface="Iskoola Pota"/>
+        <a:font script="Mong" typeface="Mongolian Baiti"/>
+        <a:font script="Viet" typeface="Arial"/>
+        <a:font script="Uigh" typeface="Microsoft Uighur"/>
+        <a:font script="Geor" typeface="Sylfaen"/>
+        <a:font script="Armn" typeface="Arial"/>
+        <a:font script="Bugi" typeface="Leelawadee UI"/>
+        <a:font script="Bopo" typeface="Microsoft JhengHei"/>
+        <a:font script="Java" typeface="Javanese Text"/>
+        <a:font script="Lisu" typeface="Segoe UI"/>
+        <a:font script="Mymr" typeface="Myanmar Text"/>
+        <a:font script="Nkoo" typeface="Ebrima"/>
+        <a:font script="Olck" typeface="Nirmala UI"/>
+        <a:font script="Osma" typeface="Ebrima"/>
+        <a:font script="Phag" typeface="Phagspa"/>
+        <a:font script="Syrn" typeface="Estrangelo Edessa"/>
+        <a:font script="Syrj" typeface="Estrangelo Edessa"/>
+        <a:font script="Syre" typeface="Estrangelo Edessa"/>
+        <a:font script="Sora" typeface="Nirmala UI"/>
+        <a:font script="Tale" typeface="Microsoft Tai Le"/>
+        <a:font script="Talu" typeface="Microsoft New Tai Lue"/>
+        <a:font script="Tfng" typeface="Ebrima"/>
+      </a:minorFont>
+    </a:fontScheme>
+    <a:fmtScheme name="Office">
+      <a:fillStyleLst>
+        <a:solidFill>
+          <a:schemeClr val="phClr"/>
+        </a:solidFill>
+        <a:gradFill rotWithShape="1">
+          <a:gsLst>
+            <a:gs pos="0">
+              <a:schemeClr val="phClr">
+                <a:lumMod val="110000"/>
+                <a:satMod val="105000"/>
+                <a:tint val="67000"/>
+              </a:schemeClr>
+            </a:gs>
+            <a:gs pos="50000">
+              <a:schemeClr val="phClr">
+                <a:lumMod val="105000"/>
+                <a:satMod val="103000"/>
+                <a:tint val="73000"/>
+              </a:schemeClr>
+            </a:gs>
+            <a:gs pos="100000">
+              <a:schemeClr val="phClr">
+                <a:lumMod val="105000"/>
+                <a:satMod val="109000"/>
+                <a:tint val="81000"/>
+              </a:schemeClr>
+            </a:gs>
+          </a:gsLst>
+          <a:lin ang="5400000" scaled="0"/>
+        </a:gradFill>
+        <a:gradFill rotWithShape="1">
+          <a:gsLst>
+            <a:gs pos="0">
+              <a:schemeClr val="phClr">
+                <a:satMod val="103000"/>
+                <a:lumMod val="102000"/>
+                <a:tint val="94000"/>
+              </a:schemeClr>
+            </a:gs>
+            <a:gs pos="50000">
+              <a:schemeClr val="phClr">
+                <a:satMod val="110000"/>
+                <a:lumMod val="100000"/>
+                <a:shade val="100000"/>
+              </a:schemeClr>
+            </a:gs>
+            <a:gs pos="100000">
+              <a:schemeClr val="phClr">
+                <a:lumMod val="99000"/>
+                <a:satMod val="120000"/>
+                <a:shade val="78000"/>
+              </a:schemeClr>
+            </a:gs>
+          </a:gsLst>
+          <a:lin ang="5400000" scaled="0"/>
+        </a:gradFill>
+      </a:fillStyleLst>
+      <a:lnStyleLst>
+        <a:ln w="12700" cap="flat" cmpd="sng" algn="ctr">
+          <a:solidFill>
+            <a:schemeClr val="phClr"/>
+          </a:solidFill>
+          <a:prstDash val="solid"/>
+          <a:miter lim="800000"/>
+        </a:ln>
+        <a:ln w="19050" cap="flat" cmpd="sng" algn="ctr">
+          <a:solidFill>
+            <a:schemeClr val="phClr"/>
+          </a:solidFill>
+          <a:prstDash val="solid"/>
+          <a:miter lim="800000"/>
+        </a:ln>
+        <a:ln w="25400" cap="flat" cmpd="sng" algn="ctr">
+          <a:solidFill>
+            <a:schemeClr val="phClr"/>
+          </a:solidFill>
+          <a:prstDash val="solid"/>
+          <a:miter lim="800000"/>
+        </a:ln>
+      </a:lnStyleLst>
+      <a:effectStyleLst>
+        <a:effectStyle>
+          <a:effectLst/>
+        </a:effectStyle>
+        <a:effectStyle>
+          <a:effectLst/>
+        </a:effectStyle>
+        <a:effectStyle>
+          <a:effectLst>
+            <a:outerShdw blurRad="57150" dist="19050" dir="5400000" algn="ctr" rotWithShape="0">
+              <a:srgbClr val="000000">
+                <a:alpha val="63000"/>
+              </a:srgbClr>
+            </a:outerShdw>
+          </a:effectLst>
+        </a:effectStyle>
+      </a:effectStyleLst>
+      <a:bgFillStyleLst>
+        <a:solidFill>
+          <a:schemeClr val="phClr"/>
+        </a:solidFill>
+        <a:solidFill>
+          <a:schemeClr val="phClr">
+            <a:tint val="95000"/>
+            <a:satMod val="170000"/>
+          </a:schemeClr>
+        </a:solidFill>
+        <a:gradFill rotWithShape="1">
+          <a:gsLst>
+            <a:gs pos="0">
+              <a:schemeClr val="phClr">
+                <a:tint val="93000"/>
+                <a:satMod val="150000"/>
+                <a:shade val="98000"/>
+                <a:lumMod val="102000"/>
+              </a:schemeClr>
+            </a:gs>
+            <a:gs pos="50000">
+              <a:schemeClr val="phClr">
+                <a:tint val="98000"/>
+                <a:satMod val="130000"/>
+                <a:shade val="90000"/>
+                <a:lumMod val="103000"/>
+              </a:schemeClr>
+            </a:gs>
+            <a:gs pos="100000">
+              <a:schemeClr val="phClr">
+                <a:shade val="63000"/>
+                <a:satMod val="120000"/>
+              </a:schemeClr>
+            </a:gs>
+          </a:gsLst>
+          <a:lin ang="5400000" scaled="0"/>
+        </a:gradFill>
+      </a:bgFillStyleLst>
+    </a:fmtScheme>
+  </a:themeElements>
+  <a:objectDefaults>
+    <a:lnDef>
+      <a:spPr/>
+      <a:bodyPr/>
+      <a:lstStyle/>
+      <a:style>
+        <a:lnRef idx="2">
+          <a:schemeClr val="accent1"/>
+        </a:lnRef>
+        <a:fillRef idx="0">
+          <a:schemeClr val="accent1"/>
+        </a:fillRef>
+        <a:effectRef idx="1">
+          <a:schemeClr val="accent1"/>
+        </a:effectRef>
+        <a:fontRef idx="minor">
+          <a:schemeClr val="tx1"/>
+        </a:fontRef>
+      </a:style>
+    </a:lnDef>
+  </a:objectDefaults>
+  <a:extraClrSchemeLst/>
+  <a:extLst>
+    <a:ext uri="{05A4C25C-085E-4340-85A3-A5531E510DB2}">
+      <thm15:themeFamily xmlns:thm15="http://schemas.microsoft.com/office/thememl/2012/main" name="Office Theme" id="{2E142A2C-CD16-42D6-873A-C26D2A0506FA}" vid="{1BDDFF52-6CD6-40A5-AB3C-68EB2F1E4D0A}"/>
+    </a:ext>
+  </a:extLst>
+</a:theme>
 </file>